--- a/formation/Didikids_Parc_Guide_Agent.pptx
+++ b/formation/Didikids_Parc_Guide_Agent.pptx
@@ -5118,21 +5118,19 @@
         </p:nvSpPr>
         <p:spPr>
           <a:xfrm>
-            <a:off x="685800" y="1874519"/>
-            <a:ext cx="6400800" cy="4114800"/>
+            <a:off x="1352570" y="1920239"/>
+            <a:ext cx="4774650" cy="4206240"/>
           </a:xfrm>
           <a:prstGeom prst="roundRect">
             <a:avLst>
-              <a:gd name="adj" fmla="val 5000"/>
+              <a:gd name="adj" fmla="val 2000"/>
             </a:avLst>
           </a:prstGeom>
           <a:solidFill>
-            <a:srgbClr val="FFFFFF"/>
+            <a:srgbClr val="E6EEE7"/>
           </a:solidFill>
-          <a:ln w="19050">
-            <a:solidFill>
-              <a:srgbClr val="D3E4D5"/>
-            </a:solidFill>
+          <a:ln>
+            <a:noFill/>
           </a:ln>
           <a:effectLst/>
         </p:spPr>
@@ -5158,756 +5156,40 @@
           </a:p>
         </p:txBody>
       </p:sp>
-      <p:sp>
-        <p:nvSpPr>
-          <p:cNvPr id="6" name="TextBox 5"/>
-          <p:cNvSpPr txBox="1"/>
-          <p:nvPr/>
-        </p:nvSpPr>
-        <p:spPr>
-          <a:xfrm>
-            <a:off x="960120" y="2103120"/>
-            <a:ext cx="3657600" cy="320040"/>
-          </a:xfrm>
-          <a:prstGeom prst="rect">
-            <a:avLst/>
-          </a:prstGeom>
-          <a:noFill/>
-        </p:spPr>
-        <p:txBody>
-          <a:bodyPr wrap="square" lIns="0" rIns="0" tIns="0" bIns="0" anchor="t">
-            <a:spAutoFit/>
-          </a:bodyPr>
-          <a:lstStyle/>
-          <a:p>
-            <a:pPr algn="l">
-              <a:spcAft>
-                <a:spcPts val="500"/>
-              </a:spcAft>
-            </a:pPr>
-            <a:r>
-              <a:rPr sz="1700" b="1">
-                <a:solidFill>
-                  <a:srgbClr val="2A7A3B"/>
-                </a:solidFill>
-                <a:latin typeface="Calibri"/>
-              </a:rPr>
-              <a:t>Nouveau membre</a:t>
-            </a:r>
-          </a:p>
-        </p:txBody>
-      </p:sp>
-      <p:sp>
-        <p:nvSpPr>
-          <p:cNvPr id="7" name="TextBox 6"/>
-          <p:cNvSpPr txBox="1"/>
-          <p:nvPr/>
-        </p:nvSpPr>
-        <p:spPr>
-          <a:xfrm>
-            <a:off x="960120" y="2606040"/>
-            <a:ext cx="2834640" cy="182880"/>
-          </a:xfrm>
-          <a:prstGeom prst="rect">
-            <a:avLst/>
-          </a:prstGeom>
-          <a:noFill/>
-        </p:spPr>
-        <p:txBody>
-          <a:bodyPr wrap="square" lIns="0" rIns="0" tIns="0" bIns="0" anchor="t">
-            <a:spAutoFit/>
-          </a:bodyPr>
-          <a:lstStyle/>
-          <a:p>
-            <a:pPr algn="l">
-              <a:spcAft>
-                <a:spcPts val="0"/>
-              </a:spcAft>
-            </a:pPr>
-            <a:r>
-              <a:rPr sz="950" b="1">
-                <a:solidFill>
-                  <a:srgbClr val="7C8F7E"/>
-                </a:solidFill>
-                <a:latin typeface="Calibri"/>
-              </a:rPr>
-              <a:t>NOM DE L'ENFANT *</a:t>
-            </a:r>
-          </a:p>
-        </p:txBody>
-      </p:sp>
-      <p:sp>
-        <p:nvSpPr>
-          <p:cNvPr id="8" name="Rounded Rectangle 7"/>
+      <p:pic>
+        <p:nvPicPr>
+          <p:cNvPr id="6" name="Picture 5" descr="05_nouveau_membre.png"/>
+          <p:cNvPicPr>
+            <a:picLocks noChangeAspect="1"/>
+          </p:cNvPicPr>
+          <p:nvPr/>
+        </p:nvPicPr>
+        <p:blipFill>
+          <a:blip r:embed="rId2"/>
+          <a:stretch>
+            <a:fillRect/>
+          </a:stretch>
+        </p:blipFill>
+        <p:spPr>
+          <a:xfrm>
+            <a:off x="1315994" y="1874519"/>
+            <a:ext cx="4774650" cy="4206240"/>
+          </a:xfrm>
+          <a:prstGeom prst="rect">
+            <a:avLst/>
+          </a:prstGeom>
+        </p:spPr>
+      </p:pic>
+      <p:sp>
+        <p:nvSpPr>
+          <p:cNvPr id="7" name="Oval 6"/>
           <p:cNvSpPr/>
           <p:nvPr/>
         </p:nvSpPr>
         <p:spPr>
           <a:xfrm>
-            <a:off x="960120" y="2825496"/>
-            <a:ext cx="2834640" cy="347472"/>
-          </a:xfrm>
-          <a:prstGeom prst="roundRect">
-            <a:avLst>
-              <a:gd name="adj" fmla="val 25000"/>
-            </a:avLst>
-          </a:prstGeom>
-          <a:solidFill>
-            <a:srgbClr val="FFFFFF"/>
-          </a:solidFill>
-          <a:ln w="15875">
-            <a:solidFill>
-              <a:srgbClr val="D3E4D5"/>
-            </a:solidFill>
-          </a:ln>
-          <a:effectLst/>
-        </p:spPr>
-        <p:style>
-          <a:lnRef idx="1">
-            <a:schemeClr val="accent1"/>
-          </a:lnRef>
-          <a:fillRef idx="3">
-            <a:schemeClr val="accent1"/>
-          </a:fillRef>
-          <a:effectRef idx="2">
-            <a:schemeClr val="accent1"/>
-          </a:effectRef>
-          <a:fontRef idx="minor">
-            <a:schemeClr val="lt1"/>
-          </a:fontRef>
-        </p:style>
-        <p:txBody>
-          <a:bodyPr rtlCol="0" anchor="ctr"/>
-          <a:lstStyle/>
-          <a:p>
-            <a:pPr algn="ctr"/>
-          </a:p>
-        </p:txBody>
-      </p:sp>
-      <p:sp>
-        <p:nvSpPr>
-          <p:cNvPr id="9" name="TextBox 8"/>
-          <p:cNvSpPr txBox="1"/>
-          <p:nvPr/>
-        </p:nvSpPr>
-        <p:spPr>
-          <a:xfrm>
-            <a:off x="1088136" y="2907791"/>
-            <a:ext cx="2578608" cy="201168"/>
-          </a:xfrm>
-          <a:prstGeom prst="rect">
-            <a:avLst/>
-          </a:prstGeom>
-          <a:noFill/>
-        </p:spPr>
-        <p:txBody>
-          <a:bodyPr wrap="square" lIns="0" rIns="0" tIns="0" bIns="0" anchor="t">
-            <a:spAutoFit/>
-          </a:bodyPr>
-          <a:lstStyle/>
-          <a:p>
-            <a:pPr algn="l">
-              <a:spcAft>
-                <a:spcPts val="0"/>
-              </a:spcAft>
-            </a:pPr>
-            <a:r>
-              <a:rPr sz="1150" b="0">
-                <a:solidFill>
-                  <a:srgbClr val="2D3A2E"/>
-                </a:solidFill>
-                <a:latin typeface="Calibri"/>
-              </a:rPr>
-              <a:t>Fatoumata Barry</a:t>
-            </a:r>
-          </a:p>
-        </p:txBody>
-      </p:sp>
-      <p:sp>
-        <p:nvSpPr>
-          <p:cNvPr id="10" name="TextBox 9"/>
-          <p:cNvSpPr txBox="1"/>
-          <p:nvPr/>
-        </p:nvSpPr>
-        <p:spPr>
-          <a:xfrm>
-            <a:off x="4069080" y="2606040"/>
-            <a:ext cx="2743200" cy="182880"/>
-          </a:xfrm>
-          <a:prstGeom prst="rect">
-            <a:avLst/>
-          </a:prstGeom>
-          <a:noFill/>
-        </p:spPr>
-        <p:txBody>
-          <a:bodyPr wrap="square" lIns="0" rIns="0" tIns="0" bIns="0" anchor="t">
-            <a:spAutoFit/>
-          </a:bodyPr>
-          <a:lstStyle/>
-          <a:p>
-            <a:pPr algn="l">
-              <a:spcAft>
-                <a:spcPts val="0"/>
-              </a:spcAft>
-            </a:pPr>
-            <a:r>
-              <a:rPr sz="950" b="1">
-                <a:solidFill>
-                  <a:srgbClr val="7C8F7E"/>
-                </a:solidFill>
-                <a:latin typeface="Calibri"/>
-              </a:rPr>
-              <a:t>DATE DE NAISSANCE</a:t>
-            </a:r>
-          </a:p>
-        </p:txBody>
-      </p:sp>
-      <p:sp>
-        <p:nvSpPr>
-          <p:cNvPr id="11" name="Rounded Rectangle 10"/>
-          <p:cNvSpPr/>
-          <p:nvPr/>
-        </p:nvSpPr>
-        <p:spPr>
-          <a:xfrm>
-            <a:off x="4069080" y="2825496"/>
-            <a:ext cx="2743200" cy="347472"/>
-          </a:xfrm>
-          <a:prstGeom prst="roundRect">
-            <a:avLst>
-              <a:gd name="adj" fmla="val 25000"/>
-            </a:avLst>
-          </a:prstGeom>
-          <a:solidFill>
-            <a:srgbClr val="FFFFFF"/>
-          </a:solidFill>
-          <a:ln w="15875">
-            <a:solidFill>
-              <a:srgbClr val="D3E4D5"/>
-            </a:solidFill>
-          </a:ln>
-          <a:effectLst/>
-        </p:spPr>
-        <p:style>
-          <a:lnRef idx="1">
-            <a:schemeClr val="accent1"/>
-          </a:lnRef>
-          <a:fillRef idx="3">
-            <a:schemeClr val="accent1"/>
-          </a:fillRef>
-          <a:effectRef idx="2">
-            <a:schemeClr val="accent1"/>
-          </a:effectRef>
-          <a:fontRef idx="minor">
-            <a:schemeClr val="lt1"/>
-          </a:fontRef>
-        </p:style>
-        <p:txBody>
-          <a:bodyPr rtlCol="0" anchor="ctr"/>
-          <a:lstStyle/>
-          <a:p>
-            <a:pPr algn="ctr"/>
-          </a:p>
-        </p:txBody>
-      </p:sp>
-      <p:sp>
-        <p:nvSpPr>
-          <p:cNvPr id="12" name="TextBox 11"/>
-          <p:cNvSpPr txBox="1"/>
-          <p:nvPr/>
-        </p:nvSpPr>
-        <p:spPr>
-          <a:xfrm>
-            <a:off x="4197096" y="2907791"/>
-            <a:ext cx="2487168" cy="201168"/>
-          </a:xfrm>
-          <a:prstGeom prst="rect">
-            <a:avLst/>
-          </a:prstGeom>
-          <a:noFill/>
-        </p:spPr>
-        <p:txBody>
-          <a:bodyPr wrap="square" lIns="0" rIns="0" tIns="0" bIns="0" anchor="t">
-            <a:spAutoFit/>
-          </a:bodyPr>
-          <a:lstStyle/>
-          <a:p>
-            <a:pPr algn="l">
-              <a:spcAft>
-                <a:spcPts val="0"/>
-              </a:spcAft>
-            </a:pPr>
-            <a:r>
-              <a:rPr sz="1150" b="0">
-                <a:solidFill>
-                  <a:srgbClr val="2D3A2E"/>
-                </a:solidFill>
-                <a:latin typeface="Calibri"/>
-              </a:rPr>
-              <a:t>14/03/2020</a:t>
-            </a:r>
-          </a:p>
-        </p:txBody>
-      </p:sp>
-      <p:sp>
-        <p:nvSpPr>
-          <p:cNvPr id="13" name="TextBox 12"/>
-          <p:cNvSpPr txBox="1"/>
-          <p:nvPr/>
-        </p:nvSpPr>
-        <p:spPr>
-          <a:xfrm>
-            <a:off x="960120" y="3429000"/>
-            <a:ext cx="2834640" cy="182880"/>
-          </a:xfrm>
-          <a:prstGeom prst="rect">
-            <a:avLst/>
-          </a:prstGeom>
-          <a:noFill/>
-        </p:spPr>
-        <p:txBody>
-          <a:bodyPr wrap="square" lIns="0" rIns="0" tIns="0" bIns="0" anchor="t">
-            <a:spAutoFit/>
-          </a:bodyPr>
-          <a:lstStyle/>
-          <a:p>
-            <a:pPr algn="l">
-              <a:spcAft>
-                <a:spcPts val="0"/>
-              </a:spcAft>
-            </a:pPr>
-            <a:r>
-              <a:rPr sz="950" b="1">
-                <a:solidFill>
-                  <a:srgbClr val="7C8F7E"/>
-                </a:solidFill>
-                <a:latin typeface="Calibri"/>
-              </a:rPr>
-              <a:t>NOM DU PARENT</a:t>
-            </a:r>
-          </a:p>
-        </p:txBody>
-      </p:sp>
-      <p:sp>
-        <p:nvSpPr>
-          <p:cNvPr id="14" name="Rounded Rectangle 13"/>
-          <p:cNvSpPr/>
-          <p:nvPr/>
-        </p:nvSpPr>
-        <p:spPr>
-          <a:xfrm>
-            <a:off x="960120" y="3648456"/>
-            <a:ext cx="2834640" cy="347472"/>
-          </a:xfrm>
-          <a:prstGeom prst="roundRect">
-            <a:avLst>
-              <a:gd name="adj" fmla="val 25000"/>
-            </a:avLst>
-          </a:prstGeom>
-          <a:solidFill>
-            <a:srgbClr val="FFFFFF"/>
-          </a:solidFill>
-          <a:ln w="15875">
-            <a:solidFill>
-              <a:srgbClr val="D3E4D5"/>
-            </a:solidFill>
-          </a:ln>
-          <a:effectLst/>
-        </p:spPr>
-        <p:style>
-          <a:lnRef idx="1">
-            <a:schemeClr val="accent1"/>
-          </a:lnRef>
-          <a:fillRef idx="3">
-            <a:schemeClr val="accent1"/>
-          </a:fillRef>
-          <a:effectRef idx="2">
-            <a:schemeClr val="accent1"/>
-          </a:effectRef>
-          <a:fontRef idx="minor">
-            <a:schemeClr val="lt1"/>
-          </a:fontRef>
-        </p:style>
-        <p:txBody>
-          <a:bodyPr rtlCol="0" anchor="ctr"/>
-          <a:lstStyle/>
-          <a:p>
-            <a:pPr algn="ctr"/>
-          </a:p>
-        </p:txBody>
-      </p:sp>
-      <p:sp>
-        <p:nvSpPr>
-          <p:cNvPr id="15" name="TextBox 14"/>
-          <p:cNvSpPr txBox="1"/>
-          <p:nvPr/>
-        </p:nvSpPr>
-        <p:spPr>
-          <a:xfrm>
-            <a:off x="1088136" y="3730752"/>
-            <a:ext cx="2578608" cy="201168"/>
-          </a:xfrm>
-          <a:prstGeom prst="rect">
-            <a:avLst/>
-          </a:prstGeom>
-          <a:noFill/>
-        </p:spPr>
-        <p:txBody>
-          <a:bodyPr wrap="square" lIns="0" rIns="0" tIns="0" bIns="0" anchor="t">
-            <a:spAutoFit/>
-          </a:bodyPr>
-          <a:lstStyle/>
-          <a:p>
-            <a:pPr algn="l">
-              <a:spcAft>
-                <a:spcPts val="0"/>
-              </a:spcAft>
-            </a:pPr>
-            <a:r>
-              <a:rPr sz="1150" b="0">
-                <a:solidFill>
-                  <a:srgbClr val="2D3A2E"/>
-                </a:solidFill>
-                <a:latin typeface="Calibri"/>
-              </a:rPr>
-              <a:t>Alpha Barry</a:t>
-            </a:r>
-          </a:p>
-        </p:txBody>
-      </p:sp>
-      <p:sp>
-        <p:nvSpPr>
-          <p:cNvPr id="16" name="TextBox 15"/>
-          <p:cNvSpPr txBox="1"/>
-          <p:nvPr/>
-        </p:nvSpPr>
-        <p:spPr>
-          <a:xfrm>
-            <a:off x="4069080" y="3429000"/>
-            <a:ext cx="2743200" cy="182880"/>
-          </a:xfrm>
-          <a:prstGeom prst="rect">
-            <a:avLst/>
-          </a:prstGeom>
-          <a:noFill/>
-        </p:spPr>
-        <p:txBody>
-          <a:bodyPr wrap="square" lIns="0" rIns="0" tIns="0" bIns="0" anchor="t">
-            <a:spAutoFit/>
-          </a:bodyPr>
-          <a:lstStyle/>
-          <a:p>
-            <a:pPr algn="l">
-              <a:spcAft>
-                <a:spcPts val="0"/>
-              </a:spcAft>
-            </a:pPr>
-            <a:r>
-              <a:rPr sz="950" b="1">
-                <a:solidFill>
-                  <a:srgbClr val="7C8F7E"/>
-                </a:solidFill>
-                <a:latin typeface="Calibri"/>
-              </a:rPr>
-              <a:t>TÉLÉPHONE</a:t>
-            </a:r>
-          </a:p>
-        </p:txBody>
-      </p:sp>
-      <p:sp>
-        <p:nvSpPr>
-          <p:cNvPr id="17" name="Rounded Rectangle 16"/>
-          <p:cNvSpPr/>
-          <p:nvPr/>
-        </p:nvSpPr>
-        <p:spPr>
-          <a:xfrm>
-            <a:off x="4069080" y="3648456"/>
-            <a:ext cx="2743200" cy="347472"/>
-          </a:xfrm>
-          <a:prstGeom prst="roundRect">
-            <a:avLst>
-              <a:gd name="adj" fmla="val 25000"/>
-            </a:avLst>
-          </a:prstGeom>
-          <a:solidFill>
-            <a:srgbClr val="FFFFFF"/>
-          </a:solidFill>
-          <a:ln w="15875">
-            <a:solidFill>
-              <a:srgbClr val="D3E4D5"/>
-            </a:solidFill>
-          </a:ln>
-          <a:effectLst/>
-        </p:spPr>
-        <p:style>
-          <a:lnRef idx="1">
-            <a:schemeClr val="accent1"/>
-          </a:lnRef>
-          <a:fillRef idx="3">
-            <a:schemeClr val="accent1"/>
-          </a:fillRef>
-          <a:effectRef idx="2">
-            <a:schemeClr val="accent1"/>
-          </a:effectRef>
-          <a:fontRef idx="minor">
-            <a:schemeClr val="lt1"/>
-          </a:fontRef>
-        </p:style>
-        <p:txBody>
-          <a:bodyPr rtlCol="0" anchor="ctr"/>
-          <a:lstStyle/>
-          <a:p>
-            <a:pPr algn="ctr"/>
-          </a:p>
-        </p:txBody>
-      </p:sp>
-      <p:sp>
-        <p:nvSpPr>
-          <p:cNvPr id="18" name="TextBox 17"/>
-          <p:cNvSpPr txBox="1"/>
-          <p:nvPr/>
-        </p:nvSpPr>
-        <p:spPr>
-          <a:xfrm>
-            <a:off x="4197096" y="3730752"/>
-            <a:ext cx="2487168" cy="201168"/>
-          </a:xfrm>
-          <a:prstGeom prst="rect">
-            <a:avLst/>
-          </a:prstGeom>
-          <a:noFill/>
-        </p:spPr>
-        <p:txBody>
-          <a:bodyPr wrap="square" lIns="0" rIns="0" tIns="0" bIns="0" anchor="t">
-            <a:spAutoFit/>
-          </a:bodyPr>
-          <a:lstStyle/>
-          <a:p>
-            <a:pPr algn="l">
-              <a:spcAft>
-                <a:spcPts val="0"/>
-              </a:spcAft>
-            </a:pPr>
-            <a:r>
-              <a:rPr sz="1150" b="0">
-                <a:solidFill>
-                  <a:srgbClr val="2D3A2E"/>
-                </a:solidFill>
-                <a:latin typeface="Calibri"/>
-              </a:rPr>
-              <a:t>628 44 55 66</a:t>
-            </a:r>
-          </a:p>
-        </p:txBody>
-      </p:sp>
-      <p:sp>
-        <p:nvSpPr>
-          <p:cNvPr id="19" name="TextBox 18"/>
-          <p:cNvSpPr txBox="1"/>
-          <p:nvPr/>
-        </p:nvSpPr>
-        <p:spPr>
-          <a:xfrm>
-            <a:off x="960120" y="4251960"/>
-            <a:ext cx="5852160" cy="182880"/>
-          </a:xfrm>
-          <a:prstGeom prst="rect">
-            <a:avLst/>
-          </a:prstGeom>
-          <a:noFill/>
-        </p:spPr>
-        <p:txBody>
-          <a:bodyPr wrap="square" lIns="0" rIns="0" tIns="0" bIns="0" anchor="t">
-            <a:spAutoFit/>
-          </a:bodyPr>
-          <a:lstStyle/>
-          <a:p>
-            <a:pPr algn="l">
-              <a:spcAft>
-                <a:spcPts val="0"/>
-              </a:spcAft>
-            </a:pPr>
-            <a:r>
-              <a:rPr sz="950" b="1">
-                <a:solidFill>
-                  <a:srgbClr val="7C8F7E"/>
-                </a:solidFill>
-                <a:latin typeface="Calibri"/>
-              </a:rPr>
-              <a:t>NOTES</a:t>
-            </a:r>
-          </a:p>
-        </p:txBody>
-      </p:sp>
-      <p:sp>
-        <p:nvSpPr>
-          <p:cNvPr id="20" name="Rounded Rectangle 19"/>
-          <p:cNvSpPr/>
-          <p:nvPr/>
-        </p:nvSpPr>
-        <p:spPr>
-          <a:xfrm>
-            <a:off x="960120" y="4471416"/>
-            <a:ext cx="5852160" cy="347472"/>
-          </a:xfrm>
-          <a:prstGeom prst="roundRect">
-            <a:avLst>
-              <a:gd name="adj" fmla="val 25000"/>
-            </a:avLst>
-          </a:prstGeom>
-          <a:solidFill>
-            <a:srgbClr val="FFFFFF"/>
-          </a:solidFill>
-          <a:ln w="15875">
-            <a:solidFill>
-              <a:srgbClr val="D3E4D5"/>
-            </a:solidFill>
-          </a:ln>
-          <a:effectLst/>
-        </p:spPr>
-        <p:style>
-          <a:lnRef idx="1">
-            <a:schemeClr val="accent1"/>
-          </a:lnRef>
-          <a:fillRef idx="3">
-            <a:schemeClr val="accent1"/>
-          </a:fillRef>
-          <a:effectRef idx="2">
-            <a:schemeClr val="accent1"/>
-          </a:effectRef>
-          <a:fontRef idx="minor">
-            <a:schemeClr val="lt1"/>
-          </a:fontRef>
-        </p:style>
-        <p:txBody>
-          <a:bodyPr rtlCol="0" anchor="ctr"/>
-          <a:lstStyle/>
-          <a:p>
-            <a:pPr algn="ctr"/>
-          </a:p>
-        </p:txBody>
-      </p:sp>
-      <p:sp>
-        <p:nvSpPr>
-          <p:cNvPr id="21" name="Rounded Rectangle 20"/>
-          <p:cNvSpPr/>
-          <p:nvPr/>
-        </p:nvSpPr>
-        <p:spPr>
-          <a:xfrm>
-            <a:off x="4617720" y="5257800"/>
-            <a:ext cx="1005840" cy="365760"/>
-          </a:xfrm>
-          <a:prstGeom prst="roundRect">
-            <a:avLst>
-              <a:gd name="adj" fmla="val 50000"/>
-            </a:avLst>
-          </a:prstGeom>
-          <a:solidFill>
-            <a:srgbClr val="E8F7EA"/>
-          </a:solidFill>
-          <a:ln>
-            <a:noFill/>
-          </a:ln>
-          <a:effectLst/>
-        </p:spPr>
-        <p:style>
-          <a:lnRef idx="1">
-            <a:schemeClr val="accent1"/>
-          </a:lnRef>
-          <a:fillRef idx="3">
-            <a:schemeClr val="accent1"/>
-          </a:fillRef>
-          <a:effectRef idx="2">
-            <a:schemeClr val="accent1"/>
-          </a:effectRef>
-          <a:fontRef idx="minor">
-            <a:schemeClr val="lt1"/>
-          </a:fontRef>
-        </p:style>
-        <p:txBody>
-          <a:bodyPr rtlCol="0" anchor="ctr" lIns="0" rIns="0" tIns="0" bIns="0"/>
-          <a:lstStyle/>
-          <a:p>
-            <a:pPr algn="ctr"/>
-            <a:r>
-              <a:rPr sz="1100" b="1">
-                <a:solidFill>
-                  <a:srgbClr val="2A7A3B"/>
-                </a:solidFill>
-                <a:latin typeface="Calibri"/>
-              </a:rPr>
-              <a:t>Annuler</a:t>
-            </a:r>
-          </a:p>
-        </p:txBody>
-      </p:sp>
-      <p:sp>
-        <p:nvSpPr>
-          <p:cNvPr id="22" name="Rounded Rectangle 21"/>
-          <p:cNvSpPr/>
-          <p:nvPr/>
-        </p:nvSpPr>
-        <p:spPr>
-          <a:xfrm>
-            <a:off x="5760720" y="5257800"/>
-            <a:ext cx="1051560" cy="365760"/>
-          </a:xfrm>
-          <a:prstGeom prst="roundRect">
-            <a:avLst>
-              <a:gd name="adj" fmla="val 50000"/>
-            </a:avLst>
-          </a:prstGeom>
-          <a:solidFill>
-            <a:srgbClr val="2A7A3B"/>
-          </a:solidFill>
-          <a:ln>
-            <a:noFill/>
-          </a:ln>
-          <a:effectLst/>
-        </p:spPr>
-        <p:style>
-          <a:lnRef idx="1">
-            <a:schemeClr val="accent1"/>
-          </a:lnRef>
-          <a:fillRef idx="3">
-            <a:schemeClr val="accent1"/>
-          </a:fillRef>
-          <a:effectRef idx="2">
-            <a:schemeClr val="accent1"/>
-          </a:effectRef>
-          <a:fontRef idx="minor">
-            <a:schemeClr val="lt1"/>
-          </a:fontRef>
-        </p:style>
-        <p:txBody>
-          <a:bodyPr rtlCol="0" anchor="ctr" lIns="0" rIns="0" tIns="0" bIns="0"/>
-          <a:lstStyle/>
-          <a:p>
-            <a:pPr algn="ctr"/>
-            <a:r>
-              <a:rPr sz="1100" b="1">
-                <a:solidFill>
-                  <a:srgbClr val="FFFFFF"/>
-                </a:solidFill>
-                <a:latin typeface="Calibri"/>
-              </a:rPr>
-              <a:t>Enregistrer</a:t>
-            </a:r>
-          </a:p>
-        </p:txBody>
-      </p:sp>
-      <p:sp>
-        <p:nvSpPr>
-          <p:cNvPr id="23" name="Oval 22"/>
-          <p:cNvSpPr/>
-          <p:nvPr/>
-        </p:nvSpPr>
-        <p:spPr>
-          <a:xfrm>
-            <a:off x="7452360" y="2057400"/>
-            <a:ext cx="457200" cy="457200"/>
+            <a:off x="2460872" y="2704612"/>
+            <a:ext cx="384048" cy="384048"/>
           </a:xfrm>
           <a:prstGeom prst="ellipse">
             <a:avLst/>
@@ -5940,6 +5222,218 @@
           <a:p>
             <a:pPr algn="ctr"/>
             <a:r>
+              <a:rPr sz="1400" b="1">
+                <a:solidFill>
+                  <a:srgbClr val="2D3A2E"/>
+                </a:solidFill>
+                <a:latin typeface="Calibri"/>
+              </a:rPr>
+              <a:t>1</a:t>
+            </a:r>
+          </a:p>
+        </p:txBody>
+      </p:sp>
+      <p:sp>
+        <p:nvSpPr>
+          <p:cNvPr id="8" name="Oval 7"/>
+          <p:cNvSpPr/>
+          <p:nvPr/>
+        </p:nvSpPr>
+        <p:spPr>
+          <a:xfrm>
+            <a:off x="4561719" y="2708818"/>
+            <a:ext cx="384048" cy="384048"/>
+          </a:xfrm>
+          <a:prstGeom prst="ellipse">
+            <a:avLst/>
+          </a:prstGeom>
+          <a:solidFill>
+            <a:srgbClr val="F5C518"/>
+          </a:solidFill>
+          <a:ln>
+            <a:noFill/>
+          </a:ln>
+          <a:effectLst/>
+        </p:spPr>
+        <p:style>
+          <a:lnRef idx="1">
+            <a:schemeClr val="accent1"/>
+          </a:lnRef>
+          <a:fillRef idx="3">
+            <a:schemeClr val="accent1"/>
+          </a:fillRef>
+          <a:effectRef idx="2">
+            <a:schemeClr val="accent1"/>
+          </a:effectRef>
+          <a:fontRef idx="minor">
+            <a:schemeClr val="lt1"/>
+          </a:fontRef>
+        </p:style>
+        <p:txBody>
+          <a:bodyPr rtlCol="0" anchor="ctr" lIns="0" rIns="0" tIns="0" bIns="0"/>
+          <a:lstStyle/>
+          <a:p>
+            <a:pPr algn="ctr"/>
+            <a:r>
+              <a:rPr sz="1400" b="1">
+                <a:solidFill>
+                  <a:srgbClr val="2D3A2E"/>
+                </a:solidFill>
+                <a:latin typeface="Calibri"/>
+              </a:rPr>
+              <a:t>2</a:t>
+            </a:r>
+          </a:p>
+        </p:txBody>
+      </p:sp>
+      <p:sp>
+        <p:nvSpPr>
+          <p:cNvPr id="9" name="Oval 8"/>
+          <p:cNvSpPr/>
+          <p:nvPr/>
+        </p:nvSpPr>
+        <p:spPr>
+          <a:xfrm>
+            <a:off x="4561719" y="3381816"/>
+            <a:ext cx="384048" cy="384048"/>
+          </a:xfrm>
+          <a:prstGeom prst="ellipse">
+            <a:avLst/>
+          </a:prstGeom>
+          <a:solidFill>
+            <a:srgbClr val="F5C518"/>
+          </a:solidFill>
+          <a:ln>
+            <a:noFill/>
+          </a:ln>
+          <a:effectLst/>
+        </p:spPr>
+        <p:style>
+          <a:lnRef idx="1">
+            <a:schemeClr val="accent1"/>
+          </a:lnRef>
+          <a:fillRef idx="3">
+            <a:schemeClr val="accent1"/>
+          </a:fillRef>
+          <a:effectRef idx="2">
+            <a:schemeClr val="accent1"/>
+          </a:effectRef>
+          <a:fontRef idx="minor">
+            <a:schemeClr val="lt1"/>
+          </a:fontRef>
+        </p:style>
+        <p:txBody>
+          <a:bodyPr rtlCol="0" anchor="ctr" lIns="0" rIns="0" tIns="0" bIns="0"/>
+          <a:lstStyle/>
+          <a:p>
+            <a:pPr algn="ctr"/>
+            <a:r>
+              <a:rPr sz="1400" b="1">
+                <a:solidFill>
+                  <a:srgbClr val="2D3A2E"/>
+                </a:solidFill>
+                <a:latin typeface="Calibri"/>
+              </a:rPr>
+              <a:t>3</a:t>
+            </a:r>
+          </a:p>
+        </p:txBody>
+      </p:sp>
+      <p:sp>
+        <p:nvSpPr>
+          <p:cNvPr id="10" name="Oval 9"/>
+          <p:cNvSpPr/>
+          <p:nvPr/>
+        </p:nvSpPr>
+        <p:spPr>
+          <a:xfrm>
+            <a:off x="5039184" y="5379780"/>
+            <a:ext cx="384048" cy="384048"/>
+          </a:xfrm>
+          <a:prstGeom prst="ellipse">
+            <a:avLst/>
+          </a:prstGeom>
+          <a:solidFill>
+            <a:srgbClr val="F5C518"/>
+          </a:solidFill>
+          <a:ln>
+            <a:noFill/>
+          </a:ln>
+          <a:effectLst/>
+        </p:spPr>
+        <p:style>
+          <a:lnRef idx="1">
+            <a:schemeClr val="accent1"/>
+          </a:lnRef>
+          <a:fillRef idx="3">
+            <a:schemeClr val="accent1"/>
+          </a:fillRef>
+          <a:effectRef idx="2">
+            <a:schemeClr val="accent1"/>
+          </a:effectRef>
+          <a:fontRef idx="minor">
+            <a:schemeClr val="lt1"/>
+          </a:fontRef>
+        </p:style>
+        <p:txBody>
+          <a:bodyPr rtlCol="0" anchor="ctr" lIns="0" rIns="0" tIns="0" bIns="0"/>
+          <a:lstStyle/>
+          <a:p>
+            <a:pPr algn="ctr"/>
+            <a:r>
+              <a:rPr sz="1400" b="1">
+                <a:solidFill>
+                  <a:srgbClr val="2D3A2E"/>
+                </a:solidFill>
+                <a:latin typeface="Calibri"/>
+              </a:rPr>
+              <a:t>4</a:t>
+            </a:r>
+          </a:p>
+        </p:txBody>
+      </p:sp>
+      <p:sp>
+        <p:nvSpPr>
+          <p:cNvPr id="11" name="Oval 10"/>
+          <p:cNvSpPr/>
+          <p:nvPr/>
+        </p:nvSpPr>
+        <p:spPr>
+          <a:xfrm>
+            <a:off x="7132320" y="2057400"/>
+            <a:ext cx="457200" cy="457200"/>
+          </a:xfrm>
+          <a:prstGeom prst="ellipse">
+            <a:avLst/>
+          </a:prstGeom>
+          <a:solidFill>
+            <a:srgbClr val="F5C518"/>
+          </a:solidFill>
+          <a:ln>
+            <a:noFill/>
+          </a:ln>
+          <a:effectLst/>
+        </p:spPr>
+        <p:style>
+          <a:lnRef idx="1">
+            <a:schemeClr val="accent1"/>
+          </a:lnRef>
+          <a:fillRef idx="3">
+            <a:schemeClr val="accent1"/>
+          </a:fillRef>
+          <a:effectRef idx="2">
+            <a:schemeClr val="accent1"/>
+          </a:effectRef>
+          <a:fontRef idx="minor">
+            <a:schemeClr val="lt1"/>
+          </a:fontRef>
+        </p:style>
+        <p:txBody>
+          <a:bodyPr rtlCol="0" anchor="ctr" lIns="0" rIns="0" tIns="0" bIns="0"/>
+          <a:lstStyle/>
+          <a:p>
+            <a:pPr algn="ctr"/>
+            <a:r>
               <a:rPr sz="1500" b="1">
                 <a:solidFill>
                   <a:srgbClr val="2D3A2E"/>
@@ -5953,14 +5447,14 @@
       </p:sp>
       <p:sp>
         <p:nvSpPr>
-          <p:cNvPr id="24" name="TextBox 23"/>
+          <p:cNvPr id="12" name="TextBox 11"/>
           <p:cNvSpPr txBox="1"/>
           <p:nvPr/>
         </p:nvSpPr>
         <p:spPr>
           <a:xfrm>
-            <a:off x="8110728" y="2075688"/>
-            <a:ext cx="3566160" cy="320040"/>
+            <a:off x="7790688" y="2075688"/>
+            <a:ext cx="4206240" cy="320040"/>
           </a:xfrm>
           <a:prstGeom prst="rect">
             <a:avLst/>
@@ -5992,14 +5486,14 @@
       </p:sp>
       <p:sp>
         <p:nvSpPr>
-          <p:cNvPr id="25" name="TextBox 24"/>
+          <p:cNvPr id="13" name="TextBox 12"/>
           <p:cNvSpPr txBox="1"/>
           <p:nvPr/>
         </p:nvSpPr>
         <p:spPr>
           <a:xfrm>
-            <a:off x="8110728" y="2441448"/>
-            <a:ext cx="3566160" cy="502920"/>
+            <a:off x="7790688" y="2441448"/>
+            <a:ext cx="4206240" cy="502920"/>
           </a:xfrm>
           <a:prstGeom prst="rect">
             <a:avLst/>
@@ -6034,13 +5528,13 @@
       </p:sp>
       <p:sp>
         <p:nvSpPr>
-          <p:cNvPr id="26" name="Oval 25"/>
+          <p:cNvPr id="14" name="Oval 13"/>
           <p:cNvSpPr/>
           <p:nvPr/>
         </p:nvSpPr>
         <p:spPr>
           <a:xfrm>
-            <a:off x="7452360" y="3081528"/>
+            <a:off x="7132320" y="3081528"/>
             <a:ext cx="457200" cy="457200"/>
           </a:xfrm>
           <a:prstGeom prst="ellipse">
@@ -6087,14 +5581,14 @@
       </p:sp>
       <p:sp>
         <p:nvSpPr>
-          <p:cNvPr id="27" name="TextBox 26"/>
+          <p:cNvPr id="15" name="TextBox 14"/>
           <p:cNvSpPr txBox="1"/>
           <p:nvPr/>
         </p:nvSpPr>
         <p:spPr>
           <a:xfrm>
-            <a:off x="8110728" y="3099816"/>
-            <a:ext cx="3566160" cy="320040"/>
+            <a:off x="7790688" y="3099816"/>
+            <a:ext cx="4206240" cy="320040"/>
           </a:xfrm>
           <a:prstGeom prst="rect">
             <a:avLst/>
@@ -6126,14 +5620,14 @@
       </p:sp>
       <p:sp>
         <p:nvSpPr>
-          <p:cNvPr id="28" name="TextBox 27"/>
+          <p:cNvPr id="16" name="TextBox 15"/>
           <p:cNvSpPr txBox="1"/>
           <p:nvPr/>
         </p:nvSpPr>
         <p:spPr>
           <a:xfrm>
-            <a:off x="8110728" y="3465576"/>
-            <a:ext cx="3566160" cy="502920"/>
+            <a:off x="7790688" y="3465576"/>
+            <a:ext cx="4206240" cy="502920"/>
           </a:xfrm>
           <a:prstGeom prst="rect">
             <a:avLst/>
@@ -6168,13 +5662,13 @@
       </p:sp>
       <p:sp>
         <p:nvSpPr>
-          <p:cNvPr id="29" name="Oval 28"/>
+          <p:cNvPr id="17" name="Oval 16"/>
           <p:cNvSpPr/>
           <p:nvPr/>
         </p:nvSpPr>
         <p:spPr>
           <a:xfrm>
-            <a:off x="7452360" y="4105656"/>
+            <a:off x="7132320" y="4105656"/>
             <a:ext cx="457200" cy="457200"/>
           </a:xfrm>
           <a:prstGeom prst="ellipse">
@@ -6221,14 +5715,14 @@
       </p:sp>
       <p:sp>
         <p:nvSpPr>
-          <p:cNvPr id="30" name="TextBox 29"/>
+          <p:cNvPr id="18" name="TextBox 17"/>
           <p:cNvSpPr txBox="1"/>
           <p:nvPr/>
         </p:nvSpPr>
         <p:spPr>
           <a:xfrm>
-            <a:off x="8110728" y="4123944"/>
-            <a:ext cx="3566160" cy="320040"/>
+            <a:off x="7790688" y="4123944"/>
+            <a:ext cx="4206240" cy="320040"/>
           </a:xfrm>
           <a:prstGeom prst="rect">
             <a:avLst/>
@@ -6260,14 +5754,14 @@
       </p:sp>
       <p:sp>
         <p:nvSpPr>
-          <p:cNvPr id="31" name="TextBox 30"/>
+          <p:cNvPr id="19" name="TextBox 18"/>
           <p:cNvSpPr txBox="1"/>
           <p:nvPr/>
         </p:nvSpPr>
         <p:spPr>
           <a:xfrm>
-            <a:off x="8110728" y="4489704"/>
-            <a:ext cx="3566160" cy="502920"/>
+            <a:off x="7790688" y="4489704"/>
+            <a:ext cx="4206240" cy="502920"/>
           </a:xfrm>
           <a:prstGeom prst="rect">
             <a:avLst/>
@@ -6302,13 +5796,13 @@
       </p:sp>
       <p:sp>
         <p:nvSpPr>
-          <p:cNvPr id="32" name="Oval 31"/>
+          <p:cNvPr id="20" name="Oval 19"/>
           <p:cNvSpPr/>
           <p:nvPr/>
         </p:nvSpPr>
         <p:spPr>
           <a:xfrm>
-            <a:off x="7452360" y="5129784"/>
+            <a:off x="7132320" y="5129784"/>
             <a:ext cx="457200" cy="457200"/>
           </a:xfrm>
           <a:prstGeom prst="ellipse">
@@ -6355,14 +5849,14 @@
       </p:sp>
       <p:sp>
         <p:nvSpPr>
-          <p:cNvPr id="33" name="TextBox 32"/>
+          <p:cNvPr id="21" name="TextBox 20"/>
           <p:cNvSpPr txBox="1"/>
           <p:nvPr/>
         </p:nvSpPr>
         <p:spPr>
           <a:xfrm>
-            <a:off x="8110728" y="5148072"/>
-            <a:ext cx="3566160" cy="320040"/>
+            <a:off x="7790688" y="5148072"/>
+            <a:ext cx="4206240" cy="320040"/>
           </a:xfrm>
           <a:prstGeom prst="rect">
             <a:avLst/>
@@ -6394,14 +5888,14 @@
       </p:sp>
       <p:sp>
         <p:nvSpPr>
-          <p:cNvPr id="34" name="TextBox 33"/>
+          <p:cNvPr id="22" name="TextBox 21"/>
           <p:cNvSpPr txBox="1"/>
           <p:nvPr/>
         </p:nvSpPr>
         <p:spPr>
           <a:xfrm>
-            <a:off x="8110728" y="5513832"/>
-            <a:ext cx="3566160" cy="502920"/>
+            <a:off x="7790688" y="5513832"/>
+            <a:ext cx="4206240" cy="502920"/>
           </a:xfrm>
           <a:prstGeom prst="rect">
             <a:avLst/>
@@ -6582,21 +6076,19 @@
         </p:nvSpPr>
         <p:spPr>
           <a:xfrm>
-            <a:off x="685800" y="1874519"/>
-            <a:ext cx="6400800" cy="3657600"/>
+            <a:off x="856961" y="2011679"/>
+            <a:ext cx="5765868" cy="3657600"/>
           </a:xfrm>
           <a:prstGeom prst="roundRect">
             <a:avLst>
-              <a:gd name="adj" fmla="val 5000"/>
+              <a:gd name="adj" fmla="val 2000"/>
             </a:avLst>
           </a:prstGeom>
           <a:solidFill>
-            <a:srgbClr val="FFFFFF"/>
+            <a:srgbClr val="E6EEE7"/>
           </a:solidFill>
-          <a:ln w="19050">
-            <a:solidFill>
-              <a:srgbClr val="D3E4D5"/>
-            </a:solidFill>
+          <a:ln>
+            <a:noFill/>
           </a:ln>
           <a:effectLst/>
         </p:spPr>
@@ -6622,147 +6114,49 @@
           </a:p>
         </p:txBody>
       </p:sp>
-      <p:sp>
-        <p:nvSpPr>
-          <p:cNvPr id="6" name="TextBox 5"/>
-          <p:cNvSpPr txBox="1"/>
-          <p:nvPr/>
-        </p:nvSpPr>
-        <p:spPr>
-          <a:xfrm>
-            <a:off x="960120" y="2148840"/>
-            <a:ext cx="4572000" cy="320040"/>
-          </a:xfrm>
-          <a:prstGeom prst="rect">
-            <a:avLst/>
-          </a:prstGeom>
-          <a:noFill/>
-        </p:spPr>
-        <p:txBody>
-          <a:bodyPr wrap="square" lIns="0" rIns="0" tIns="0" bIns="0" anchor="t">
-            <a:spAutoFit/>
-          </a:bodyPr>
-          <a:lstStyle/>
-          <a:p>
-            <a:pPr algn="l">
-              <a:spcAft>
-                <a:spcPts val="500"/>
-              </a:spcAft>
-            </a:pPr>
-            <a:r>
-              <a:rPr sz="1700" b="1">
-                <a:solidFill>
-                  <a:srgbClr val="2A7A3B"/>
-                </a:solidFill>
-                <a:latin typeface="Calibri"/>
-              </a:rPr>
-              <a:t>Attribuer une carte RFID</a:t>
-            </a:r>
-          </a:p>
-        </p:txBody>
-      </p:sp>
-      <p:sp>
-        <p:nvSpPr>
-          <p:cNvPr id="7" name="TextBox 6"/>
-          <p:cNvSpPr txBox="1"/>
-          <p:nvPr/>
-        </p:nvSpPr>
-        <p:spPr>
-          <a:xfrm>
-            <a:off x="960120" y="2560320"/>
-            <a:ext cx="5486400" cy="274320"/>
-          </a:xfrm>
-          <a:prstGeom prst="rect">
-            <a:avLst/>
-          </a:prstGeom>
-          <a:noFill/>
-        </p:spPr>
-        <p:txBody>
-          <a:bodyPr wrap="square" lIns="0" rIns="0" tIns="0" bIns="0" anchor="t">
-            <a:spAutoFit/>
-          </a:bodyPr>
-          <a:lstStyle/>
-          <a:p>
-            <a:pPr algn="l">
-              <a:spcAft>
-                <a:spcPts val="500"/>
-              </a:spcAft>
-            </a:pPr>
-            <a:r>
-              <a:rPr sz="1200" b="0">
-                <a:solidFill>
-                  <a:srgbClr val="7C8F7E"/>
-                </a:solidFill>
-                <a:latin typeface="Calibri"/>
-              </a:rPr>
-              <a:t>Passez la carte sur le lecteur — le numéro se remplit tout seul.</a:t>
-            </a:r>
-          </a:p>
-        </p:txBody>
-      </p:sp>
-      <p:sp>
-        <p:nvSpPr>
-          <p:cNvPr id="8" name="TextBox 7"/>
-          <p:cNvSpPr txBox="1"/>
-          <p:nvPr/>
-        </p:nvSpPr>
-        <p:spPr>
-          <a:xfrm>
-            <a:off x="960120" y="3017520"/>
-            <a:ext cx="2743200" cy="182880"/>
-          </a:xfrm>
-          <a:prstGeom prst="rect">
-            <a:avLst/>
-          </a:prstGeom>
-          <a:noFill/>
-        </p:spPr>
-        <p:txBody>
-          <a:bodyPr wrap="square" lIns="0" rIns="0" tIns="0" bIns="0" anchor="t">
-            <a:spAutoFit/>
-          </a:bodyPr>
-          <a:lstStyle/>
-          <a:p>
-            <a:pPr algn="l">
-              <a:spcAft>
-                <a:spcPts val="500"/>
-              </a:spcAft>
-            </a:pPr>
-            <a:r>
-              <a:rPr sz="950" b="1">
-                <a:solidFill>
-                  <a:srgbClr val="7C8F7E"/>
-                </a:solidFill>
-                <a:latin typeface="Calibri"/>
-              </a:rPr>
-              <a:t>NUMÉRO DE LA CARTE *</a:t>
-            </a:r>
-          </a:p>
-        </p:txBody>
-      </p:sp>
-      <p:sp>
-        <p:nvSpPr>
-          <p:cNvPr id="9" name="Rounded Rectangle 8"/>
+      <p:pic>
+        <p:nvPicPr>
+          <p:cNvPr id="6" name="Picture 5" descr="11_attribuer_carte.png"/>
+          <p:cNvPicPr>
+            <a:picLocks noChangeAspect="1"/>
+          </p:cNvPicPr>
+          <p:nvPr/>
+        </p:nvPicPr>
+        <p:blipFill>
+          <a:blip r:embed="rId2"/>
+          <a:stretch>
+            <a:fillRect/>
+          </a:stretch>
+        </p:blipFill>
+        <p:spPr>
+          <a:xfrm>
+            <a:off x="820385" y="1965960"/>
+            <a:ext cx="5765868" cy="3657600"/>
+          </a:xfrm>
+          <a:prstGeom prst="rect">
+            <a:avLst/>
+          </a:prstGeom>
+        </p:spPr>
+      </p:pic>
+      <p:sp>
+        <p:nvSpPr>
+          <p:cNvPr id="7" name="Oval 6"/>
           <p:cNvSpPr/>
           <p:nvPr/>
         </p:nvSpPr>
         <p:spPr>
           <a:xfrm>
-            <a:off x="960120" y="3246120"/>
-            <a:ext cx="5852160" cy="658368"/>
-          </a:xfrm>
-          <a:prstGeom prst="roundRect">
-            <a:avLst>
-              <a:gd name="adj" fmla="val 15000"/>
-            </a:avLst>
+            <a:off x="3511296" y="3438144"/>
+            <a:ext cx="384048" cy="384048"/>
+          </a:xfrm>
+          <a:prstGeom prst="ellipse">
+            <a:avLst/>
           </a:prstGeom>
           <a:solidFill>
-            <a:srgbClr val="E8F7EA"/>
+            <a:srgbClr val="F5C518"/>
           </a:solidFill>
-          <a:ln w="28575">
-            <a:solidFill>
-              <a:srgbClr val="4CAF50"/>
-            </a:solidFill>
-            <a:prstDash val="dash"/>
+          <a:ln>
+            <a:noFill/>
           </a:ln>
           <a:effectLst/>
         </p:spPr>
@@ -6781,114 +6175,41 @@
           </a:fontRef>
         </p:style>
         <p:txBody>
-          <a:bodyPr rtlCol="0" anchor="ctr"/>
+          <a:bodyPr rtlCol="0" anchor="ctr" lIns="0" rIns="0" tIns="0" bIns="0"/>
           <a:lstStyle/>
           <a:p>
             <a:pPr algn="ctr"/>
-          </a:p>
-        </p:txBody>
-      </p:sp>
-      <p:sp>
-        <p:nvSpPr>
-          <p:cNvPr id="10" name="TextBox 9"/>
-          <p:cNvSpPr txBox="1"/>
-          <p:nvPr/>
-        </p:nvSpPr>
-        <p:spPr>
-          <a:xfrm>
-            <a:off x="960120" y="3456432"/>
-            <a:ext cx="5852160" cy="274320"/>
-          </a:xfrm>
-          <a:prstGeom prst="rect">
-            <a:avLst/>
-          </a:prstGeom>
-          <a:noFill/>
-        </p:spPr>
-        <p:txBody>
-          <a:bodyPr wrap="square" lIns="0" rIns="0" tIns="0" bIns="0" anchor="t">
-            <a:spAutoFit/>
-          </a:bodyPr>
-          <a:lstStyle/>
-          <a:p>
-            <a:pPr algn="ctr">
-              <a:spcAft>
-                <a:spcPts val="500"/>
-              </a:spcAft>
-            </a:pPr>
-            <a:r>
-              <a:rPr sz="1500" b="1">
-                <a:solidFill>
-                  <a:srgbClr val="2A7A3B"/>
-                </a:solidFill>
-                <a:latin typeface="Calibri"/>
-              </a:rPr>
-              <a:t>En attente de la carte…</a:t>
-            </a:r>
-          </a:p>
-        </p:txBody>
-      </p:sp>
-      <p:sp>
-        <p:nvSpPr>
-          <p:cNvPr id="11" name="TextBox 10"/>
-          <p:cNvSpPr txBox="1"/>
-          <p:nvPr/>
-        </p:nvSpPr>
-        <p:spPr>
-          <a:xfrm>
-            <a:off x="960120" y="4114800"/>
-            <a:ext cx="5852160" cy="182880"/>
-          </a:xfrm>
-          <a:prstGeom prst="rect">
-            <a:avLst/>
-          </a:prstGeom>
-          <a:noFill/>
-        </p:spPr>
-        <p:txBody>
-          <a:bodyPr wrap="square" lIns="0" rIns="0" tIns="0" bIns="0" anchor="t">
-            <a:spAutoFit/>
-          </a:bodyPr>
-          <a:lstStyle/>
-          <a:p>
-            <a:pPr algn="l">
-              <a:spcAft>
-                <a:spcPts val="0"/>
-              </a:spcAft>
-            </a:pPr>
-            <a:r>
-              <a:rPr sz="950" b="1">
-                <a:solidFill>
-                  <a:srgbClr val="7C8F7E"/>
-                </a:solidFill>
-                <a:latin typeface="Calibri"/>
-              </a:rPr>
-              <a:t>NUMÉRO IMPRIMÉ SUR LA CARTE (FACULTATIF)</a:t>
-            </a:r>
-          </a:p>
-        </p:txBody>
-      </p:sp>
-      <p:sp>
-        <p:nvSpPr>
-          <p:cNvPr id="12" name="Rounded Rectangle 11"/>
+            <a:r>
+              <a:rPr sz="1400" b="1">
+                <a:solidFill>
+                  <a:srgbClr val="2D3A2E"/>
+                </a:solidFill>
+                <a:latin typeface="Calibri"/>
+              </a:rPr>
+              <a:t>1</a:t>
+            </a:r>
+          </a:p>
+        </p:txBody>
+      </p:sp>
+      <p:sp>
+        <p:nvSpPr>
+          <p:cNvPr id="8" name="Oval 7"/>
           <p:cNvSpPr/>
           <p:nvPr/>
         </p:nvSpPr>
         <p:spPr>
           <a:xfrm>
-            <a:off x="960120" y="4334256"/>
-            <a:ext cx="5852160" cy="347472"/>
-          </a:xfrm>
-          <a:prstGeom prst="roundRect">
-            <a:avLst>
-              <a:gd name="adj" fmla="val 25000"/>
-            </a:avLst>
+            <a:off x="3511296" y="4279392"/>
+            <a:ext cx="384048" cy="384048"/>
+          </a:xfrm>
+          <a:prstGeom prst="ellipse">
+            <a:avLst/>
           </a:prstGeom>
           <a:solidFill>
-            <a:srgbClr val="FFFFFF"/>
+            <a:srgbClr val="F5C518"/>
           </a:solidFill>
-          <a:ln w="15875">
-            <a:solidFill>
-              <a:srgbClr val="D3E4D5"/>
-            </a:solidFill>
+          <a:ln>
+            <a:noFill/>
           </a:ln>
           <a:effectLst/>
         </p:spPr>
@@ -6907,70 +6228,38 @@
           </a:fontRef>
         </p:style>
         <p:txBody>
-          <a:bodyPr rtlCol="0" anchor="ctr"/>
+          <a:bodyPr rtlCol="0" anchor="ctr" lIns="0" rIns="0" tIns="0" bIns="0"/>
           <a:lstStyle/>
           <a:p>
             <a:pPr algn="ctr"/>
-          </a:p>
-        </p:txBody>
-      </p:sp>
-      <p:sp>
-        <p:nvSpPr>
-          <p:cNvPr id="13" name="TextBox 12"/>
-          <p:cNvSpPr txBox="1"/>
-          <p:nvPr/>
-        </p:nvSpPr>
-        <p:spPr>
-          <a:xfrm>
-            <a:off x="1088136" y="4416552"/>
-            <a:ext cx="5596128" cy="201168"/>
-          </a:xfrm>
-          <a:prstGeom prst="rect">
-            <a:avLst/>
-          </a:prstGeom>
-          <a:noFill/>
-        </p:spPr>
-        <p:txBody>
-          <a:bodyPr wrap="square" lIns="0" rIns="0" tIns="0" bIns="0" anchor="t">
-            <a:spAutoFit/>
-          </a:bodyPr>
-          <a:lstStyle/>
-          <a:p>
-            <a:pPr algn="l">
-              <a:spcAft>
-                <a:spcPts val="0"/>
-              </a:spcAft>
-            </a:pPr>
-            <a:r>
-              <a:rPr sz="1150" b="0">
+            <a:r>
+              <a:rPr sz="1400" b="1">
                 <a:solidFill>
                   <a:srgbClr val="2D3A2E"/>
                 </a:solidFill>
                 <a:latin typeface="Calibri"/>
               </a:rPr>
-              <a:t>042</a:t>
-            </a:r>
-          </a:p>
-        </p:txBody>
-      </p:sp>
-      <p:sp>
-        <p:nvSpPr>
-          <p:cNvPr id="14" name="Rounded Rectangle 13"/>
+              <a:t>2</a:t>
+            </a:r>
+          </a:p>
+        </p:txBody>
+      </p:sp>
+      <p:sp>
+        <p:nvSpPr>
+          <p:cNvPr id="9" name="Oval 8"/>
           <p:cNvSpPr/>
           <p:nvPr/>
         </p:nvSpPr>
         <p:spPr>
           <a:xfrm>
-            <a:off x="4617720" y="4983480"/>
-            <a:ext cx="1005840" cy="365760"/>
-          </a:xfrm>
-          <a:prstGeom prst="roundRect">
-            <a:avLst>
-              <a:gd name="adj" fmla="val 50000"/>
-            </a:avLst>
+            <a:off x="5442861" y="4864607"/>
+            <a:ext cx="384048" cy="384048"/>
+          </a:xfrm>
+          <a:prstGeom prst="ellipse">
+            <a:avLst/>
           </a:prstGeom>
           <a:solidFill>
-            <a:srgbClr val="E8F7EA"/>
+            <a:srgbClr val="F5C518"/>
           </a:solidFill>
           <a:ln>
             <a:noFill/>
@@ -6997,32 +6286,30 @@
           <a:p>
             <a:pPr algn="ctr"/>
             <a:r>
-              <a:rPr sz="1100" b="1">
-                <a:solidFill>
-                  <a:srgbClr val="2A7A3B"/>
-                </a:solidFill>
-                <a:latin typeface="Calibri"/>
-              </a:rPr>
-              <a:t>Annuler</a:t>
-            </a:r>
-          </a:p>
-        </p:txBody>
-      </p:sp>
-      <p:sp>
-        <p:nvSpPr>
-          <p:cNvPr id="15" name="Rounded Rectangle 14"/>
+              <a:rPr sz="1400" b="1">
+                <a:solidFill>
+                  <a:srgbClr val="2D3A2E"/>
+                </a:solidFill>
+                <a:latin typeface="Calibri"/>
+              </a:rPr>
+              <a:t>3</a:t>
+            </a:r>
+          </a:p>
+        </p:txBody>
+      </p:sp>
+      <p:sp>
+        <p:nvSpPr>
+          <p:cNvPr id="10" name="Oval 9"/>
           <p:cNvSpPr/>
           <p:nvPr/>
         </p:nvSpPr>
         <p:spPr>
           <a:xfrm>
-            <a:off x="5760720" y="4983480"/>
-            <a:ext cx="1051560" cy="365760"/>
-          </a:xfrm>
-          <a:prstGeom prst="roundRect">
-            <a:avLst>
-              <a:gd name="adj" fmla="val 50000"/>
-            </a:avLst>
+            <a:off x="7132320" y="2057400"/>
+            <a:ext cx="457200" cy="457200"/>
+          </a:xfrm>
+          <a:prstGeom prst="ellipse">
+            <a:avLst/>
           </a:prstGeom>
           <a:solidFill>
             <a:srgbClr val="2A7A3B"/>
@@ -7052,65 +6339,12 @@
           <a:p>
             <a:pPr algn="ctr"/>
             <a:r>
-              <a:rPr sz="1100" b="1">
+              <a:rPr sz="1500" b="1">
                 <a:solidFill>
                   <a:srgbClr val="FFFFFF"/>
                 </a:solidFill>
                 <a:latin typeface="Calibri"/>
               </a:rPr>
-              <a:t>Attribuer</a:t>
-            </a:r>
-          </a:p>
-        </p:txBody>
-      </p:sp>
-      <p:sp>
-        <p:nvSpPr>
-          <p:cNvPr id="16" name="Oval 15"/>
-          <p:cNvSpPr/>
-          <p:nvPr/>
-        </p:nvSpPr>
-        <p:spPr>
-          <a:xfrm>
-            <a:off x="7452360" y="2057400"/>
-            <a:ext cx="457200" cy="457200"/>
-          </a:xfrm>
-          <a:prstGeom prst="ellipse">
-            <a:avLst/>
-          </a:prstGeom>
-          <a:solidFill>
-            <a:srgbClr val="2A7A3B"/>
-          </a:solidFill>
-          <a:ln>
-            <a:noFill/>
-          </a:ln>
-          <a:effectLst/>
-        </p:spPr>
-        <p:style>
-          <a:lnRef idx="1">
-            <a:schemeClr val="accent1"/>
-          </a:lnRef>
-          <a:fillRef idx="3">
-            <a:schemeClr val="accent1"/>
-          </a:fillRef>
-          <a:effectRef idx="2">
-            <a:schemeClr val="accent1"/>
-          </a:effectRef>
-          <a:fontRef idx="minor">
-            <a:schemeClr val="lt1"/>
-          </a:fontRef>
-        </p:style>
-        <p:txBody>
-          <a:bodyPr rtlCol="0" anchor="ctr" lIns="0" rIns="0" tIns="0" bIns="0"/>
-          <a:lstStyle/>
-          <a:p>
-            <a:pPr algn="ctr"/>
-            <a:r>
-              <a:rPr sz="1500" b="1">
-                <a:solidFill>
-                  <a:srgbClr val="FFFFFF"/>
-                </a:solidFill>
-                <a:latin typeface="Calibri"/>
-              </a:rPr>
               <a:t>1</a:t>
             </a:r>
           </a:p>
@@ -7118,14 +6352,14 @@
       </p:sp>
       <p:sp>
         <p:nvSpPr>
-          <p:cNvPr id="17" name="TextBox 16"/>
+          <p:cNvPr id="11" name="TextBox 10"/>
           <p:cNvSpPr txBox="1"/>
           <p:nvPr/>
         </p:nvSpPr>
         <p:spPr>
           <a:xfrm>
-            <a:off x="8110728" y="2075688"/>
-            <a:ext cx="3566160" cy="320040"/>
+            <a:off x="7790688" y="2075688"/>
+            <a:ext cx="4206240" cy="320040"/>
           </a:xfrm>
           <a:prstGeom prst="rect">
             <a:avLst/>
@@ -7157,14 +6391,14 @@
       </p:sp>
       <p:sp>
         <p:nvSpPr>
-          <p:cNvPr id="18" name="TextBox 17"/>
+          <p:cNvPr id="12" name="TextBox 11"/>
           <p:cNvSpPr txBox="1"/>
           <p:nvPr/>
         </p:nvSpPr>
         <p:spPr>
           <a:xfrm>
-            <a:off x="8110728" y="2441448"/>
-            <a:ext cx="3566160" cy="502920"/>
+            <a:off x="7790688" y="2441448"/>
+            <a:ext cx="4206240" cy="502920"/>
           </a:xfrm>
           <a:prstGeom prst="rect">
             <a:avLst/>
@@ -7199,13 +6433,13 @@
       </p:sp>
       <p:sp>
         <p:nvSpPr>
-          <p:cNvPr id="19" name="Oval 18"/>
+          <p:cNvPr id="13" name="Oval 12"/>
           <p:cNvSpPr/>
           <p:nvPr/>
         </p:nvSpPr>
         <p:spPr>
           <a:xfrm>
-            <a:off x="7452360" y="3291840"/>
+            <a:off x="7132320" y="3291840"/>
             <a:ext cx="457200" cy="457200"/>
           </a:xfrm>
           <a:prstGeom prst="ellipse">
@@ -7252,14 +6486,14 @@
       </p:sp>
       <p:sp>
         <p:nvSpPr>
-          <p:cNvPr id="20" name="TextBox 19"/>
+          <p:cNvPr id="14" name="TextBox 13"/>
           <p:cNvSpPr txBox="1"/>
           <p:nvPr/>
         </p:nvSpPr>
         <p:spPr>
           <a:xfrm>
-            <a:off x="8110728" y="3310128"/>
-            <a:ext cx="3566160" cy="320040"/>
+            <a:off x="7790688" y="3310128"/>
+            <a:ext cx="4206240" cy="320040"/>
           </a:xfrm>
           <a:prstGeom prst="rect">
             <a:avLst/>
@@ -7291,14 +6525,14 @@
       </p:sp>
       <p:sp>
         <p:nvSpPr>
-          <p:cNvPr id="21" name="TextBox 20"/>
+          <p:cNvPr id="15" name="TextBox 14"/>
           <p:cNvSpPr txBox="1"/>
           <p:nvPr/>
         </p:nvSpPr>
         <p:spPr>
           <a:xfrm>
-            <a:off x="8110728" y="3675888"/>
-            <a:ext cx="3566160" cy="502920"/>
+            <a:off x="7790688" y="3675888"/>
+            <a:ext cx="4206240" cy="502920"/>
           </a:xfrm>
           <a:prstGeom prst="rect">
             <a:avLst/>
@@ -7333,13 +6567,13 @@
       </p:sp>
       <p:sp>
         <p:nvSpPr>
-          <p:cNvPr id="22" name="Oval 21"/>
+          <p:cNvPr id="16" name="Oval 15"/>
           <p:cNvSpPr/>
           <p:nvPr/>
         </p:nvSpPr>
         <p:spPr>
           <a:xfrm>
-            <a:off x="7452360" y="4526280"/>
+            <a:off x="7132320" y="4526280"/>
             <a:ext cx="457200" cy="457200"/>
           </a:xfrm>
           <a:prstGeom prst="ellipse">
@@ -7386,14 +6620,14 @@
       </p:sp>
       <p:sp>
         <p:nvSpPr>
-          <p:cNvPr id="23" name="TextBox 22"/>
+          <p:cNvPr id="17" name="TextBox 16"/>
           <p:cNvSpPr txBox="1"/>
           <p:nvPr/>
         </p:nvSpPr>
         <p:spPr>
           <a:xfrm>
-            <a:off x="8110728" y="4544568"/>
-            <a:ext cx="3566160" cy="320040"/>
+            <a:off x="7790688" y="4544568"/>
+            <a:ext cx="4206240" cy="320040"/>
           </a:xfrm>
           <a:prstGeom prst="rect">
             <a:avLst/>
@@ -7425,14 +6659,14 @@
       </p:sp>
       <p:sp>
         <p:nvSpPr>
-          <p:cNvPr id="24" name="TextBox 23"/>
+          <p:cNvPr id="18" name="TextBox 17"/>
           <p:cNvSpPr txBox="1"/>
           <p:nvPr/>
         </p:nvSpPr>
         <p:spPr>
           <a:xfrm>
-            <a:off x="8110728" y="4910328"/>
-            <a:ext cx="3566160" cy="502920"/>
+            <a:off x="7790688" y="4910328"/>
+            <a:ext cx="4206240" cy="502920"/>
           </a:xfrm>
           <a:prstGeom prst="rect">
             <a:avLst/>
@@ -7467,14 +6701,14 @@
       </p:sp>
       <p:sp>
         <p:nvSpPr>
-          <p:cNvPr id="25" name="Rounded Rectangle 24"/>
+          <p:cNvPr id="19" name="Rounded Rectangle 18"/>
           <p:cNvSpPr/>
           <p:nvPr/>
         </p:nvSpPr>
         <p:spPr>
           <a:xfrm>
-            <a:off x="7452360" y="5532120"/>
-            <a:ext cx="4023360" cy="685800"/>
+            <a:off x="7132320" y="5532120"/>
+            <a:ext cx="4343400" cy="685800"/>
           </a:xfrm>
           <a:prstGeom prst="roundRect">
             <a:avLst>
@@ -7513,14 +6747,14 @@
       </p:sp>
       <p:sp>
         <p:nvSpPr>
-          <p:cNvPr id="26" name="TextBox 25"/>
+          <p:cNvPr id="20" name="TextBox 19"/>
           <p:cNvSpPr txBox="1"/>
           <p:nvPr/>
         </p:nvSpPr>
         <p:spPr>
           <a:xfrm>
-            <a:off x="7680960" y="5715000"/>
-            <a:ext cx="3566160" cy="365760"/>
+            <a:off x="7360920" y="5715000"/>
+            <a:ext cx="3886200" cy="365760"/>
           </a:xfrm>
           <a:prstGeom prst="rect">
             <a:avLst/>
@@ -7698,21 +6932,19 @@
         </p:nvSpPr>
         <p:spPr>
           <a:xfrm>
-            <a:off x="685800" y="1874519"/>
-            <a:ext cx="6400800" cy="4023360"/>
+            <a:off x="1105144" y="1920239"/>
+            <a:ext cx="5269502" cy="4206240"/>
           </a:xfrm>
           <a:prstGeom prst="roundRect">
             <a:avLst>
-              <a:gd name="adj" fmla="val 5000"/>
+              <a:gd name="adj" fmla="val 2000"/>
             </a:avLst>
           </a:prstGeom>
           <a:solidFill>
-            <a:srgbClr val="FFFFFF"/>
+            <a:srgbClr val="E6EEE7"/>
           </a:solidFill>
-          <a:ln w="19050">
-            <a:solidFill>
-              <a:srgbClr val="D3E4D5"/>
-            </a:solidFill>
+          <a:ln>
+            <a:noFill/>
           </a:ln>
           <a:effectLst/>
         </p:spPr>
@@ -7738,825 +6970,40 @@
           </a:p>
         </p:txBody>
       </p:sp>
-      <p:sp>
-        <p:nvSpPr>
-          <p:cNvPr id="6" name="TextBox 5"/>
-          <p:cNvSpPr txBox="1"/>
-          <p:nvPr/>
-        </p:nvSpPr>
-        <p:spPr>
-          <a:xfrm>
-            <a:off x="960120" y="2103120"/>
-            <a:ext cx="5029200" cy="320040"/>
-          </a:xfrm>
-          <a:prstGeom prst="rect">
-            <a:avLst/>
-          </a:prstGeom>
-          <a:noFill/>
-        </p:spPr>
-        <p:txBody>
-          <a:bodyPr wrap="square" lIns="0" rIns="0" tIns="0" bIns="0" anchor="t">
-            <a:spAutoFit/>
-          </a:bodyPr>
-          <a:lstStyle/>
-          <a:p>
-            <a:pPr algn="l">
-              <a:spcAft>
-                <a:spcPts val="500"/>
-              </a:spcAft>
-            </a:pPr>
-            <a:r>
-              <a:rPr sz="1700" b="1">
-                <a:solidFill>
-                  <a:srgbClr val="2A7A3B"/>
-                </a:solidFill>
-                <a:latin typeface="Calibri"/>
-              </a:rPr>
-              <a:t>Vendre un abonnement</a:t>
-            </a:r>
-          </a:p>
-        </p:txBody>
-      </p:sp>
-      <p:sp>
-        <p:nvSpPr>
-          <p:cNvPr id="7" name="Rounded Rectangle 6"/>
+      <p:pic>
+        <p:nvPicPr>
+          <p:cNvPr id="6" name="Picture 5" descr="07_vendre_abonnement.png"/>
+          <p:cNvPicPr>
+            <a:picLocks noChangeAspect="1"/>
+          </p:cNvPicPr>
+          <p:nvPr/>
+        </p:nvPicPr>
+        <p:blipFill>
+          <a:blip r:embed="rId2"/>
+          <a:stretch>
+            <a:fillRect/>
+          </a:stretch>
+        </p:blipFill>
+        <p:spPr>
+          <a:xfrm>
+            <a:off x="1068568" y="1874519"/>
+            <a:ext cx="5269502" cy="4206240"/>
+          </a:xfrm>
+          <a:prstGeom prst="rect">
+            <a:avLst/>
+          </a:prstGeom>
+        </p:spPr>
+      </p:pic>
+      <p:sp>
+        <p:nvSpPr>
+          <p:cNvPr id="7" name="Oval 6"/>
           <p:cNvSpPr/>
           <p:nvPr/>
         </p:nvSpPr>
         <p:spPr>
           <a:xfrm>
-            <a:off x="960120" y="2560320"/>
-            <a:ext cx="1874519" cy="914400"/>
-          </a:xfrm>
-          <a:prstGeom prst="roundRect">
-            <a:avLst>
-              <a:gd name="adj" fmla="val 8000"/>
-            </a:avLst>
-          </a:prstGeom>
-          <a:solidFill>
-            <a:srgbClr val="FFFFFF"/>
-          </a:solidFill>
-          <a:ln w="15875">
-            <a:solidFill>
-              <a:srgbClr val="D3E4D5"/>
-            </a:solidFill>
-          </a:ln>
-          <a:effectLst/>
-        </p:spPr>
-        <p:style>
-          <a:lnRef idx="1">
-            <a:schemeClr val="accent1"/>
-          </a:lnRef>
-          <a:fillRef idx="3">
-            <a:schemeClr val="accent1"/>
-          </a:fillRef>
-          <a:effectRef idx="2">
-            <a:schemeClr val="accent1"/>
-          </a:effectRef>
-          <a:fontRef idx="minor">
-            <a:schemeClr val="lt1"/>
-          </a:fontRef>
-        </p:style>
-        <p:txBody>
-          <a:bodyPr rtlCol="0" anchor="ctr"/>
-          <a:lstStyle/>
-          <a:p>
-            <a:pPr algn="ctr"/>
-          </a:p>
-        </p:txBody>
-      </p:sp>
-      <p:sp>
-        <p:nvSpPr>
-          <p:cNvPr id="8" name="TextBox 7"/>
-          <p:cNvSpPr txBox="1"/>
-          <p:nvPr/>
-        </p:nvSpPr>
-        <p:spPr>
-          <a:xfrm>
-            <a:off x="1051560" y="2743200"/>
-            <a:ext cx="1691640" cy="228600"/>
-          </a:xfrm>
-          <a:prstGeom prst="rect">
-            <a:avLst/>
-          </a:prstGeom>
-          <a:noFill/>
-        </p:spPr>
-        <p:txBody>
-          <a:bodyPr wrap="square" lIns="0" rIns="0" tIns="0" bIns="0" anchor="t">
-            <a:spAutoFit/>
-          </a:bodyPr>
-          <a:lstStyle/>
-          <a:p>
-            <a:pPr algn="ctr">
-              <a:spcAft>
-                <a:spcPts val="0"/>
-              </a:spcAft>
-            </a:pPr>
-            <a:r>
-              <a:rPr sz="1150" b="1">
-                <a:solidFill>
-                  <a:srgbClr val="2A7A3B"/>
-                </a:solidFill>
-                <a:latin typeface="Calibri"/>
-              </a:rPr>
-              <a:t>Mensuel 4</a:t>
-            </a:r>
-          </a:p>
-        </p:txBody>
-      </p:sp>
-      <p:sp>
-        <p:nvSpPr>
-          <p:cNvPr id="9" name="TextBox 8"/>
-          <p:cNvSpPr txBox="1"/>
-          <p:nvPr/>
-        </p:nvSpPr>
-        <p:spPr>
-          <a:xfrm>
-            <a:off x="1051560" y="3063240"/>
-            <a:ext cx="1691640" cy="228600"/>
-          </a:xfrm>
-          <a:prstGeom prst="rect">
-            <a:avLst/>
-          </a:prstGeom>
-          <a:noFill/>
-        </p:spPr>
-        <p:txBody>
-          <a:bodyPr wrap="square" lIns="0" rIns="0" tIns="0" bIns="0" anchor="t">
-            <a:spAutoFit/>
-          </a:bodyPr>
-          <a:lstStyle/>
-          <a:p>
-            <a:pPr algn="ctr">
-              <a:spcAft>
-                <a:spcPts val="0"/>
-              </a:spcAft>
-            </a:pPr>
-            <a:r>
-              <a:rPr sz="1200" b="1">
-                <a:solidFill>
-                  <a:srgbClr val="2D3A2E"/>
-                </a:solidFill>
-                <a:latin typeface="Calibri"/>
-              </a:rPr>
-              <a:t>180 000 GNF</a:t>
-            </a:r>
-          </a:p>
-        </p:txBody>
-      </p:sp>
-      <p:sp>
-        <p:nvSpPr>
-          <p:cNvPr id="10" name="Rounded Rectangle 9"/>
-          <p:cNvSpPr/>
-          <p:nvPr/>
-        </p:nvSpPr>
-        <p:spPr>
-          <a:xfrm>
-            <a:off x="2971800" y="2560320"/>
-            <a:ext cx="1874519" cy="914400"/>
-          </a:xfrm>
-          <a:prstGeom prst="roundRect">
-            <a:avLst>
-              <a:gd name="adj" fmla="val 8000"/>
-            </a:avLst>
-          </a:prstGeom>
-          <a:solidFill>
-            <a:srgbClr val="E8F7EA"/>
-          </a:solidFill>
-          <a:ln w="28575">
-            <a:solidFill>
-              <a:srgbClr val="4CAF50"/>
-            </a:solidFill>
-          </a:ln>
-          <a:effectLst/>
-        </p:spPr>
-        <p:style>
-          <a:lnRef idx="1">
-            <a:schemeClr val="accent1"/>
-          </a:lnRef>
-          <a:fillRef idx="3">
-            <a:schemeClr val="accent1"/>
-          </a:fillRef>
-          <a:effectRef idx="2">
-            <a:schemeClr val="accent1"/>
-          </a:effectRef>
-          <a:fontRef idx="minor">
-            <a:schemeClr val="lt1"/>
-          </a:fontRef>
-        </p:style>
-        <p:txBody>
-          <a:bodyPr rtlCol="0" anchor="ctr"/>
-          <a:lstStyle/>
-          <a:p>
-            <a:pPr algn="ctr"/>
-          </a:p>
-        </p:txBody>
-      </p:sp>
-      <p:sp>
-        <p:nvSpPr>
-          <p:cNvPr id="11" name="TextBox 10"/>
-          <p:cNvSpPr txBox="1"/>
-          <p:nvPr/>
-        </p:nvSpPr>
-        <p:spPr>
-          <a:xfrm>
-            <a:off x="3063240" y="2743200"/>
-            <a:ext cx="1691640" cy="228600"/>
-          </a:xfrm>
-          <a:prstGeom prst="rect">
-            <a:avLst/>
-          </a:prstGeom>
-          <a:noFill/>
-        </p:spPr>
-        <p:txBody>
-          <a:bodyPr wrap="square" lIns="0" rIns="0" tIns="0" bIns="0" anchor="t">
-            <a:spAutoFit/>
-          </a:bodyPr>
-          <a:lstStyle/>
-          <a:p>
-            <a:pPr algn="ctr">
-              <a:spcAft>
-                <a:spcPts val="0"/>
-              </a:spcAft>
-            </a:pPr>
-            <a:r>
-              <a:rPr sz="1150" b="1">
-                <a:solidFill>
-                  <a:srgbClr val="2A7A3B"/>
-                </a:solidFill>
-                <a:latin typeface="Calibri"/>
-              </a:rPr>
-              <a:t>Mensuel 8</a:t>
-            </a:r>
-          </a:p>
-        </p:txBody>
-      </p:sp>
-      <p:sp>
-        <p:nvSpPr>
-          <p:cNvPr id="12" name="TextBox 11"/>
-          <p:cNvSpPr txBox="1"/>
-          <p:nvPr/>
-        </p:nvSpPr>
-        <p:spPr>
-          <a:xfrm>
-            <a:off x="3063240" y="3063240"/>
-            <a:ext cx="1691640" cy="228600"/>
-          </a:xfrm>
-          <a:prstGeom prst="rect">
-            <a:avLst/>
-          </a:prstGeom>
-          <a:noFill/>
-        </p:spPr>
-        <p:txBody>
-          <a:bodyPr wrap="square" lIns="0" rIns="0" tIns="0" bIns="0" anchor="t">
-            <a:spAutoFit/>
-          </a:bodyPr>
-          <a:lstStyle/>
-          <a:p>
-            <a:pPr algn="ctr">
-              <a:spcAft>
-                <a:spcPts val="0"/>
-              </a:spcAft>
-            </a:pPr>
-            <a:r>
-              <a:rPr sz="1200" b="1">
-                <a:solidFill>
-                  <a:srgbClr val="2D3A2E"/>
-                </a:solidFill>
-                <a:latin typeface="Calibri"/>
-              </a:rPr>
-              <a:t>320 000 GNF</a:t>
-            </a:r>
-          </a:p>
-        </p:txBody>
-      </p:sp>
-      <p:sp>
-        <p:nvSpPr>
-          <p:cNvPr id="13" name="Rounded Rectangle 12"/>
-          <p:cNvSpPr/>
-          <p:nvPr/>
-        </p:nvSpPr>
-        <p:spPr>
-          <a:xfrm>
-            <a:off x="4983480" y="2560320"/>
-            <a:ext cx="1874519" cy="914400"/>
-          </a:xfrm>
-          <a:prstGeom prst="roundRect">
-            <a:avLst>
-              <a:gd name="adj" fmla="val 8000"/>
-            </a:avLst>
-          </a:prstGeom>
-          <a:solidFill>
-            <a:srgbClr val="FFFFFF"/>
-          </a:solidFill>
-          <a:ln w="15875">
-            <a:solidFill>
-              <a:srgbClr val="D3E4D5"/>
-            </a:solidFill>
-          </a:ln>
-          <a:effectLst/>
-        </p:spPr>
-        <p:style>
-          <a:lnRef idx="1">
-            <a:schemeClr val="accent1"/>
-          </a:lnRef>
-          <a:fillRef idx="3">
-            <a:schemeClr val="accent1"/>
-          </a:fillRef>
-          <a:effectRef idx="2">
-            <a:schemeClr val="accent1"/>
-          </a:effectRef>
-          <a:fontRef idx="minor">
-            <a:schemeClr val="lt1"/>
-          </a:fontRef>
-        </p:style>
-        <p:txBody>
-          <a:bodyPr rtlCol="0" anchor="ctr"/>
-          <a:lstStyle/>
-          <a:p>
-            <a:pPr algn="ctr"/>
-          </a:p>
-        </p:txBody>
-      </p:sp>
-      <p:sp>
-        <p:nvSpPr>
-          <p:cNvPr id="14" name="TextBox 13"/>
-          <p:cNvSpPr txBox="1"/>
-          <p:nvPr/>
-        </p:nvSpPr>
-        <p:spPr>
-          <a:xfrm>
-            <a:off x="5074920" y="2743200"/>
-            <a:ext cx="1691640" cy="228600"/>
-          </a:xfrm>
-          <a:prstGeom prst="rect">
-            <a:avLst/>
-          </a:prstGeom>
-          <a:noFill/>
-        </p:spPr>
-        <p:txBody>
-          <a:bodyPr wrap="square" lIns="0" rIns="0" tIns="0" bIns="0" anchor="t">
-            <a:spAutoFit/>
-          </a:bodyPr>
-          <a:lstStyle/>
-          <a:p>
-            <a:pPr algn="ctr">
-              <a:spcAft>
-                <a:spcPts val="0"/>
-              </a:spcAft>
-            </a:pPr>
-            <a:r>
-              <a:rPr sz="1150" b="1">
-                <a:solidFill>
-                  <a:srgbClr val="2A7A3B"/>
-                </a:solidFill>
-                <a:latin typeface="Calibri"/>
-              </a:rPr>
-              <a:t>VIP Illimité</a:t>
-            </a:r>
-          </a:p>
-        </p:txBody>
-      </p:sp>
-      <p:sp>
-        <p:nvSpPr>
-          <p:cNvPr id="15" name="TextBox 14"/>
-          <p:cNvSpPr txBox="1"/>
-          <p:nvPr/>
-        </p:nvSpPr>
-        <p:spPr>
-          <a:xfrm>
-            <a:off x="5074920" y="3063240"/>
-            <a:ext cx="1691640" cy="228600"/>
-          </a:xfrm>
-          <a:prstGeom prst="rect">
-            <a:avLst/>
-          </a:prstGeom>
-          <a:noFill/>
-        </p:spPr>
-        <p:txBody>
-          <a:bodyPr wrap="square" lIns="0" rIns="0" tIns="0" bIns="0" anchor="t">
-            <a:spAutoFit/>
-          </a:bodyPr>
-          <a:lstStyle/>
-          <a:p>
-            <a:pPr algn="ctr">
-              <a:spcAft>
-                <a:spcPts val="0"/>
-              </a:spcAft>
-            </a:pPr>
-            <a:r>
-              <a:rPr sz="1200" b="1">
-                <a:solidFill>
-                  <a:srgbClr val="2D3A2E"/>
-                </a:solidFill>
-                <a:latin typeface="Calibri"/>
-              </a:rPr>
-              <a:t>500 000 GNF</a:t>
-            </a:r>
-          </a:p>
-        </p:txBody>
-      </p:sp>
-      <p:sp>
-        <p:nvSpPr>
-          <p:cNvPr id="16" name="TextBox 15"/>
-          <p:cNvSpPr txBox="1"/>
-          <p:nvPr/>
-        </p:nvSpPr>
-        <p:spPr>
-          <a:xfrm>
-            <a:off x="960120" y="3703320"/>
-            <a:ext cx="2834640" cy="182880"/>
-          </a:xfrm>
-          <a:prstGeom prst="rect">
-            <a:avLst/>
-          </a:prstGeom>
-          <a:noFill/>
-        </p:spPr>
-        <p:txBody>
-          <a:bodyPr wrap="square" lIns="0" rIns="0" tIns="0" bIns="0" anchor="t">
-            <a:spAutoFit/>
-          </a:bodyPr>
-          <a:lstStyle/>
-          <a:p>
-            <a:pPr algn="l">
-              <a:spcAft>
-                <a:spcPts val="0"/>
-              </a:spcAft>
-            </a:pPr>
-            <a:r>
-              <a:rPr sz="950" b="1">
-                <a:solidFill>
-                  <a:srgbClr val="7C8F7E"/>
-                </a:solidFill>
-                <a:latin typeface="Calibri"/>
-              </a:rPr>
-              <a:t>MODE DE PAIEMENT</a:t>
-            </a:r>
-          </a:p>
-        </p:txBody>
-      </p:sp>
-      <p:sp>
-        <p:nvSpPr>
-          <p:cNvPr id="17" name="Rounded Rectangle 16"/>
-          <p:cNvSpPr/>
-          <p:nvPr/>
-        </p:nvSpPr>
-        <p:spPr>
-          <a:xfrm>
-            <a:off x="960120" y="3922776"/>
-            <a:ext cx="2834640" cy="347472"/>
-          </a:xfrm>
-          <a:prstGeom prst="roundRect">
-            <a:avLst>
-              <a:gd name="adj" fmla="val 25000"/>
-            </a:avLst>
-          </a:prstGeom>
-          <a:solidFill>
-            <a:srgbClr val="FFFFFF"/>
-          </a:solidFill>
-          <a:ln w="15875">
-            <a:solidFill>
-              <a:srgbClr val="D3E4D5"/>
-            </a:solidFill>
-          </a:ln>
-          <a:effectLst/>
-        </p:spPr>
-        <p:style>
-          <a:lnRef idx="1">
-            <a:schemeClr val="accent1"/>
-          </a:lnRef>
-          <a:fillRef idx="3">
-            <a:schemeClr val="accent1"/>
-          </a:fillRef>
-          <a:effectRef idx="2">
-            <a:schemeClr val="accent1"/>
-          </a:effectRef>
-          <a:fontRef idx="minor">
-            <a:schemeClr val="lt1"/>
-          </a:fontRef>
-        </p:style>
-        <p:txBody>
-          <a:bodyPr rtlCol="0" anchor="ctr"/>
-          <a:lstStyle/>
-          <a:p>
-            <a:pPr algn="ctr"/>
-          </a:p>
-        </p:txBody>
-      </p:sp>
-      <p:sp>
-        <p:nvSpPr>
-          <p:cNvPr id="18" name="TextBox 17"/>
-          <p:cNvSpPr txBox="1"/>
-          <p:nvPr/>
-        </p:nvSpPr>
-        <p:spPr>
-          <a:xfrm>
-            <a:off x="1088136" y="4005072"/>
-            <a:ext cx="2578608" cy="201168"/>
-          </a:xfrm>
-          <a:prstGeom prst="rect">
-            <a:avLst/>
-          </a:prstGeom>
-          <a:noFill/>
-        </p:spPr>
-        <p:txBody>
-          <a:bodyPr wrap="square" lIns="0" rIns="0" tIns="0" bIns="0" anchor="t">
-            <a:spAutoFit/>
-          </a:bodyPr>
-          <a:lstStyle/>
-          <a:p>
-            <a:pPr algn="l">
-              <a:spcAft>
-                <a:spcPts val="0"/>
-              </a:spcAft>
-            </a:pPr>
-            <a:r>
-              <a:rPr sz="1150" b="0">
-                <a:solidFill>
-                  <a:srgbClr val="2D3A2E"/>
-                </a:solidFill>
-                <a:latin typeface="Calibri"/>
-              </a:rPr>
-              <a:t>Orange Money</a:t>
-            </a:r>
-          </a:p>
-        </p:txBody>
-      </p:sp>
-      <p:sp>
-        <p:nvSpPr>
-          <p:cNvPr id="19" name="TextBox 18"/>
-          <p:cNvSpPr txBox="1"/>
-          <p:nvPr/>
-        </p:nvSpPr>
-        <p:spPr>
-          <a:xfrm>
-            <a:off x="4069080" y="3703320"/>
-            <a:ext cx="2743200" cy="182880"/>
-          </a:xfrm>
-          <a:prstGeom prst="rect">
-            <a:avLst/>
-          </a:prstGeom>
-          <a:noFill/>
-        </p:spPr>
-        <p:txBody>
-          <a:bodyPr wrap="square" lIns="0" rIns="0" tIns="0" bIns="0" anchor="t">
-            <a:spAutoFit/>
-          </a:bodyPr>
-          <a:lstStyle/>
-          <a:p>
-            <a:pPr algn="l">
-              <a:spcAft>
-                <a:spcPts val="0"/>
-              </a:spcAft>
-            </a:pPr>
-            <a:r>
-              <a:rPr sz="950" b="1">
-                <a:solidFill>
-                  <a:srgbClr val="7C8F7E"/>
-                </a:solidFill>
-                <a:latin typeface="Calibri"/>
-              </a:rPr>
-              <a:t>MONTANT PAYÉ (GNF)</a:t>
-            </a:r>
-          </a:p>
-        </p:txBody>
-      </p:sp>
-      <p:sp>
-        <p:nvSpPr>
-          <p:cNvPr id="20" name="Rounded Rectangle 19"/>
-          <p:cNvSpPr/>
-          <p:nvPr/>
-        </p:nvSpPr>
-        <p:spPr>
-          <a:xfrm>
-            <a:off x="4069080" y="3922776"/>
-            <a:ext cx="2743200" cy="347472"/>
-          </a:xfrm>
-          <a:prstGeom prst="roundRect">
-            <a:avLst>
-              <a:gd name="adj" fmla="val 25000"/>
-            </a:avLst>
-          </a:prstGeom>
-          <a:solidFill>
-            <a:srgbClr val="FFFFFF"/>
-          </a:solidFill>
-          <a:ln w="15875">
-            <a:solidFill>
-              <a:srgbClr val="D3E4D5"/>
-            </a:solidFill>
-          </a:ln>
-          <a:effectLst/>
-        </p:spPr>
-        <p:style>
-          <a:lnRef idx="1">
-            <a:schemeClr val="accent1"/>
-          </a:lnRef>
-          <a:fillRef idx="3">
-            <a:schemeClr val="accent1"/>
-          </a:fillRef>
-          <a:effectRef idx="2">
-            <a:schemeClr val="accent1"/>
-          </a:effectRef>
-          <a:fontRef idx="minor">
-            <a:schemeClr val="lt1"/>
-          </a:fontRef>
-        </p:style>
-        <p:txBody>
-          <a:bodyPr rtlCol="0" anchor="ctr"/>
-          <a:lstStyle/>
-          <a:p>
-            <a:pPr algn="ctr"/>
-          </a:p>
-        </p:txBody>
-      </p:sp>
-      <p:sp>
-        <p:nvSpPr>
-          <p:cNvPr id="21" name="TextBox 20"/>
-          <p:cNvSpPr txBox="1"/>
-          <p:nvPr/>
-        </p:nvSpPr>
-        <p:spPr>
-          <a:xfrm>
-            <a:off x="4197096" y="4005072"/>
-            <a:ext cx="2487168" cy="201168"/>
-          </a:xfrm>
-          <a:prstGeom prst="rect">
-            <a:avLst/>
-          </a:prstGeom>
-          <a:noFill/>
-        </p:spPr>
-        <p:txBody>
-          <a:bodyPr wrap="square" lIns="0" rIns="0" tIns="0" bIns="0" anchor="t">
-            <a:spAutoFit/>
-          </a:bodyPr>
-          <a:lstStyle/>
-          <a:p>
-            <a:pPr algn="l">
-              <a:spcAft>
-                <a:spcPts val="0"/>
-              </a:spcAft>
-            </a:pPr>
-            <a:r>
-              <a:rPr sz="1150" b="0">
-                <a:solidFill>
-                  <a:srgbClr val="7C8F7E"/>
-                </a:solidFill>
-                <a:latin typeface="Calibri"/>
-              </a:rPr>
-              <a:t>320 000</a:t>
-            </a:r>
-          </a:p>
-        </p:txBody>
-      </p:sp>
-      <p:sp>
-        <p:nvSpPr>
-          <p:cNvPr id="22" name="Rounded Rectangle 21"/>
-          <p:cNvSpPr/>
-          <p:nvPr/>
-        </p:nvSpPr>
-        <p:spPr>
-          <a:xfrm>
-            <a:off x="4069080" y="4526280"/>
-            <a:ext cx="2743200" cy="384048"/>
-          </a:xfrm>
-          <a:prstGeom prst="roundRect">
-            <a:avLst>
-              <a:gd name="adj" fmla="val 20000"/>
-            </a:avLst>
-          </a:prstGeom>
-          <a:solidFill>
-            <a:srgbClr val="FFF8E1"/>
-          </a:solidFill>
-          <a:ln>
-            <a:noFill/>
-          </a:ln>
-          <a:effectLst/>
-        </p:spPr>
-        <p:style>
-          <a:lnRef idx="1">
-            <a:schemeClr val="accent1"/>
-          </a:lnRef>
-          <a:fillRef idx="3">
-            <a:schemeClr val="accent1"/>
-          </a:fillRef>
-          <a:effectRef idx="2">
-            <a:schemeClr val="accent1"/>
-          </a:effectRef>
-          <a:fontRef idx="minor">
-            <a:schemeClr val="lt1"/>
-          </a:fontRef>
-        </p:style>
-        <p:txBody>
-          <a:bodyPr rtlCol="0" anchor="ctr"/>
-          <a:lstStyle/>
-          <a:p>
-            <a:pPr algn="ctr"/>
-          </a:p>
-        </p:txBody>
-      </p:sp>
-      <p:sp>
-        <p:nvSpPr>
-          <p:cNvPr id="23" name="TextBox 22"/>
-          <p:cNvSpPr txBox="1"/>
-          <p:nvPr/>
-        </p:nvSpPr>
-        <p:spPr>
-          <a:xfrm>
-            <a:off x="4206240" y="4626864"/>
-            <a:ext cx="2514600" cy="228600"/>
-          </a:xfrm>
-          <a:prstGeom prst="rect">
-            <a:avLst/>
-          </a:prstGeom>
-          <a:noFill/>
-        </p:spPr>
-        <p:txBody>
-          <a:bodyPr wrap="square" lIns="0" rIns="0" tIns="0" bIns="0" anchor="t">
-            <a:spAutoFit/>
-          </a:bodyPr>
-          <a:lstStyle/>
-          <a:p>
-            <a:pPr algn="l">
-              <a:spcAft>
-                <a:spcPts val="0"/>
-              </a:spcAft>
-            </a:pPr>
-            <a:r>
-              <a:rPr sz="950" b="1">
-                <a:solidFill>
-                  <a:srgbClr val="2D3A2E"/>
-                </a:solidFill>
-                <a:latin typeface="Calibri"/>
-              </a:rPr>
-              <a:t>Prix du catalogue — non modifiable</a:t>
-            </a:r>
-          </a:p>
-        </p:txBody>
-      </p:sp>
-      <p:sp>
-        <p:nvSpPr>
-          <p:cNvPr id="24" name="Rounded Rectangle 23"/>
-          <p:cNvSpPr/>
-          <p:nvPr/>
-        </p:nvSpPr>
-        <p:spPr>
-          <a:xfrm>
-            <a:off x="3794760" y="5166360"/>
-            <a:ext cx="3017520" cy="411480"/>
-          </a:xfrm>
-          <a:prstGeom prst="roundRect">
-            <a:avLst>
-              <a:gd name="adj" fmla="val 50000"/>
-            </a:avLst>
-          </a:prstGeom>
-          <a:solidFill>
-            <a:srgbClr val="2A7A3B"/>
-          </a:solidFill>
-          <a:ln>
-            <a:noFill/>
-          </a:ln>
-          <a:effectLst/>
-        </p:spPr>
-        <p:style>
-          <a:lnRef idx="1">
-            <a:schemeClr val="accent1"/>
-          </a:lnRef>
-          <a:fillRef idx="3">
-            <a:schemeClr val="accent1"/>
-          </a:fillRef>
-          <a:effectRef idx="2">
-            <a:schemeClr val="accent1"/>
-          </a:effectRef>
-          <a:fontRef idx="minor">
-            <a:schemeClr val="lt1"/>
-          </a:fontRef>
-        </p:style>
-        <p:txBody>
-          <a:bodyPr rtlCol="0" anchor="ctr" lIns="0" rIns="0" tIns="0" bIns="0"/>
-          <a:lstStyle/>
-          <a:p>
-            <a:pPr algn="ctr"/>
-            <a:r>
-              <a:rPr sz="1200" b="1">
-                <a:solidFill>
-                  <a:srgbClr val="FFFFFF"/>
-                </a:solidFill>
-                <a:latin typeface="Calibri"/>
-              </a:rPr>
-              <a:t>Encaisser et imprimer le reçu</a:t>
-            </a:r>
-          </a:p>
-        </p:txBody>
-      </p:sp>
-      <p:sp>
-        <p:nvSpPr>
-          <p:cNvPr id="25" name="Oval 24"/>
-          <p:cNvSpPr/>
-          <p:nvPr/>
-        </p:nvSpPr>
-        <p:spPr>
-          <a:xfrm>
-            <a:off x="7452360" y="2057400"/>
-            <a:ext cx="457200" cy="457200"/>
+            <a:off x="5092146" y="2658343"/>
+            <a:ext cx="384048" cy="384048"/>
           </a:xfrm>
           <a:prstGeom prst="ellipse">
             <a:avLst/>
@@ -8589,6 +7036,218 @@
           <a:p>
             <a:pPr algn="ctr"/>
             <a:r>
+              <a:rPr sz="1400" b="1">
+                <a:solidFill>
+                  <a:srgbClr val="2D3A2E"/>
+                </a:solidFill>
+                <a:latin typeface="Calibri"/>
+              </a:rPr>
+              <a:t>1</a:t>
+            </a:r>
+          </a:p>
+        </p:txBody>
+      </p:sp>
+      <p:sp>
+        <p:nvSpPr>
+          <p:cNvPr id="8" name="Oval 7"/>
+          <p:cNvSpPr/>
+          <p:nvPr/>
+        </p:nvSpPr>
+        <p:spPr>
+          <a:xfrm>
+            <a:off x="4723281" y="4424964"/>
+            <a:ext cx="384048" cy="384048"/>
+          </a:xfrm>
+          <a:prstGeom prst="ellipse">
+            <a:avLst/>
+          </a:prstGeom>
+          <a:solidFill>
+            <a:srgbClr val="F5C518"/>
+          </a:solidFill>
+          <a:ln>
+            <a:noFill/>
+          </a:ln>
+          <a:effectLst/>
+        </p:spPr>
+        <p:style>
+          <a:lnRef idx="1">
+            <a:schemeClr val="accent1"/>
+          </a:lnRef>
+          <a:fillRef idx="3">
+            <a:schemeClr val="accent1"/>
+          </a:fillRef>
+          <a:effectRef idx="2">
+            <a:schemeClr val="accent1"/>
+          </a:effectRef>
+          <a:fontRef idx="minor">
+            <a:schemeClr val="lt1"/>
+          </a:fontRef>
+        </p:style>
+        <p:txBody>
+          <a:bodyPr rtlCol="0" anchor="ctr" lIns="0" rIns="0" tIns="0" bIns="0"/>
+          <a:lstStyle/>
+          <a:p>
+            <a:pPr algn="ctr"/>
+            <a:r>
+              <a:rPr sz="1400" b="1">
+                <a:solidFill>
+                  <a:srgbClr val="2D3A2E"/>
+                </a:solidFill>
+                <a:latin typeface="Calibri"/>
+              </a:rPr>
+              <a:t>2</a:t>
+            </a:r>
+          </a:p>
+        </p:txBody>
+      </p:sp>
+      <p:sp>
+        <p:nvSpPr>
+          <p:cNvPr id="9" name="Oval 8"/>
+          <p:cNvSpPr/>
+          <p:nvPr/>
+        </p:nvSpPr>
+        <p:spPr>
+          <a:xfrm>
+            <a:off x="2562785" y="5219943"/>
+            <a:ext cx="384048" cy="384048"/>
+          </a:xfrm>
+          <a:prstGeom prst="ellipse">
+            <a:avLst/>
+          </a:prstGeom>
+          <a:solidFill>
+            <a:srgbClr val="F5C518"/>
+          </a:solidFill>
+          <a:ln>
+            <a:noFill/>
+          </a:ln>
+          <a:effectLst/>
+        </p:spPr>
+        <p:style>
+          <a:lnRef idx="1">
+            <a:schemeClr val="accent1"/>
+          </a:lnRef>
+          <a:fillRef idx="3">
+            <a:schemeClr val="accent1"/>
+          </a:fillRef>
+          <a:effectRef idx="2">
+            <a:schemeClr val="accent1"/>
+          </a:effectRef>
+          <a:fontRef idx="minor">
+            <a:schemeClr val="lt1"/>
+          </a:fontRef>
+        </p:style>
+        <p:txBody>
+          <a:bodyPr rtlCol="0" anchor="ctr" lIns="0" rIns="0" tIns="0" bIns="0"/>
+          <a:lstStyle/>
+          <a:p>
+            <a:pPr algn="ctr"/>
+            <a:r>
+              <a:rPr sz="1400" b="1">
+                <a:solidFill>
+                  <a:srgbClr val="2D3A2E"/>
+                </a:solidFill>
+                <a:latin typeface="Calibri"/>
+              </a:rPr>
+              <a:t>3</a:t>
+            </a:r>
+          </a:p>
+        </p:txBody>
+      </p:sp>
+      <p:sp>
+        <p:nvSpPr>
+          <p:cNvPr id="10" name="Oval 9"/>
+          <p:cNvSpPr/>
+          <p:nvPr/>
+        </p:nvSpPr>
+        <p:spPr>
+          <a:xfrm>
+            <a:off x="5039451" y="5535411"/>
+            <a:ext cx="384048" cy="384048"/>
+          </a:xfrm>
+          <a:prstGeom prst="ellipse">
+            <a:avLst/>
+          </a:prstGeom>
+          <a:solidFill>
+            <a:srgbClr val="F5C518"/>
+          </a:solidFill>
+          <a:ln>
+            <a:noFill/>
+          </a:ln>
+          <a:effectLst/>
+        </p:spPr>
+        <p:style>
+          <a:lnRef idx="1">
+            <a:schemeClr val="accent1"/>
+          </a:lnRef>
+          <a:fillRef idx="3">
+            <a:schemeClr val="accent1"/>
+          </a:fillRef>
+          <a:effectRef idx="2">
+            <a:schemeClr val="accent1"/>
+          </a:effectRef>
+          <a:fontRef idx="minor">
+            <a:schemeClr val="lt1"/>
+          </a:fontRef>
+        </p:style>
+        <p:txBody>
+          <a:bodyPr rtlCol="0" anchor="ctr" lIns="0" rIns="0" tIns="0" bIns="0"/>
+          <a:lstStyle/>
+          <a:p>
+            <a:pPr algn="ctr"/>
+            <a:r>
+              <a:rPr sz="1400" b="1">
+                <a:solidFill>
+                  <a:srgbClr val="2D3A2E"/>
+                </a:solidFill>
+                <a:latin typeface="Calibri"/>
+              </a:rPr>
+              <a:t>4</a:t>
+            </a:r>
+          </a:p>
+        </p:txBody>
+      </p:sp>
+      <p:sp>
+        <p:nvSpPr>
+          <p:cNvPr id="11" name="Oval 10"/>
+          <p:cNvSpPr/>
+          <p:nvPr/>
+        </p:nvSpPr>
+        <p:spPr>
+          <a:xfrm>
+            <a:off x="7132320" y="2057400"/>
+            <a:ext cx="457200" cy="457200"/>
+          </a:xfrm>
+          <a:prstGeom prst="ellipse">
+            <a:avLst/>
+          </a:prstGeom>
+          <a:solidFill>
+            <a:srgbClr val="F5C518"/>
+          </a:solidFill>
+          <a:ln>
+            <a:noFill/>
+          </a:ln>
+          <a:effectLst/>
+        </p:spPr>
+        <p:style>
+          <a:lnRef idx="1">
+            <a:schemeClr val="accent1"/>
+          </a:lnRef>
+          <a:fillRef idx="3">
+            <a:schemeClr val="accent1"/>
+          </a:fillRef>
+          <a:effectRef idx="2">
+            <a:schemeClr val="accent1"/>
+          </a:effectRef>
+          <a:fontRef idx="minor">
+            <a:schemeClr val="lt1"/>
+          </a:fontRef>
+        </p:style>
+        <p:txBody>
+          <a:bodyPr rtlCol="0" anchor="ctr" lIns="0" rIns="0" tIns="0" bIns="0"/>
+          <a:lstStyle/>
+          <a:p>
+            <a:pPr algn="ctr"/>
+            <a:r>
               <a:rPr sz="1500" b="1">
                 <a:solidFill>
                   <a:srgbClr val="2D3A2E"/>
@@ -8602,14 +7261,14 @@
       </p:sp>
       <p:sp>
         <p:nvSpPr>
-          <p:cNvPr id="26" name="TextBox 25"/>
+          <p:cNvPr id="12" name="TextBox 11"/>
           <p:cNvSpPr txBox="1"/>
           <p:nvPr/>
         </p:nvSpPr>
         <p:spPr>
           <a:xfrm>
-            <a:off x="8110728" y="2075688"/>
-            <a:ext cx="3566160" cy="320040"/>
+            <a:off x="7790688" y="2075688"/>
+            <a:ext cx="4206240" cy="320040"/>
           </a:xfrm>
           <a:prstGeom prst="rect">
             <a:avLst/>
@@ -8641,14 +7300,14 @@
       </p:sp>
       <p:sp>
         <p:nvSpPr>
-          <p:cNvPr id="27" name="TextBox 26"/>
+          <p:cNvPr id="13" name="TextBox 12"/>
           <p:cNvSpPr txBox="1"/>
           <p:nvPr/>
         </p:nvSpPr>
         <p:spPr>
           <a:xfrm>
-            <a:off x="8110728" y="2441448"/>
-            <a:ext cx="3566160" cy="502920"/>
+            <a:off x="7790688" y="2441448"/>
+            <a:ext cx="4206240" cy="502920"/>
           </a:xfrm>
           <a:prstGeom prst="rect">
             <a:avLst/>
@@ -8683,13 +7342,13 @@
       </p:sp>
       <p:sp>
         <p:nvSpPr>
-          <p:cNvPr id="28" name="Oval 27"/>
+          <p:cNvPr id="14" name="Oval 13"/>
           <p:cNvSpPr/>
           <p:nvPr/>
         </p:nvSpPr>
         <p:spPr>
           <a:xfrm>
-            <a:off x="7452360" y="3081528"/>
+            <a:off x="7132320" y="3081528"/>
             <a:ext cx="457200" cy="457200"/>
           </a:xfrm>
           <a:prstGeom prst="ellipse">
@@ -8736,14 +7395,14 @@
       </p:sp>
       <p:sp>
         <p:nvSpPr>
-          <p:cNvPr id="29" name="TextBox 28"/>
+          <p:cNvPr id="15" name="TextBox 14"/>
           <p:cNvSpPr txBox="1"/>
           <p:nvPr/>
         </p:nvSpPr>
         <p:spPr>
           <a:xfrm>
-            <a:off x="8110728" y="3099816"/>
-            <a:ext cx="3566160" cy="320040"/>
+            <a:off x="7790688" y="3099816"/>
+            <a:ext cx="4206240" cy="320040"/>
           </a:xfrm>
           <a:prstGeom prst="rect">
             <a:avLst/>
@@ -8775,14 +7434,14 @@
       </p:sp>
       <p:sp>
         <p:nvSpPr>
-          <p:cNvPr id="30" name="TextBox 29"/>
+          <p:cNvPr id="16" name="TextBox 15"/>
           <p:cNvSpPr txBox="1"/>
           <p:nvPr/>
         </p:nvSpPr>
         <p:spPr>
           <a:xfrm>
-            <a:off x="8110728" y="3465576"/>
-            <a:ext cx="3566160" cy="502920"/>
+            <a:off x="7790688" y="3465576"/>
+            <a:ext cx="4206240" cy="502920"/>
           </a:xfrm>
           <a:prstGeom prst="rect">
             <a:avLst/>
@@ -8817,13 +7476,13 @@
       </p:sp>
       <p:sp>
         <p:nvSpPr>
-          <p:cNvPr id="31" name="Oval 30"/>
+          <p:cNvPr id="17" name="Oval 16"/>
           <p:cNvSpPr/>
           <p:nvPr/>
         </p:nvSpPr>
         <p:spPr>
           <a:xfrm>
-            <a:off x="7452360" y="4105656"/>
+            <a:off x="7132320" y="4105656"/>
             <a:ext cx="457200" cy="457200"/>
           </a:xfrm>
           <a:prstGeom prst="ellipse">
@@ -8870,14 +7529,14 @@
       </p:sp>
       <p:sp>
         <p:nvSpPr>
-          <p:cNvPr id="32" name="TextBox 31"/>
+          <p:cNvPr id="18" name="TextBox 17"/>
           <p:cNvSpPr txBox="1"/>
           <p:nvPr/>
         </p:nvSpPr>
         <p:spPr>
           <a:xfrm>
-            <a:off x="8110728" y="4123944"/>
-            <a:ext cx="3566160" cy="320040"/>
+            <a:off x="7790688" y="4123944"/>
+            <a:ext cx="4206240" cy="320040"/>
           </a:xfrm>
           <a:prstGeom prst="rect">
             <a:avLst/>
@@ -8909,14 +7568,14 @@
       </p:sp>
       <p:sp>
         <p:nvSpPr>
-          <p:cNvPr id="33" name="TextBox 32"/>
+          <p:cNvPr id="19" name="TextBox 18"/>
           <p:cNvSpPr txBox="1"/>
           <p:nvPr/>
         </p:nvSpPr>
         <p:spPr>
           <a:xfrm>
-            <a:off x="8110728" y="4489704"/>
-            <a:ext cx="3566160" cy="502920"/>
+            <a:off x="7790688" y="4489704"/>
+            <a:ext cx="4206240" cy="502920"/>
           </a:xfrm>
           <a:prstGeom prst="rect">
             <a:avLst/>
@@ -8951,13 +7610,13 @@
       </p:sp>
       <p:sp>
         <p:nvSpPr>
-          <p:cNvPr id="34" name="Oval 33"/>
+          <p:cNvPr id="20" name="Oval 19"/>
           <p:cNvSpPr/>
           <p:nvPr/>
         </p:nvSpPr>
         <p:spPr>
           <a:xfrm>
-            <a:off x="7452360" y="5129784"/>
+            <a:off x="7132320" y="5129784"/>
             <a:ext cx="457200" cy="457200"/>
           </a:xfrm>
           <a:prstGeom prst="ellipse">
@@ -9004,14 +7663,14 @@
       </p:sp>
       <p:sp>
         <p:nvSpPr>
-          <p:cNvPr id="35" name="TextBox 34"/>
+          <p:cNvPr id="21" name="TextBox 20"/>
           <p:cNvSpPr txBox="1"/>
           <p:nvPr/>
         </p:nvSpPr>
         <p:spPr>
           <a:xfrm>
-            <a:off x="8110728" y="5148072"/>
-            <a:ext cx="3566160" cy="320040"/>
+            <a:off x="7790688" y="5148072"/>
+            <a:ext cx="4206240" cy="320040"/>
           </a:xfrm>
           <a:prstGeom prst="rect">
             <a:avLst/>
@@ -9043,14 +7702,14 @@
       </p:sp>
       <p:sp>
         <p:nvSpPr>
-          <p:cNvPr id="36" name="TextBox 35"/>
+          <p:cNvPr id="22" name="TextBox 21"/>
           <p:cNvSpPr txBox="1"/>
           <p:nvPr/>
         </p:nvSpPr>
         <p:spPr>
           <a:xfrm>
-            <a:off x="8110728" y="5513832"/>
-            <a:ext cx="3566160" cy="502920"/>
+            <a:off x="7790688" y="5513832"/>
+            <a:ext cx="4206240" cy="502920"/>
           </a:xfrm>
           <a:prstGeom prst="rect">
             <a:avLst/>
@@ -9231,21 +7890,19 @@
         </p:nvSpPr>
         <p:spPr>
           <a:xfrm>
-            <a:off x="685800" y="2011680"/>
-            <a:ext cx="5669280" cy="4023360"/>
+            <a:off x="722376" y="2094295"/>
+            <a:ext cx="5669280" cy="3858128"/>
           </a:xfrm>
           <a:prstGeom prst="roundRect">
             <a:avLst>
-              <a:gd name="adj" fmla="val 8000"/>
+              <a:gd name="adj" fmla="val 2000"/>
             </a:avLst>
           </a:prstGeom>
           <a:solidFill>
-            <a:srgbClr val="E8F7EA"/>
+            <a:srgbClr val="E6EEE7"/>
           </a:solidFill>
-          <a:ln w="28575">
-            <a:solidFill>
-              <a:srgbClr val="4CAF50"/>
-            </a:solidFill>
+          <a:ln>
+            <a:noFill/>
           </a:ln>
           <a:effectLst/>
         </p:spPr>
@@ -9271,250 +7928,33 @@
           </a:p>
         </p:txBody>
       </p:sp>
-      <p:sp>
-        <p:nvSpPr>
-          <p:cNvPr id="6" name="TextBox 5"/>
-          <p:cNvSpPr txBox="1"/>
-          <p:nvPr/>
-        </p:nvSpPr>
-        <p:spPr>
-          <a:xfrm>
-            <a:off x="960120" y="2606040"/>
-            <a:ext cx="5120640" cy="548640"/>
-          </a:xfrm>
-          <a:prstGeom prst="rect">
-            <a:avLst/>
-          </a:prstGeom>
-          <a:noFill/>
-        </p:spPr>
-        <p:txBody>
-          <a:bodyPr wrap="square" lIns="0" rIns="0" tIns="0" bIns="0" anchor="t">
-            <a:spAutoFit/>
-          </a:bodyPr>
-          <a:lstStyle/>
-          <a:p>
-            <a:pPr algn="ctr">
-              <a:spcAft>
-                <a:spcPts val="500"/>
-              </a:spcAft>
-            </a:pPr>
-            <a:r>
-              <a:rPr sz="2900" b="1">
-                <a:solidFill>
-                  <a:srgbClr val="2A7A3B"/>
-                </a:solidFill>
-                <a:latin typeface="Calibri"/>
-              </a:rPr>
-              <a:t>ENTRÉE AUTORISÉE</a:t>
-            </a:r>
-          </a:p>
-        </p:txBody>
-      </p:sp>
+      <p:pic>
+        <p:nvPicPr>
+          <p:cNvPr id="6" name="Picture 5" descr="02_entree_autorisee.png"/>
+          <p:cNvPicPr>
+            <a:picLocks noChangeAspect="1"/>
+          </p:cNvPicPr>
+          <p:nvPr/>
+        </p:nvPicPr>
+        <p:blipFill>
+          <a:blip r:embed="rId2"/>
+          <a:stretch>
+            <a:fillRect/>
+          </a:stretch>
+        </p:blipFill>
+        <p:spPr>
+          <a:xfrm>
+            <a:off x="685800" y="2048575"/>
+            <a:ext cx="5669280" cy="3858128"/>
+          </a:xfrm>
+          <a:prstGeom prst="rect">
+            <a:avLst/>
+          </a:prstGeom>
+        </p:spPr>
+      </p:pic>
       <p:sp>
         <p:nvSpPr>
           <p:cNvPr id="7" name="TextBox 6"/>
-          <p:cNvSpPr txBox="1"/>
-          <p:nvPr/>
-        </p:nvSpPr>
-        <p:spPr>
-          <a:xfrm>
-            <a:off x="960120" y="3429000"/>
-            <a:ext cx="5120640" cy="457200"/>
-          </a:xfrm>
-          <a:prstGeom prst="rect">
-            <a:avLst/>
-          </a:prstGeom>
-          <a:noFill/>
-        </p:spPr>
-        <p:txBody>
-          <a:bodyPr wrap="square" lIns="0" rIns="0" tIns="0" bIns="0" anchor="t">
-            <a:spAutoFit/>
-          </a:bodyPr>
-          <a:lstStyle/>
-          <a:p>
-            <a:pPr algn="ctr">
-              <a:spcAft>
-                <a:spcPts val="500"/>
-              </a:spcAft>
-            </a:pPr>
-            <a:r>
-              <a:rPr sz="2400" b="1">
-                <a:solidFill>
-                  <a:srgbClr val="2D3A2E"/>
-                </a:solidFill>
-                <a:latin typeface="Calibri"/>
-              </a:rPr>
-              <a:t>Fatoumata Barry</a:t>
-            </a:r>
-          </a:p>
-        </p:txBody>
-      </p:sp>
-      <p:sp>
-        <p:nvSpPr>
-          <p:cNvPr id="8" name="TextBox 7"/>
-          <p:cNvSpPr txBox="1"/>
-          <p:nvPr/>
-        </p:nvSpPr>
-        <p:spPr>
-          <a:xfrm>
-            <a:off x="960120" y="4005072"/>
-            <a:ext cx="5120640" cy="320040"/>
-          </a:xfrm>
-          <a:prstGeom prst="rect">
-            <a:avLst/>
-          </a:prstGeom>
-          <a:noFill/>
-        </p:spPr>
-        <p:txBody>
-          <a:bodyPr wrap="square" lIns="0" rIns="0" tIns="0" bIns="0" anchor="t">
-            <a:spAutoFit/>
-          </a:bodyPr>
-          <a:lstStyle/>
-          <a:p>
-            <a:pPr algn="ctr">
-              <a:spcAft>
-                <a:spcPts val="500"/>
-              </a:spcAft>
-            </a:pPr>
-            <a:r>
-              <a:rPr sz="1500" b="0">
-                <a:solidFill>
-                  <a:srgbClr val="7C8F7E"/>
-                </a:solidFill>
-                <a:latin typeface="Calibri"/>
-              </a:rPr>
-              <a:t>M-0005 · Mensuel 8 entrées</a:t>
-            </a:r>
-          </a:p>
-        </p:txBody>
-      </p:sp>
-      <p:sp>
-        <p:nvSpPr>
-          <p:cNvPr id="9" name="Rounded Rectangle 8"/>
-          <p:cNvSpPr/>
-          <p:nvPr/>
-        </p:nvSpPr>
-        <p:spPr>
-          <a:xfrm>
-            <a:off x="2240280" y="4526280"/>
-            <a:ext cx="2560320" cy="1188720"/>
-          </a:xfrm>
-          <a:prstGeom prst="roundRect">
-            <a:avLst>
-              <a:gd name="adj" fmla="val 8000"/>
-            </a:avLst>
-          </a:prstGeom>
-          <a:solidFill>
-            <a:srgbClr val="FFFFFF"/>
-          </a:solidFill>
-          <a:ln>
-            <a:noFill/>
-          </a:ln>
-          <a:effectLst/>
-        </p:spPr>
-        <p:style>
-          <a:lnRef idx="1">
-            <a:schemeClr val="accent1"/>
-          </a:lnRef>
-          <a:fillRef idx="3">
-            <a:schemeClr val="accent1"/>
-          </a:fillRef>
-          <a:effectRef idx="2">
-            <a:schemeClr val="accent1"/>
-          </a:effectRef>
-          <a:fontRef idx="minor">
-            <a:schemeClr val="lt1"/>
-          </a:fontRef>
-        </p:style>
-        <p:txBody>
-          <a:bodyPr rtlCol="0" anchor="ctr"/>
-          <a:lstStyle/>
-          <a:p>
-            <a:pPr algn="ctr"/>
-          </a:p>
-        </p:txBody>
-      </p:sp>
-      <p:sp>
-        <p:nvSpPr>
-          <p:cNvPr id="10" name="TextBox 9"/>
-          <p:cNvSpPr txBox="1"/>
-          <p:nvPr/>
-        </p:nvSpPr>
-        <p:spPr>
-          <a:xfrm>
-            <a:off x="2331720" y="4709160"/>
-            <a:ext cx="2377440" cy="502920"/>
-          </a:xfrm>
-          <a:prstGeom prst="rect">
-            <a:avLst/>
-          </a:prstGeom>
-          <a:noFill/>
-        </p:spPr>
-        <p:txBody>
-          <a:bodyPr wrap="square" lIns="0" rIns="0" tIns="0" bIns="0" anchor="t">
-            <a:spAutoFit/>
-          </a:bodyPr>
-          <a:lstStyle/>
-          <a:p>
-            <a:pPr algn="ctr">
-              <a:spcAft>
-                <a:spcPts val="500"/>
-              </a:spcAft>
-            </a:pPr>
-            <a:r>
-              <a:rPr sz="3000" b="1">
-                <a:solidFill>
-                  <a:srgbClr val="2A7A3B"/>
-                </a:solidFill>
-                <a:latin typeface="Calibri"/>
-              </a:rPr>
-              <a:t>7</a:t>
-            </a:r>
-          </a:p>
-        </p:txBody>
-      </p:sp>
-      <p:sp>
-        <p:nvSpPr>
-          <p:cNvPr id="11" name="TextBox 10"/>
-          <p:cNvSpPr txBox="1"/>
-          <p:nvPr/>
-        </p:nvSpPr>
-        <p:spPr>
-          <a:xfrm>
-            <a:off x="2331720" y="5303520"/>
-            <a:ext cx="2377440" cy="256032"/>
-          </a:xfrm>
-          <a:prstGeom prst="rect">
-            <a:avLst/>
-          </a:prstGeom>
-          <a:noFill/>
-        </p:spPr>
-        <p:txBody>
-          <a:bodyPr wrap="square" lIns="0" rIns="0" tIns="0" bIns="0" anchor="t">
-            <a:spAutoFit/>
-          </a:bodyPr>
-          <a:lstStyle/>
-          <a:p>
-            <a:pPr algn="ctr">
-              <a:spcAft>
-                <a:spcPts val="0"/>
-              </a:spcAft>
-            </a:pPr>
-            <a:r>
-              <a:rPr sz="1050" b="1">
-                <a:solidFill>
-                  <a:srgbClr val="7C8F7E"/>
-                </a:solidFill>
-                <a:latin typeface="Calibri"/>
-              </a:rPr>
-              <a:t>ENTRÉES RESTANTES</a:t>
-            </a:r>
-          </a:p>
-        </p:txBody>
-      </p:sp>
-      <p:sp>
-        <p:nvSpPr>
-          <p:cNvPr id="12" name="TextBox 11"/>
           <p:cNvSpPr txBox="1"/>
           <p:nvPr/>
         </p:nvSpPr>
@@ -9553,7 +7993,7 @@
       </p:sp>
       <p:sp>
         <p:nvSpPr>
-          <p:cNvPr id="13" name="TextBox 12"/>
+          <p:cNvPr id="8" name="TextBox 7"/>
           <p:cNvSpPr txBox="1"/>
           <p:nvPr/>
         </p:nvSpPr>
@@ -9925,21 +8365,19 @@
         </p:nvSpPr>
         <p:spPr>
           <a:xfrm>
-            <a:off x="685800" y="3063240"/>
-            <a:ext cx="6400800" cy="2880360"/>
+            <a:off x="757187" y="3063239"/>
+            <a:ext cx="4045177" cy="2926080"/>
           </a:xfrm>
           <a:prstGeom prst="roundRect">
             <a:avLst>
-              <a:gd name="adj" fmla="val 5000"/>
+              <a:gd name="adj" fmla="val 2000"/>
             </a:avLst>
           </a:prstGeom>
           <a:solidFill>
-            <a:srgbClr val="FFFFFF"/>
+            <a:srgbClr val="E6EEE7"/>
           </a:solidFill>
-          <a:ln w="19050">
-            <a:solidFill>
-              <a:srgbClr val="D3E4D5"/>
-            </a:solidFill>
+          <a:ln>
+            <a:noFill/>
           </a:ln>
           <a:effectLst/>
         </p:spPr>
@@ -9965,108 +8403,49 @@
           </a:p>
         </p:txBody>
       </p:sp>
-      <p:sp>
-        <p:nvSpPr>
-          <p:cNvPr id="9" name="TextBox 8"/>
-          <p:cNvSpPr txBox="1"/>
-          <p:nvPr/>
-        </p:nvSpPr>
-        <p:spPr>
-          <a:xfrm>
-            <a:off x="960120" y="3291840"/>
-            <a:ext cx="5029200" cy="320040"/>
-          </a:xfrm>
-          <a:prstGeom prst="rect">
-            <a:avLst/>
-          </a:prstGeom>
-          <a:noFill/>
-        </p:spPr>
-        <p:txBody>
-          <a:bodyPr wrap="square" lIns="0" rIns="0" tIns="0" bIns="0" anchor="t">
-            <a:spAutoFit/>
-          </a:bodyPr>
-          <a:lstStyle/>
-          <a:p>
-            <a:pPr algn="l">
-              <a:spcAft>
-                <a:spcPts val="500"/>
-              </a:spcAft>
-            </a:pPr>
-            <a:r>
-              <a:rPr sz="1600" b="1">
-                <a:solidFill>
-                  <a:srgbClr val="D9463E"/>
-                </a:solidFill>
-                <a:latin typeface="Calibri"/>
-              </a:rPr>
-              <a:t>Carte perdue — la remplacer</a:t>
-            </a:r>
-          </a:p>
-        </p:txBody>
-      </p:sp>
-      <p:sp>
-        <p:nvSpPr>
-          <p:cNvPr id="10" name="TextBox 9"/>
-          <p:cNvSpPr txBox="1"/>
-          <p:nvPr/>
-        </p:nvSpPr>
-        <p:spPr>
-          <a:xfrm>
-            <a:off x="960120" y="3675887"/>
-            <a:ext cx="5669280" cy="274320"/>
-          </a:xfrm>
-          <a:prstGeom prst="rect">
-            <a:avLst/>
-          </a:prstGeom>
-          <a:noFill/>
-        </p:spPr>
-        <p:txBody>
-          <a:bodyPr wrap="square" lIns="0" rIns="0" tIns="0" bIns="0" anchor="t">
-            <a:spAutoFit/>
-          </a:bodyPr>
-          <a:lstStyle/>
-          <a:p>
-            <a:pPr algn="l">
-              <a:spcAft>
-                <a:spcPts val="500"/>
-              </a:spcAft>
-            </a:pPr>
-            <a:r>
-              <a:rPr sz="1150" b="0">
-                <a:solidFill>
-                  <a:srgbClr val="7C8F7E"/>
-                </a:solidFill>
-                <a:latin typeface="Calibri"/>
-              </a:rPr>
-              <a:t>L'ancienne carte sera désactivée automatiquement.</a:t>
-            </a:r>
-          </a:p>
-        </p:txBody>
-      </p:sp>
-      <p:sp>
-        <p:nvSpPr>
-          <p:cNvPr id="11" name="Rounded Rectangle 10"/>
+      <p:pic>
+        <p:nvPicPr>
+          <p:cNvPr id="9" name="Picture 8" descr="06_fiche_membre.png"/>
+          <p:cNvPicPr>
+            <a:picLocks noChangeAspect="1"/>
+          </p:cNvPicPr>
+          <p:nvPr/>
+        </p:nvPicPr>
+        <p:blipFill>
+          <a:blip r:embed="rId2"/>
+          <a:stretch>
+            <a:fillRect/>
+          </a:stretch>
+        </p:blipFill>
+        <p:spPr>
+          <a:xfrm>
+            <a:off x="720611" y="3017520"/>
+            <a:ext cx="4045177" cy="2926080"/>
+          </a:xfrm>
+          <a:prstGeom prst="rect">
+            <a:avLst/>
+          </a:prstGeom>
+        </p:spPr>
+      </p:pic>
+      <p:sp>
+        <p:nvSpPr>
+          <p:cNvPr id="10" name="Oval 9"/>
           <p:cNvSpPr/>
           <p:nvPr/>
         </p:nvSpPr>
         <p:spPr>
           <a:xfrm>
-            <a:off x="960120" y="4069080"/>
-            <a:ext cx="5852160" cy="566928"/>
-          </a:xfrm>
-          <a:prstGeom prst="roundRect">
-            <a:avLst>
-              <a:gd name="adj" fmla="val 15000"/>
-            </a:avLst>
+            <a:off x="3764729" y="4317796"/>
+            <a:ext cx="384048" cy="384048"/>
+          </a:xfrm>
+          <a:prstGeom prst="ellipse">
+            <a:avLst/>
           </a:prstGeom>
           <a:solidFill>
-            <a:srgbClr val="E8F7EA"/>
+            <a:srgbClr val="F5C518"/>
           </a:solidFill>
-          <a:ln w="28575">
-            <a:solidFill>
-              <a:srgbClr val="4CAF50"/>
-            </a:solidFill>
-            <a:prstDash val="dash"/>
+          <a:ln>
+            <a:noFill/>
           </a:ln>
           <a:effectLst/>
         </p:spPr>
@@ -10085,114 +8464,43 @@
           </a:fontRef>
         </p:style>
         <p:txBody>
-          <a:bodyPr rtlCol="0" anchor="ctr"/>
+          <a:bodyPr rtlCol="0" anchor="ctr" lIns="0" rIns="0" tIns="0" bIns="0"/>
           <a:lstStyle/>
           <a:p>
             <a:pPr algn="ctr"/>
-          </a:p>
-        </p:txBody>
-      </p:sp>
-      <p:sp>
-        <p:nvSpPr>
-          <p:cNvPr id="12" name="TextBox 11"/>
-          <p:cNvSpPr txBox="1"/>
-          <p:nvPr/>
-        </p:nvSpPr>
-        <p:spPr>
-          <a:xfrm>
-            <a:off x="960120" y="4224528"/>
-            <a:ext cx="5852160" cy="274320"/>
-          </a:xfrm>
-          <a:prstGeom prst="rect">
-            <a:avLst/>
-          </a:prstGeom>
-          <a:noFill/>
-        </p:spPr>
-        <p:txBody>
-          <a:bodyPr wrap="square" lIns="0" rIns="0" tIns="0" bIns="0" anchor="t">
-            <a:spAutoFit/>
-          </a:bodyPr>
-          <a:lstStyle/>
-          <a:p>
-            <a:pPr algn="ctr">
-              <a:spcAft>
-                <a:spcPts val="500"/>
-              </a:spcAft>
-            </a:pPr>
             <a:r>
               <a:rPr sz="1400" b="1">
                 <a:solidFill>
-                  <a:srgbClr val="2A7A3B"/>
-                </a:solidFill>
-                <a:latin typeface="Calibri"/>
-              </a:rPr>
-              <a:t>Posez la NOUVELLE carte…</a:t>
-            </a:r>
-          </a:p>
-        </p:txBody>
-      </p:sp>
-      <p:sp>
-        <p:nvSpPr>
-          <p:cNvPr id="13" name="TextBox 12"/>
-          <p:cNvSpPr txBox="1"/>
-          <p:nvPr/>
-        </p:nvSpPr>
-        <p:spPr>
-          <a:xfrm>
-            <a:off x="960120" y="4800600"/>
-            <a:ext cx="2834640" cy="182880"/>
-          </a:xfrm>
-          <a:prstGeom prst="rect">
-            <a:avLst/>
-          </a:prstGeom>
-          <a:noFill/>
-        </p:spPr>
-        <p:txBody>
-          <a:bodyPr wrap="square" lIns="0" rIns="0" tIns="0" bIns="0" anchor="t">
-            <a:spAutoFit/>
-          </a:bodyPr>
-          <a:lstStyle/>
-          <a:p>
-            <a:pPr algn="l">
-              <a:spcAft>
-                <a:spcPts val="0"/>
-              </a:spcAft>
-            </a:pPr>
-            <a:r>
-              <a:rPr sz="950" b="1">
-                <a:solidFill>
-                  <a:srgbClr val="7C8F7E"/>
-                </a:solidFill>
-                <a:latin typeface="Calibri"/>
-              </a:rPr>
-              <a:t>MOTIF</a:t>
-            </a:r>
-          </a:p>
-        </p:txBody>
-      </p:sp>
-      <p:sp>
-        <p:nvSpPr>
-          <p:cNvPr id="14" name="Rounded Rectangle 13"/>
+                  <a:srgbClr val="2D3A2E"/>
+                </a:solidFill>
+                <a:latin typeface="Calibri"/>
+              </a:rPr>
+              <a:t>1</a:t>
+            </a:r>
+          </a:p>
+        </p:txBody>
+      </p:sp>
+      <p:sp>
+        <p:nvSpPr>
+          <p:cNvPr id="11" name="Rounded Rectangle 10"/>
           <p:cNvSpPr/>
           <p:nvPr/>
         </p:nvSpPr>
         <p:spPr>
           <a:xfrm>
-            <a:off x="960120" y="5020056"/>
-            <a:ext cx="2834640" cy="347472"/>
+            <a:off x="5065776" y="3159345"/>
+            <a:ext cx="2743200" cy="2733869"/>
           </a:xfrm>
           <a:prstGeom prst="roundRect">
             <a:avLst>
-              <a:gd name="adj" fmla="val 25000"/>
+              <a:gd name="adj" fmla="val 2000"/>
             </a:avLst>
           </a:prstGeom>
           <a:solidFill>
-            <a:srgbClr val="FFFFFF"/>
+            <a:srgbClr val="E6EEE7"/>
           </a:solidFill>
-          <a:ln w="15875">
-            <a:solidFill>
-              <a:srgbClr val="D3E4D5"/>
-            </a:solidFill>
+          <a:ln>
+            <a:noFill/>
           </a:ln>
           <a:effectLst/>
         </p:spPr>
@@ -10218,60 +8526,96 @@
           </a:p>
         </p:txBody>
       </p:sp>
-      <p:sp>
-        <p:nvSpPr>
-          <p:cNvPr id="15" name="TextBox 14"/>
-          <p:cNvSpPr txBox="1"/>
-          <p:nvPr/>
-        </p:nvSpPr>
-        <p:spPr>
-          <a:xfrm>
-            <a:off x="1088136" y="5102352"/>
-            <a:ext cx="2578608" cy="201168"/>
-          </a:xfrm>
-          <a:prstGeom prst="rect">
-            <a:avLst/>
-          </a:prstGeom>
-          <a:noFill/>
-        </p:spPr>
-        <p:txBody>
-          <a:bodyPr wrap="square" lIns="0" rIns="0" tIns="0" bIns="0" anchor="t">
-            <a:spAutoFit/>
-          </a:bodyPr>
-          <a:lstStyle/>
-          <a:p>
-            <a:pPr algn="l">
-              <a:spcAft>
-                <a:spcPts val="0"/>
-              </a:spcAft>
-            </a:pPr>
-            <a:r>
-              <a:rPr sz="1150" b="0">
+      <p:pic>
+        <p:nvPicPr>
+          <p:cNvPr id="12" name="Picture 11" descr="08_carte_perdue.png"/>
+          <p:cNvPicPr>
+            <a:picLocks noChangeAspect="1"/>
+          </p:cNvPicPr>
+          <p:nvPr/>
+        </p:nvPicPr>
+        <p:blipFill>
+          <a:blip r:embed="rId3"/>
+          <a:stretch>
+            <a:fillRect/>
+          </a:stretch>
+        </p:blipFill>
+        <p:spPr>
+          <a:xfrm>
+            <a:off x="5029200" y="3113625"/>
+            <a:ext cx="2743200" cy="2733869"/>
+          </a:xfrm>
+          <a:prstGeom prst="rect">
+            <a:avLst/>
+          </a:prstGeom>
+        </p:spPr>
+      </p:pic>
+      <p:sp>
+        <p:nvSpPr>
+          <p:cNvPr id="13" name="Oval 12"/>
+          <p:cNvSpPr/>
+          <p:nvPr/>
+        </p:nvSpPr>
+        <p:spPr>
+          <a:xfrm>
+            <a:off x="6208776" y="4343213"/>
+            <a:ext cx="384048" cy="384048"/>
+          </a:xfrm>
+          <a:prstGeom prst="ellipse">
+            <a:avLst/>
+          </a:prstGeom>
+          <a:solidFill>
+            <a:srgbClr val="F5C518"/>
+          </a:solidFill>
+          <a:ln>
+            <a:noFill/>
+          </a:ln>
+          <a:effectLst/>
+        </p:spPr>
+        <p:style>
+          <a:lnRef idx="1">
+            <a:schemeClr val="accent1"/>
+          </a:lnRef>
+          <a:fillRef idx="3">
+            <a:schemeClr val="accent1"/>
+          </a:fillRef>
+          <a:effectRef idx="2">
+            <a:schemeClr val="accent1"/>
+          </a:effectRef>
+          <a:fontRef idx="minor">
+            <a:schemeClr val="lt1"/>
+          </a:fontRef>
+        </p:style>
+        <p:txBody>
+          <a:bodyPr rtlCol="0" anchor="ctr" lIns="0" rIns="0" tIns="0" bIns="0"/>
+          <a:lstStyle/>
+          <a:p>
+            <a:pPr algn="ctr"/>
+            <a:r>
+              <a:rPr sz="1400" b="1">
                 <a:solidFill>
                   <a:srgbClr val="2D3A2E"/>
                 </a:solidFill>
                 <a:latin typeface="Calibri"/>
               </a:rPr>
-              <a:t>Carte perdue</a:t>
-            </a:r>
-          </a:p>
-        </p:txBody>
-      </p:sp>
-      <p:sp>
-        <p:nvSpPr>
-          <p:cNvPr id="16" name="Rounded Rectangle 15"/>
+              <a:t>2</a:t>
+            </a:r>
+          </a:p>
+        </p:txBody>
+      </p:sp>
+      <p:sp>
+        <p:nvSpPr>
+          <p:cNvPr id="14" name="Oval 13"/>
           <p:cNvSpPr/>
           <p:nvPr/>
         </p:nvSpPr>
         <p:spPr>
           <a:xfrm>
-            <a:off x="4892040" y="5166360"/>
-            <a:ext cx="1920240" cy="384048"/>
-          </a:xfrm>
-          <a:prstGeom prst="roundRect">
-            <a:avLst>
-              <a:gd name="adj" fmla="val 50000"/>
-            </a:avLst>
+            <a:off x="8046720" y="3200400"/>
+            <a:ext cx="457200" cy="457200"/>
+          </a:xfrm>
+          <a:prstGeom prst="ellipse">
+            <a:avLst/>
           </a:prstGeom>
           <a:solidFill>
             <a:srgbClr val="D9463E"/>
@@ -10301,65 +8645,12 @@
           <a:p>
             <a:pPr algn="ctr"/>
             <a:r>
-              <a:rPr sz="1100" b="1">
+              <a:rPr sz="1500" b="1">
                 <a:solidFill>
                   <a:srgbClr val="FFFFFF"/>
                 </a:solidFill>
                 <a:latin typeface="Calibri"/>
               </a:rPr>
-              <a:t>Remplacer la carte</a:t>
-            </a:r>
-          </a:p>
-        </p:txBody>
-      </p:sp>
-      <p:sp>
-        <p:nvSpPr>
-          <p:cNvPr id="17" name="Oval 16"/>
-          <p:cNvSpPr/>
-          <p:nvPr/>
-        </p:nvSpPr>
-        <p:spPr>
-          <a:xfrm>
-            <a:off x="7452360" y="3200400"/>
-            <a:ext cx="457200" cy="457200"/>
-          </a:xfrm>
-          <a:prstGeom prst="ellipse">
-            <a:avLst/>
-          </a:prstGeom>
-          <a:solidFill>
-            <a:srgbClr val="D9463E"/>
-          </a:solidFill>
-          <a:ln>
-            <a:noFill/>
-          </a:ln>
-          <a:effectLst/>
-        </p:spPr>
-        <p:style>
-          <a:lnRef idx="1">
-            <a:schemeClr val="accent1"/>
-          </a:lnRef>
-          <a:fillRef idx="3">
-            <a:schemeClr val="accent1"/>
-          </a:fillRef>
-          <a:effectRef idx="2">
-            <a:schemeClr val="accent1"/>
-          </a:effectRef>
-          <a:fontRef idx="minor">
-            <a:schemeClr val="lt1"/>
-          </a:fontRef>
-        </p:style>
-        <p:txBody>
-          <a:bodyPr rtlCol="0" anchor="ctr" lIns="0" rIns="0" tIns="0" bIns="0"/>
-          <a:lstStyle/>
-          <a:p>
-            <a:pPr algn="ctr"/>
-            <a:r>
-              <a:rPr sz="1500" b="1">
-                <a:solidFill>
-                  <a:srgbClr val="FFFFFF"/>
-                </a:solidFill>
-                <a:latin typeface="Calibri"/>
-              </a:rPr>
               <a:t>1</a:t>
             </a:r>
           </a:p>
@@ -10367,14 +8658,14 @@
       </p:sp>
       <p:sp>
         <p:nvSpPr>
-          <p:cNvPr id="18" name="TextBox 17"/>
+          <p:cNvPr id="15" name="TextBox 14"/>
           <p:cNvSpPr txBox="1"/>
           <p:nvPr/>
         </p:nvSpPr>
         <p:spPr>
           <a:xfrm>
-            <a:off x="8110728" y="3218688"/>
-            <a:ext cx="3566160" cy="320040"/>
+            <a:off x="8705088" y="3218688"/>
+            <a:ext cx="3383280" cy="320040"/>
           </a:xfrm>
           <a:prstGeom prst="rect">
             <a:avLst/>
@@ -10406,14 +8697,14 @@
       </p:sp>
       <p:sp>
         <p:nvSpPr>
-          <p:cNvPr id="19" name="TextBox 18"/>
+          <p:cNvPr id="16" name="TextBox 15"/>
           <p:cNvSpPr txBox="1"/>
           <p:nvPr/>
         </p:nvSpPr>
         <p:spPr>
           <a:xfrm>
-            <a:off x="8110728" y="3584448"/>
-            <a:ext cx="3566160" cy="502920"/>
+            <a:off x="8705088" y="3584448"/>
+            <a:ext cx="3383280" cy="502920"/>
           </a:xfrm>
           <a:prstGeom prst="rect">
             <a:avLst/>
@@ -10448,13 +8739,13 @@
       </p:sp>
       <p:sp>
         <p:nvSpPr>
-          <p:cNvPr id="20" name="Oval 19"/>
+          <p:cNvPr id="17" name="Oval 16"/>
           <p:cNvSpPr/>
           <p:nvPr/>
         </p:nvSpPr>
         <p:spPr>
           <a:xfrm>
-            <a:off x="7452360" y="4160520"/>
+            <a:off x="8046720" y="4160520"/>
             <a:ext cx="457200" cy="457200"/>
           </a:xfrm>
           <a:prstGeom prst="ellipse">
@@ -10501,14 +8792,14 @@
       </p:sp>
       <p:sp>
         <p:nvSpPr>
-          <p:cNvPr id="21" name="TextBox 20"/>
+          <p:cNvPr id="18" name="TextBox 17"/>
           <p:cNvSpPr txBox="1"/>
           <p:nvPr/>
         </p:nvSpPr>
         <p:spPr>
           <a:xfrm>
-            <a:off x="8110728" y="4178807"/>
-            <a:ext cx="3566160" cy="320040"/>
+            <a:off x="8705088" y="4178807"/>
+            <a:ext cx="3383280" cy="320040"/>
           </a:xfrm>
           <a:prstGeom prst="rect">
             <a:avLst/>
@@ -10540,14 +8831,14 @@
       </p:sp>
       <p:sp>
         <p:nvSpPr>
-          <p:cNvPr id="22" name="TextBox 21"/>
+          <p:cNvPr id="19" name="TextBox 18"/>
           <p:cNvSpPr txBox="1"/>
           <p:nvPr/>
         </p:nvSpPr>
         <p:spPr>
           <a:xfrm>
-            <a:off x="8110728" y="4544568"/>
-            <a:ext cx="3566160" cy="502920"/>
+            <a:off x="8705088" y="4544568"/>
+            <a:ext cx="3383280" cy="502920"/>
           </a:xfrm>
           <a:prstGeom prst="rect">
             <a:avLst/>
@@ -10582,13 +8873,13 @@
       </p:sp>
       <p:sp>
         <p:nvSpPr>
-          <p:cNvPr id="23" name="Oval 22"/>
+          <p:cNvPr id="20" name="Oval 19"/>
           <p:cNvSpPr/>
           <p:nvPr/>
         </p:nvSpPr>
         <p:spPr>
           <a:xfrm>
-            <a:off x="7452360" y="5120640"/>
+            <a:off x="8046720" y="5120640"/>
             <a:ext cx="457200" cy="457200"/>
           </a:xfrm>
           <a:prstGeom prst="ellipse">
@@ -10635,14 +8926,14 @@
       </p:sp>
       <p:sp>
         <p:nvSpPr>
-          <p:cNvPr id="24" name="TextBox 23"/>
+          <p:cNvPr id="21" name="TextBox 20"/>
           <p:cNvSpPr txBox="1"/>
           <p:nvPr/>
         </p:nvSpPr>
         <p:spPr>
           <a:xfrm>
-            <a:off x="8110728" y="5138927"/>
-            <a:ext cx="3566160" cy="320040"/>
+            <a:off x="8705088" y="5138927"/>
+            <a:ext cx="3383280" cy="320040"/>
           </a:xfrm>
           <a:prstGeom prst="rect">
             <a:avLst/>
@@ -10674,14 +8965,14 @@
       </p:sp>
       <p:sp>
         <p:nvSpPr>
-          <p:cNvPr id="25" name="TextBox 24"/>
+          <p:cNvPr id="22" name="TextBox 21"/>
           <p:cNvSpPr txBox="1"/>
           <p:nvPr/>
         </p:nvSpPr>
         <p:spPr>
           <a:xfrm>
-            <a:off x="8110728" y="5504688"/>
-            <a:ext cx="3566160" cy="502920"/>
+            <a:off x="8705088" y="5504688"/>
+            <a:ext cx="3383280" cy="502920"/>
           </a:xfrm>
           <a:prstGeom prst="rect">
             <a:avLst/>
@@ -10862,16 +9153,16 @@
         </p:nvSpPr>
         <p:spPr>
           <a:xfrm>
-            <a:off x="685800" y="1965960"/>
-            <a:ext cx="10789920" cy="1600200"/>
+            <a:off x="1078992" y="1920239"/>
+            <a:ext cx="6876288" cy="4297680"/>
           </a:xfrm>
           <a:prstGeom prst="roundRect">
             <a:avLst>
-              <a:gd name="adj" fmla="val 8000"/>
+              <a:gd name="adj" fmla="val 2000"/>
             </a:avLst>
           </a:prstGeom>
           <a:solidFill>
-            <a:srgbClr val="E8F7EA"/>
+            <a:srgbClr val="E6EEE7"/>
           </a:solidFill>
           <a:ln>
             <a:noFill/>
@@ -10900,489 +9191,43 @@
           </a:p>
         </p:txBody>
       </p:sp>
-      <p:sp>
-        <p:nvSpPr>
-          <p:cNvPr id="6" name="TextBox 5"/>
-          <p:cNvSpPr txBox="1"/>
-          <p:nvPr/>
-        </p:nvSpPr>
-        <p:spPr>
-          <a:xfrm>
-            <a:off x="1005840" y="2194560"/>
-            <a:ext cx="4572000" cy="320040"/>
-          </a:xfrm>
-          <a:prstGeom prst="rect">
-            <a:avLst/>
-          </a:prstGeom>
-          <a:noFill/>
-        </p:spPr>
-        <p:txBody>
-          <a:bodyPr wrap="square" lIns="0" rIns="0" tIns="0" bIns="0" anchor="t">
-            <a:spAutoFit/>
-          </a:bodyPr>
-          <a:lstStyle/>
-          <a:p>
-            <a:pPr algn="l">
-              <a:spcAft>
-                <a:spcPts val="500"/>
-              </a:spcAft>
-            </a:pPr>
-            <a:r>
-              <a:rPr sz="1500" b="1">
-                <a:solidFill>
-                  <a:srgbClr val="2A7A3B"/>
-                </a:solidFill>
-                <a:latin typeface="Calibri"/>
-              </a:rPr>
-              <a:t>Abonnements à renouveler</a:t>
-            </a:r>
-          </a:p>
-        </p:txBody>
-      </p:sp>
-      <p:sp>
-        <p:nvSpPr>
-          <p:cNvPr id="7" name="TextBox 6"/>
-          <p:cNvSpPr txBox="1"/>
-          <p:nvPr/>
-        </p:nvSpPr>
-        <p:spPr>
-          <a:xfrm>
-            <a:off x="1005840" y="2697480"/>
-            <a:ext cx="2743200" cy="274320"/>
-          </a:xfrm>
-          <a:prstGeom prst="rect">
-            <a:avLst/>
-          </a:prstGeom>
-          <a:noFill/>
-        </p:spPr>
-        <p:txBody>
-          <a:bodyPr wrap="square" lIns="0" rIns="0" tIns="0" bIns="0" anchor="t">
-            <a:spAutoFit/>
-          </a:bodyPr>
-          <a:lstStyle/>
-          <a:p>
-            <a:pPr algn="l">
-              <a:spcAft>
-                <a:spcPts val="500"/>
-              </a:spcAft>
-            </a:pPr>
-            <a:r>
-              <a:rPr sz="1300" b="1">
-                <a:solidFill>
-                  <a:srgbClr val="2D3A2E"/>
-                </a:solidFill>
-                <a:latin typeface="Calibri"/>
-              </a:rPr>
-              <a:t>Mariama Toure</a:t>
-            </a:r>
-          </a:p>
-        </p:txBody>
-      </p:sp>
-      <p:sp>
-        <p:nvSpPr>
-          <p:cNvPr id="8" name="TextBox 7"/>
-          <p:cNvSpPr txBox="1"/>
-          <p:nvPr/>
-        </p:nvSpPr>
-        <p:spPr>
-          <a:xfrm>
-            <a:off x="3931920" y="2697480"/>
-            <a:ext cx="2743200" cy="274320"/>
-          </a:xfrm>
-          <a:prstGeom prst="rect">
-            <a:avLst/>
-          </a:prstGeom>
-          <a:noFill/>
-        </p:spPr>
-        <p:txBody>
-          <a:bodyPr wrap="square" lIns="0" rIns="0" tIns="0" bIns="0" anchor="t">
-            <a:spAutoFit/>
-          </a:bodyPr>
-          <a:lstStyle/>
-          <a:p>
-            <a:pPr algn="l">
-              <a:spcAft>
-                <a:spcPts val="500"/>
-              </a:spcAft>
-            </a:pPr>
-            <a:r>
-              <a:rPr sz="1250" b="0">
-                <a:solidFill>
-                  <a:srgbClr val="7C8F7E"/>
-                </a:solidFill>
-                <a:latin typeface="Calibri"/>
-              </a:rPr>
-              <a:t>Expire le 02/09/2026</a:t>
-            </a:r>
-          </a:p>
-        </p:txBody>
-      </p:sp>
-      <p:sp>
-        <p:nvSpPr>
-          <p:cNvPr id="9" name="Rounded Rectangle 8"/>
+      <p:pic>
+        <p:nvPicPr>
+          <p:cNvPr id="6" name="Picture 5" descr="09_relances.png"/>
+          <p:cNvPicPr>
+            <a:picLocks noChangeAspect="1"/>
+          </p:cNvPicPr>
+          <p:nvPr/>
+        </p:nvPicPr>
+        <p:blipFill>
+          <a:blip r:embed="rId2"/>
+          <a:stretch>
+            <a:fillRect/>
+          </a:stretch>
+        </p:blipFill>
+        <p:spPr>
+          <a:xfrm>
+            <a:off x="1042416" y="1874519"/>
+            <a:ext cx="6876288" cy="4297680"/>
+          </a:xfrm>
+          <a:prstGeom prst="rect">
+            <a:avLst/>
+          </a:prstGeom>
+        </p:spPr>
+      </p:pic>
+      <p:sp>
+        <p:nvSpPr>
+          <p:cNvPr id="7" name="Oval 6"/>
           <p:cNvSpPr/>
           <p:nvPr/>
         </p:nvSpPr>
         <p:spPr>
           <a:xfrm>
-            <a:off x="8778240" y="2651760"/>
-            <a:ext cx="1463040" cy="384048"/>
-          </a:xfrm>
-          <a:prstGeom prst="roundRect">
-            <a:avLst>
-              <a:gd name="adj" fmla="val 50000"/>
-            </a:avLst>
-          </a:prstGeom>
-          <a:solidFill>
-            <a:srgbClr val="4CAF50"/>
-          </a:solidFill>
-          <a:ln>
-            <a:noFill/>
-          </a:ln>
-          <a:effectLst/>
-        </p:spPr>
-        <p:style>
-          <a:lnRef idx="1">
-            <a:schemeClr val="accent1"/>
-          </a:lnRef>
-          <a:fillRef idx="3">
-            <a:schemeClr val="accent1"/>
-          </a:fillRef>
-          <a:effectRef idx="2">
-            <a:schemeClr val="accent1"/>
-          </a:effectRef>
-          <a:fontRef idx="minor">
-            <a:schemeClr val="lt1"/>
-          </a:fontRef>
-        </p:style>
-        <p:txBody>
-          <a:bodyPr rtlCol="0" anchor="ctr" lIns="0" rIns="0" tIns="0" bIns="0"/>
-          <a:lstStyle/>
-          <a:p>
-            <a:pPr algn="ctr"/>
-            <a:r>
-              <a:rPr sz="1100" b="1">
-                <a:solidFill>
-                  <a:srgbClr val="FFFFFF"/>
-                </a:solidFill>
-                <a:latin typeface="Calibri"/>
-              </a:rPr>
-              <a:t>WhatsApp</a:t>
-            </a:r>
-          </a:p>
-        </p:txBody>
-      </p:sp>
-      <p:sp>
-        <p:nvSpPr>
-          <p:cNvPr id="10" name="TextBox 9"/>
-          <p:cNvSpPr txBox="1"/>
-          <p:nvPr/>
-        </p:nvSpPr>
-        <p:spPr>
-          <a:xfrm>
-            <a:off x="1005840" y="3108960"/>
-            <a:ext cx="9144000" cy="274320"/>
-          </a:xfrm>
-          <a:prstGeom prst="rect">
-            <a:avLst/>
-          </a:prstGeom>
-          <a:noFill/>
-        </p:spPr>
-        <p:txBody>
-          <a:bodyPr wrap="square" lIns="0" rIns="0" tIns="0" bIns="0" anchor="t">
-            <a:spAutoFit/>
-          </a:bodyPr>
-          <a:lstStyle/>
-          <a:p>
-            <a:pPr algn="l">
-              <a:spcAft>
-                <a:spcPts val="500"/>
-              </a:spcAft>
-            </a:pPr>
-            <a:r>
-              <a:rPr sz="1200" b="0">
-                <a:solidFill>
-                  <a:srgbClr val="7C8F7E"/>
-                </a:solidFill>
-                <a:latin typeface="Calibri"/>
-              </a:rPr>
-              <a:t>Un clic ouvre WhatsApp avec le message déjà écrit et le bon numéro.</a:t>
-            </a:r>
-          </a:p>
-        </p:txBody>
-      </p:sp>
-      <p:sp>
-        <p:nvSpPr>
-          <p:cNvPr id="11" name="Rounded Rectangle 10"/>
-          <p:cNvSpPr/>
-          <p:nvPr/>
-        </p:nvSpPr>
-        <p:spPr>
-          <a:xfrm>
-            <a:off x="685800" y="3749039"/>
-            <a:ext cx="10789920" cy="1600200"/>
-          </a:xfrm>
-          <a:prstGeom prst="roundRect">
-            <a:avLst>
-              <a:gd name="adj" fmla="val 8000"/>
-            </a:avLst>
-          </a:prstGeom>
-          <a:solidFill>
-            <a:srgbClr val="F3E5FF"/>
-          </a:solidFill>
-          <a:ln>
-            <a:noFill/>
-          </a:ln>
-          <a:effectLst/>
-        </p:spPr>
-        <p:style>
-          <a:lnRef idx="1">
-            <a:schemeClr val="accent1"/>
-          </a:lnRef>
-          <a:fillRef idx="3">
-            <a:schemeClr val="accent1"/>
-          </a:fillRef>
-          <a:effectRef idx="2">
-            <a:schemeClr val="accent1"/>
-          </a:effectRef>
-          <a:fontRef idx="minor">
-            <a:schemeClr val="lt1"/>
-          </a:fontRef>
-        </p:style>
-        <p:txBody>
-          <a:bodyPr rtlCol="0" anchor="ctr"/>
-          <a:lstStyle/>
-          <a:p>
-            <a:pPr algn="ctr"/>
-          </a:p>
-        </p:txBody>
-      </p:sp>
-      <p:sp>
-        <p:nvSpPr>
-          <p:cNvPr id="12" name="TextBox 11"/>
-          <p:cNvSpPr txBox="1"/>
-          <p:nvPr/>
-        </p:nvSpPr>
-        <p:spPr>
-          <a:xfrm>
-            <a:off x="1005840" y="3977639"/>
-            <a:ext cx="4572000" cy="320040"/>
-          </a:xfrm>
-          <a:prstGeom prst="rect">
-            <a:avLst/>
-          </a:prstGeom>
-          <a:noFill/>
-        </p:spPr>
-        <p:txBody>
-          <a:bodyPr wrap="square" lIns="0" rIns="0" tIns="0" bIns="0" anchor="t">
-            <a:spAutoFit/>
-          </a:bodyPr>
-          <a:lstStyle/>
-          <a:p>
-            <a:pPr algn="l">
-              <a:spcAft>
-                <a:spcPts val="500"/>
-              </a:spcAft>
-            </a:pPr>
-            <a:r>
-              <a:rPr sz="1500" b="1">
-                <a:solidFill>
-                  <a:srgbClr val="7B2FBE"/>
-                </a:solidFill>
-                <a:latin typeface="Calibri"/>
-              </a:rPr>
-              <a:t>Anniversaires — 30 prochains jours</a:t>
-            </a:r>
-          </a:p>
-        </p:txBody>
-      </p:sp>
-      <p:sp>
-        <p:nvSpPr>
-          <p:cNvPr id="13" name="TextBox 12"/>
-          <p:cNvSpPr txBox="1"/>
-          <p:nvPr/>
-        </p:nvSpPr>
-        <p:spPr>
-          <a:xfrm>
-            <a:off x="1005840" y="4480560"/>
-            <a:ext cx="2743200" cy="274320"/>
-          </a:xfrm>
-          <a:prstGeom prst="rect">
-            <a:avLst/>
-          </a:prstGeom>
-          <a:noFill/>
-        </p:spPr>
-        <p:txBody>
-          <a:bodyPr wrap="square" lIns="0" rIns="0" tIns="0" bIns="0" anchor="t">
-            <a:spAutoFit/>
-          </a:bodyPr>
-          <a:lstStyle/>
-          <a:p>
-            <a:pPr algn="l">
-              <a:spcAft>
-                <a:spcPts val="500"/>
-              </a:spcAft>
-            </a:pPr>
-            <a:r>
-              <a:rPr sz="1300" b="1">
-                <a:solidFill>
-                  <a:srgbClr val="2D3A2E"/>
-                </a:solidFill>
-                <a:latin typeface="Calibri"/>
-              </a:rPr>
-              <a:t>Aminata Diallo</a:t>
-            </a:r>
-          </a:p>
-        </p:txBody>
-      </p:sp>
-      <p:sp>
-        <p:nvSpPr>
-          <p:cNvPr id="14" name="TextBox 13"/>
-          <p:cNvSpPr txBox="1"/>
-          <p:nvPr/>
-        </p:nvSpPr>
-        <p:spPr>
-          <a:xfrm>
-            <a:off x="3931920" y="4480560"/>
-            <a:ext cx="2743200" cy="274320"/>
-          </a:xfrm>
-          <a:prstGeom prst="rect">
-            <a:avLst/>
-          </a:prstGeom>
-          <a:noFill/>
-        </p:spPr>
-        <p:txBody>
-          <a:bodyPr wrap="square" lIns="0" rIns="0" tIns="0" bIns="0" anchor="t">
-            <a:spAutoFit/>
-          </a:bodyPr>
-          <a:lstStyle/>
-          <a:p>
-            <a:pPr algn="l">
-              <a:spcAft>
-                <a:spcPts val="500"/>
-              </a:spcAft>
-            </a:pPr>
-            <a:r>
-              <a:rPr sz="1250" b="0">
-                <a:solidFill>
-                  <a:srgbClr val="7C8F7E"/>
-                </a:solidFill>
-                <a:latin typeface="Calibri"/>
-              </a:rPr>
-              <a:t>7 ans dans 6 jours</a:t>
-            </a:r>
-          </a:p>
-        </p:txBody>
-      </p:sp>
-      <p:sp>
-        <p:nvSpPr>
-          <p:cNvPr id="15" name="Rounded Rectangle 14"/>
-          <p:cNvSpPr/>
-          <p:nvPr/>
-        </p:nvSpPr>
-        <p:spPr>
-          <a:xfrm>
-            <a:off x="8778240" y="4434840"/>
-            <a:ext cx="1463040" cy="384048"/>
-          </a:xfrm>
-          <a:prstGeom prst="roundRect">
-            <a:avLst>
-              <a:gd name="adj" fmla="val 50000"/>
-            </a:avLst>
-          </a:prstGeom>
-          <a:solidFill>
-            <a:srgbClr val="4CAF50"/>
-          </a:solidFill>
-          <a:ln>
-            <a:noFill/>
-          </a:ln>
-          <a:effectLst/>
-        </p:spPr>
-        <p:style>
-          <a:lnRef idx="1">
-            <a:schemeClr val="accent1"/>
-          </a:lnRef>
-          <a:fillRef idx="3">
-            <a:schemeClr val="accent1"/>
-          </a:fillRef>
-          <a:effectRef idx="2">
-            <a:schemeClr val="accent1"/>
-          </a:effectRef>
-          <a:fontRef idx="minor">
-            <a:schemeClr val="lt1"/>
-          </a:fontRef>
-        </p:style>
-        <p:txBody>
-          <a:bodyPr rtlCol="0" anchor="ctr" lIns="0" rIns="0" tIns="0" bIns="0"/>
-          <a:lstStyle/>
-          <a:p>
-            <a:pPr algn="ctr"/>
-            <a:r>
-              <a:rPr sz="1100" b="1">
-                <a:solidFill>
-                  <a:srgbClr val="FFFFFF"/>
-                </a:solidFill>
-                <a:latin typeface="Calibri"/>
-              </a:rPr>
-              <a:t>WhatsApp</a:t>
-            </a:r>
-          </a:p>
-        </p:txBody>
-      </p:sp>
-      <p:sp>
-        <p:nvSpPr>
-          <p:cNvPr id="16" name="TextBox 15"/>
-          <p:cNvSpPr txBox="1"/>
-          <p:nvPr/>
-        </p:nvSpPr>
-        <p:spPr>
-          <a:xfrm>
-            <a:off x="1005840" y="4892040"/>
-            <a:ext cx="9144000" cy="274320"/>
-          </a:xfrm>
-          <a:prstGeom prst="rect">
-            <a:avLst/>
-          </a:prstGeom>
-          <a:noFill/>
-        </p:spPr>
-        <p:txBody>
-          <a:bodyPr wrap="square" lIns="0" rIns="0" tIns="0" bIns="0" anchor="t">
-            <a:spAutoFit/>
-          </a:bodyPr>
-          <a:lstStyle/>
-          <a:p>
-            <a:pPr algn="l">
-              <a:spcAft>
-                <a:spcPts val="500"/>
-              </a:spcAft>
-            </a:pPr>
-            <a:r>
-              <a:rPr sz="1200" b="0">
-                <a:solidFill>
-                  <a:srgbClr val="7C8F7E"/>
-                </a:solidFill>
-                <a:latin typeface="Calibri"/>
-              </a:rPr>
-              <a:t>Proposez une fête d'anniversaire au parc — c'est une vente facile.</a:t>
-            </a:r>
-          </a:p>
-        </p:txBody>
-      </p:sp>
-      <p:sp>
-        <p:nvSpPr>
-          <p:cNvPr id="17" name="Rounded Rectangle 16"/>
-          <p:cNvSpPr/>
-          <p:nvPr/>
-        </p:nvSpPr>
-        <p:spPr>
-          <a:xfrm>
-            <a:off x="685800" y="5532120"/>
-            <a:ext cx="10789920" cy="731520"/>
-          </a:xfrm>
-          <a:prstGeom prst="roundRect">
-            <a:avLst>
-              <a:gd name="adj" fmla="val 8000"/>
-            </a:avLst>
+            <a:off x="1366113" y="2692450"/>
+            <a:ext cx="384048" cy="384048"/>
+          </a:xfrm>
+          <a:prstGeom prst="ellipse">
+            <a:avLst/>
           </a:prstGeom>
           <a:solidFill>
             <a:srgbClr val="F5C518"/>
@@ -11407,6 +9252,569 @@
           </a:fontRef>
         </p:style>
         <p:txBody>
+          <a:bodyPr rtlCol="0" anchor="ctr" lIns="0" rIns="0" tIns="0" bIns="0"/>
+          <a:lstStyle/>
+          <a:p>
+            <a:pPr algn="ctr"/>
+            <a:r>
+              <a:rPr sz="1400" b="1">
+                <a:solidFill>
+                  <a:srgbClr val="2D3A2E"/>
+                </a:solidFill>
+                <a:latin typeface="Calibri"/>
+              </a:rPr>
+              <a:t>1</a:t>
+            </a:r>
+          </a:p>
+        </p:txBody>
+      </p:sp>
+      <p:sp>
+        <p:nvSpPr>
+          <p:cNvPr id="8" name="Oval 7"/>
+          <p:cNvSpPr/>
+          <p:nvPr/>
+        </p:nvSpPr>
+        <p:spPr>
+          <a:xfrm>
+            <a:off x="4597968" y="2971800"/>
+            <a:ext cx="384048" cy="384048"/>
+          </a:xfrm>
+          <a:prstGeom prst="ellipse">
+            <a:avLst/>
+          </a:prstGeom>
+          <a:solidFill>
+            <a:srgbClr val="F5C518"/>
+          </a:solidFill>
+          <a:ln>
+            <a:noFill/>
+          </a:ln>
+          <a:effectLst/>
+        </p:spPr>
+        <p:style>
+          <a:lnRef idx="1">
+            <a:schemeClr val="accent1"/>
+          </a:lnRef>
+          <a:fillRef idx="3">
+            <a:schemeClr val="accent1"/>
+          </a:fillRef>
+          <a:effectRef idx="2">
+            <a:schemeClr val="accent1"/>
+          </a:effectRef>
+          <a:fontRef idx="minor">
+            <a:schemeClr val="lt1"/>
+          </a:fontRef>
+        </p:style>
+        <p:txBody>
+          <a:bodyPr rtlCol="0" anchor="ctr" lIns="0" rIns="0" tIns="0" bIns="0"/>
+          <a:lstStyle/>
+          <a:p>
+            <a:pPr algn="ctr"/>
+            <a:r>
+              <a:rPr sz="1400" b="1">
+                <a:solidFill>
+                  <a:srgbClr val="2D3A2E"/>
+                </a:solidFill>
+                <a:latin typeface="Calibri"/>
+              </a:rPr>
+              <a:t>2</a:t>
+            </a:r>
+          </a:p>
+        </p:txBody>
+      </p:sp>
+      <p:sp>
+        <p:nvSpPr>
+          <p:cNvPr id="9" name="Oval 8"/>
+          <p:cNvSpPr/>
+          <p:nvPr/>
+        </p:nvSpPr>
+        <p:spPr>
+          <a:xfrm>
+            <a:off x="4597968" y="4024731"/>
+            <a:ext cx="384048" cy="384048"/>
+          </a:xfrm>
+          <a:prstGeom prst="ellipse">
+            <a:avLst/>
+          </a:prstGeom>
+          <a:solidFill>
+            <a:srgbClr val="F5C518"/>
+          </a:solidFill>
+          <a:ln>
+            <a:noFill/>
+          </a:ln>
+          <a:effectLst/>
+        </p:spPr>
+        <p:style>
+          <a:lnRef idx="1">
+            <a:schemeClr val="accent1"/>
+          </a:lnRef>
+          <a:fillRef idx="3">
+            <a:schemeClr val="accent1"/>
+          </a:fillRef>
+          <a:effectRef idx="2">
+            <a:schemeClr val="accent1"/>
+          </a:effectRef>
+          <a:fontRef idx="minor">
+            <a:schemeClr val="lt1"/>
+          </a:fontRef>
+        </p:style>
+        <p:txBody>
+          <a:bodyPr rtlCol="0" anchor="ctr" lIns="0" rIns="0" tIns="0" bIns="0"/>
+          <a:lstStyle/>
+          <a:p>
+            <a:pPr algn="ctr"/>
+            <a:r>
+              <a:rPr sz="1400" b="1">
+                <a:solidFill>
+                  <a:srgbClr val="2D3A2E"/>
+                </a:solidFill>
+                <a:latin typeface="Calibri"/>
+              </a:rPr>
+              <a:t>3</a:t>
+            </a:r>
+          </a:p>
+        </p:txBody>
+      </p:sp>
+      <p:sp>
+        <p:nvSpPr>
+          <p:cNvPr id="10" name="Oval 9"/>
+          <p:cNvSpPr/>
+          <p:nvPr/>
+        </p:nvSpPr>
+        <p:spPr>
+          <a:xfrm>
+            <a:off x="8549640" y="2148840"/>
+            <a:ext cx="384048" cy="384048"/>
+          </a:xfrm>
+          <a:prstGeom prst="ellipse">
+            <a:avLst/>
+          </a:prstGeom>
+          <a:solidFill>
+            <a:srgbClr val="F5C518"/>
+          </a:solidFill>
+          <a:ln>
+            <a:noFill/>
+          </a:ln>
+          <a:effectLst/>
+        </p:spPr>
+        <p:style>
+          <a:lnRef idx="1">
+            <a:schemeClr val="accent1"/>
+          </a:lnRef>
+          <a:fillRef idx="3">
+            <a:schemeClr val="accent1"/>
+          </a:fillRef>
+          <a:effectRef idx="2">
+            <a:schemeClr val="accent1"/>
+          </a:effectRef>
+          <a:fontRef idx="minor">
+            <a:schemeClr val="lt1"/>
+          </a:fontRef>
+        </p:style>
+        <p:txBody>
+          <a:bodyPr rtlCol="0" anchor="ctr" lIns="0" rIns="0" tIns="0" bIns="0"/>
+          <a:lstStyle/>
+          <a:p>
+            <a:pPr algn="ctr"/>
+            <a:r>
+              <a:rPr sz="1400" b="1">
+                <a:solidFill>
+                  <a:srgbClr val="2D3A2E"/>
+                </a:solidFill>
+                <a:latin typeface="Calibri"/>
+              </a:rPr>
+              <a:t>1</a:t>
+            </a:r>
+          </a:p>
+        </p:txBody>
+      </p:sp>
+      <p:sp>
+        <p:nvSpPr>
+          <p:cNvPr id="11" name="TextBox 10"/>
+          <p:cNvSpPr txBox="1"/>
+          <p:nvPr/>
+        </p:nvSpPr>
+        <p:spPr>
+          <a:xfrm>
+            <a:off x="9098280" y="2130552"/>
+            <a:ext cx="3017520" cy="274320"/>
+          </a:xfrm>
+          <a:prstGeom prst="rect">
+            <a:avLst/>
+          </a:prstGeom>
+          <a:noFill/>
+        </p:spPr>
+        <p:txBody>
+          <a:bodyPr wrap="square" lIns="0" rIns="0" tIns="0" bIns="0" anchor="t">
+            <a:spAutoFit/>
+          </a:bodyPr>
+          <a:lstStyle/>
+          <a:p>
+            <a:pPr algn="l">
+              <a:spcAft>
+                <a:spcPts val="500"/>
+              </a:spcAft>
+            </a:pPr>
+            <a:r>
+              <a:rPr sz="1450" b="1">
+                <a:solidFill>
+                  <a:srgbClr val="2D3A2E"/>
+                </a:solidFill>
+                <a:latin typeface="Calibri"/>
+              </a:rPr>
+              <a:t>Le compteur du menu</a:t>
+            </a:r>
+          </a:p>
+        </p:txBody>
+      </p:sp>
+      <p:sp>
+        <p:nvSpPr>
+          <p:cNvPr id="12" name="TextBox 11"/>
+          <p:cNvSpPr txBox="1"/>
+          <p:nvPr/>
+        </p:nvSpPr>
+        <p:spPr>
+          <a:xfrm>
+            <a:off x="9098280" y="2441448"/>
+            <a:ext cx="3017520" cy="457200"/>
+          </a:xfrm>
+          <a:prstGeom prst="rect">
+            <a:avLst/>
+          </a:prstGeom>
+          <a:noFill/>
+        </p:spPr>
+        <p:txBody>
+          <a:bodyPr wrap="square" lIns="0" rIns="0" tIns="0" bIns="0" anchor="t">
+            <a:spAutoFit/>
+          </a:bodyPr>
+          <a:lstStyle/>
+          <a:p>
+            <a:pPr algn="l">
+              <a:lnSpc>
+                <a:spcPct val="115000"/>
+              </a:lnSpc>
+              <a:spcAft>
+                <a:spcPts val="500"/>
+              </a:spcAft>
+            </a:pPr>
+            <a:r>
+              <a:rPr sz="1200" b="0">
+                <a:solidFill>
+                  <a:srgbClr val="7C8F7E"/>
+                </a:solidFill>
+                <a:latin typeface="Calibri"/>
+              </a:rPr>
+              <a:t>Le nombre de parents à contacter aujourd'hui.</a:t>
+            </a:r>
+          </a:p>
+        </p:txBody>
+      </p:sp>
+      <p:sp>
+        <p:nvSpPr>
+          <p:cNvPr id="13" name="Oval 12"/>
+          <p:cNvSpPr/>
+          <p:nvPr/>
+        </p:nvSpPr>
+        <p:spPr>
+          <a:xfrm>
+            <a:off x="8549640" y="3383280"/>
+            <a:ext cx="384048" cy="384048"/>
+          </a:xfrm>
+          <a:prstGeom prst="ellipse">
+            <a:avLst/>
+          </a:prstGeom>
+          <a:solidFill>
+            <a:srgbClr val="F5C518"/>
+          </a:solidFill>
+          <a:ln>
+            <a:noFill/>
+          </a:ln>
+          <a:effectLst/>
+        </p:spPr>
+        <p:style>
+          <a:lnRef idx="1">
+            <a:schemeClr val="accent1"/>
+          </a:lnRef>
+          <a:fillRef idx="3">
+            <a:schemeClr val="accent1"/>
+          </a:fillRef>
+          <a:effectRef idx="2">
+            <a:schemeClr val="accent1"/>
+          </a:effectRef>
+          <a:fontRef idx="minor">
+            <a:schemeClr val="lt1"/>
+          </a:fontRef>
+        </p:style>
+        <p:txBody>
+          <a:bodyPr rtlCol="0" anchor="ctr" lIns="0" rIns="0" tIns="0" bIns="0"/>
+          <a:lstStyle/>
+          <a:p>
+            <a:pPr algn="ctr"/>
+            <a:r>
+              <a:rPr sz="1400" b="1">
+                <a:solidFill>
+                  <a:srgbClr val="2D3A2E"/>
+                </a:solidFill>
+                <a:latin typeface="Calibri"/>
+              </a:rPr>
+              <a:t>2</a:t>
+            </a:r>
+          </a:p>
+        </p:txBody>
+      </p:sp>
+      <p:sp>
+        <p:nvSpPr>
+          <p:cNvPr id="14" name="TextBox 13"/>
+          <p:cNvSpPr txBox="1"/>
+          <p:nvPr/>
+        </p:nvSpPr>
+        <p:spPr>
+          <a:xfrm>
+            <a:off x="9098280" y="3364992"/>
+            <a:ext cx="3017520" cy="274320"/>
+          </a:xfrm>
+          <a:prstGeom prst="rect">
+            <a:avLst/>
+          </a:prstGeom>
+          <a:noFill/>
+        </p:spPr>
+        <p:txBody>
+          <a:bodyPr wrap="square" lIns="0" rIns="0" tIns="0" bIns="0" anchor="t">
+            <a:spAutoFit/>
+          </a:bodyPr>
+          <a:lstStyle/>
+          <a:p>
+            <a:pPr algn="l">
+              <a:spcAft>
+                <a:spcPts val="500"/>
+              </a:spcAft>
+            </a:pPr>
+            <a:r>
+              <a:rPr sz="1450" b="1">
+                <a:solidFill>
+                  <a:srgbClr val="2D3A2E"/>
+                </a:solidFill>
+                <a:latin typeface="Calibri"/>
+              </a:rPr>
+              <a:t>Abonnements à renouveler</a:t>
+            </a:r>
+          </a:p>
+        </p:txBody>
+      </p:sp>
+      <p:sp>
+        <p:nvSpPr>
+          <p:cNvPr id="15" name="TextBox 14"/>
+          <p:cNvSpPr txBox="1"/>
+          <p:nvPr/>
+        </p:nvSpPr>
+        <p:spPr>
+          <a:xfrm>
+            <a:off x="9098280" y="3675888"/>
+            <a:ext cx="3017520" cy="457200"/>
+          </a:xfrm>
+          <a:prstGeom prst="rect">
+            <a:avLst/>
+          </a:prstGeom>
+          <a:noFill/>
+        </p:spPr>
+        <p:txBody>
+          <a:bodyPr wrap="square" lIns="0" rIns="0" tIns="0" bIns="0" anchor="t">
+            <a:spAutoFit/>
+          </a:bodyPr>
+          <a:lstStyle/>
+          <a:p>
+            <a:pPr algn="l">
+              <a:lnSpc>
+                <a:spcPct val="115000"/>
+              </a:lnSpc>
+              <a:spcAft>
+                <a:spcPts val="500"/>
+              </a:spcAft>
+            </a:pPr>
+            <a:r>
+              <a:rPr sz="1200" b="0">
+                <a:solidFill>
+                  <a:srgbClr val="7C8F7E"/>
+                </a:solidFill>
+                <a:latin typeface="Calibri"/>
+              </a:rPr>
+              <a:t>Un clic sur le bouton vert ouvre WhatsApp, message déjà écrit.</a:t>
+            </a:r>
+          </a:p>
+        </p:txBody>
+      </p:sp>
+      <p:sp>
+        <p:nvSpPr>
+          <p:cNvPr id="16" name="Oval 15"/>
+          <p:cNvSpPr/>
+          <p:nvPr/>
+        </p:nvSpPr>
+        <p:spPr>
+          <a:xfrm>
+            <a:off x="8549640" y="4617720"/>
+            <a:ext cx="384048" cy="384048"/>
+          </a:xfrm>
+          <a:prstGeom prst="ellipse">
+            <a:avLst/>
+          </a:prstGeom>
+          <a:solidFill>
+            <a:srgbClr val="F5C518"/>
+          </a:solidFill>
+          <a:ln>
+            <a:noFill/>
+          </a:ln>
+          <a:effectLst/>
+        </p:spPr>
+        <p:style>
+          <a:lnRef idx="1">
+            <a:schemeClr val="accent1"/>
+          </a:lnRef>
+          <a:fillRef idx="3">
+            <a:schemeClr val="accent1"/>
+          </a:fillRef>
+          <a:effectRef idx="2">
+            <a:schemeClr val="accent1"/>
+          </a:effectRef>
+          <a:fontRef idx="minor">
+            <a:schemeClr val="lt1"/>
+          </a:fontRef>
+        </p:style>
+        <p:txBody>
+          <a:bodyPr rtlCol="0" anchor="ctr" lIns="0" rIns="0" tIns="0" bIns="0"/>
+          <a:lstStyle/>
+          <a:p>
+            <a:pPr algn="ctr"/>
+            <a:r>
+              <a:rPr sz="1400" b="1">
+                <a:solidFill>
+                  <a:srgbClr val="2D3A2E"/>
+                </a:solidFill>
+                <a:latin typeface="Calibri"/>
+              </a:rPr>
+              <a:t>3</a:t>
+            </a:r>
+          </a:p>
+        </p:txBody>
+      </p:sp>
+      <p:sp>
+        <p:nvSpPr>
+          <p:cNvPr id="17" name="TextBox 16"/>
+          <p:cNvSpPr txBox="1"/>
+          <p:nvPr/>
+        </p:nvSpPr>
+        <p:spPr>
+          <a:xfrm>
+            <a:off x="9098280" y="4599432"/>
+            <a:ext cx="3017520" cy="274320"/>
+          </a:xfrm>
+          <a:prstGeom prst="rect">
+            <a:avLst/>
+          </a:prstGeom>
+          <a:noFill/>
+        </p:spPr>
+        <p:txBody>
+          <a:bodyPr wrap="square" lIns="0" rIns="0" tIns="0" bIns="0" anchor="t">
+            <a:spAutoFit/>
+          </a:bodyPr>
+          <a:lstStyle/>
+          <a:p>
+            <a:pPr algn="l">
+              <a:spcAft>
+                <a:spcPts val="500"/>
+              </a:spcAft>
+            </a:pPr>
+            <a:r>
+              <a:rPr sz="1450" b="1">
+                <a:solidFill>
+                  <a:srgbClr val="2D3A2E"/>
+                </a:solidFill>
+                <a:latin typeface="Calibri"/>
+              </a:rPr>
+              <a:t>Anniversaires à venir</a:t>
+            </a:r>
+          </a:p>
+        </p:txBody>
+      </p:sp>
+      <p:sp>
+        <p:nvSpPr>
+          <p:cNvPr id="18" name="TextBox 17"/>
+          <p:cNvSpPr txBox="1"/>
+          <p:nvPr/>
+        </p:nvSpPr>
+        <p:spPr>
+          <a:xfrm>
+            <a:off x="9098280" y="4910328"/>
+            <a:ext cx="3017520" cy="457200"/>
+          </a:xfrm>
+          <a:prstGeom prst="rect">
+            <a:avLst/>
+          </a:prstGeom>
+          <a:noFill/>
+        </p:spPr>
+        <p:txBody>
+          <a:bodyPr wrap="square" lIns="0" rIns="0" tIns="0" bIns="0" anchor="t">
+            <a:spAutoFit/>
+          </a:bodyPr>
+          <a:lstStyle/>
+          <a:p>
+            <a:pPr algn="l">
+              <a:lnSpc>
+                <a:spcPct val="115000"/>
+              </a:lnSpc>
+              <a:spcAft>
+                <a:spcPts val="500"/>
+              </a:spcAft>
+            </a:pPr>
+            <a:r>
+              <a:rPr sz="1200" b="0">
+                <a:solidFill>
+                  <a:srgbClr val="7C8F7E"/>
+                </a:solidFill>
+                <a:latin typeface="Calibri"/>
+              </a:rPr>
+              <a:t>Proposez une fête au parc : c'est une vente facile.</a:t>
+            </a:r>
+          </a:p>
+        </p:txBody>
+      </p:sp>
+      <p:sp>
+        <p:nvSpPr>
+          <p:cNvPr id="19" name="Rounded Rectangle 18"/>
+          <p:cNvSpPr/>
+          <p:nvPr/>
+        </p:nvSpPr>
+        <p:spPr>
+          <a:xfrm>
+            <a:off x="685800" y="5532120"/>
+            <a:ext cx="10789920" cy="731520"/>
+          </a:xfrm>
+          <a:prstGeom prst="roundRect">
+            <a:avLst>
+              <a:gd name="adj" fmla="val 8000"/>
+            </a:avLst>
+          </a:prstGeom>
+          <a:solidFill>
+            <a:srgbClr val="F5C518"/>
+          </a:solidFill>
+          <a:ln>
+            <a:noFill/>
+          </a:ln>
+          <a:effectLst/>
+        </p:spPr>
+        <p:style>
+          <a:lnRef idx="1">
+            <a:schemeClr val="accent1"/>
+          </a:lnRef>
+          <a:fillRef idx="3">
+            <a:schemeClr val="accent1"/>
+          </a:fillRef>
+          <a:effectRef idx="2">
+            <a:schemeClr val="accent1"/>
+          </a:effectRef>
+          <a:fontRef idx="minor">
+            <a:schemeClr val="lt1"/>
+          </a:fontRef>
+        </p:style>
+        <p:txBody>
           <a:bodyPr rtlCol="0" anchor="ctr"/>
           <a:lstStyle/>
           <a:p>
@@ -11416,7 +9824,7 @@
       </p:sp>
       <p:sp>
         <p:nvSpPr>
-          <p:cNvPr id="18" name="TextBox 17"/>
+          <p:cNvPr id="20" name="TextBox 19"/>
           <p:cNvSpPr txBox="1"/>
           <p:nvPr/>
         </p:nvSpPr>
@@ -11448,7 +9856,7 @@
                 </a:solidFill>
                 <a:latin typeface="Calibri"/>
               </a:rPr>
-              <a:t>Relisez toujours le message avant d'envoyer, et ajoutez un mot personnel.</a:t>
+              <a:t>Relisez toujours le message avant d'envoyer et ajoutez un mot personnel.</a:t>
             </a:r>
           </a:p>
         </p:txBody>
@@ -13944,7 +12352,7 @@
         <p:spPr>
           <a:xfrm>
             <a:off x="1435607" y="2121408"/>
-            <a:ext cx="5669280" cy="320040"/>
+            <a:ext cx="4846320" cy="320040"/>
           </a:xfrm>
           <a:prstGeom prst="rect">
             <a:avLst/>
@@ -13983,7 +12391,7 @@
         <p:spPr>
           <a:xfrm>
             <a:off x="1435607" y="2487168"/>
-            <a:ext cx="5669280" cy="502920"/>
+            <a:ext cx="4846320" cy="502920"/>
           </a:xfrm>
           <a:prstGeom prst="rect">
             <a:avLst/>
@@ -14078,7 +12486,7 @@
         <p:spPr>
           <a:xfrm>
             <a:off x="1435607" y="3401568"/>
-            <a:ext cx="5669280" cy="320040"/>
+            <a:ext cx="4846320" cy="320040"/>
           </a:xfrm>
           <a:prstGeom prst="rect">
             <a:avLst/>
@@ -14117,7 +12525,7 @@
         <p:spPr>
           <a:xfrm>
             <a:off x="1435607" y="3767328"/>
-            <a:ext cx="5669280" cy="502920"/>
+            <a:ext cx="4846320" cy="502920"/>
           </a:xfrm>
           <a:prstGeom prst="rect">
             <a:avLst/>
@@ -14212,7 +12620,7 @@
         <p:spPr>
           <a:xfrm>
             <a:off x="1435607" y="4681727"/>
-            <a:ext cx="5669280" cy="320040"/>
+            <a:ext cx="4846320" cy="320040"/>
           </a:xfrm>
           <a:prstGeom prst="rect">
             <a:avLst/>
@@ -14251,7 +12659,7 @@
         <p:spPr>
           <a:xfrm>
             <a:off x="1435607" y="5047488"/>
-            <a:ext cx="5669280" cy="502920"/>
+            <a:ext cx="4846320" cy="502920"/>
           </a:xfrm>
           <a:prstGeom prst="rect">
             <a:avLst/>
@@ -14292,8 +12700,78 @@
         </p:nvSpPr>
         <p:spPr>
           <a:xfrm>
-            <a:off x="7360920" y="2103120"/>
-            <a:ext cx="4114800" cy="3520440"/>
+            <a:off x="6025896" y="2603154"/>
+            <a:ext cx="2468880" cy="2840410"/>
+          </a:xfrm>
+          <a:prstGeom prst="roundRect">
+            <a:avLst>
+              <a:gd name="adj" fmla="val 2000"/>
+            </a:avLst>
+          </a:prstGeom>
+          <a:solidFill>
+            <a:srgbClr val="E6EEE7"/>
+          </a:solidFill>
+          <a:ln>
+            <a:noFill/>
+          </a:ln>
+          <a:effectLst/>
+        </p:spPr>
+        <p:style>
+          <a:lnRef idx="1">
+            <a:schemeClr val="accent1"/>
+          </a:lnRef>
+          <a:fillRef idx="3">
+            <a:schemeClr val="accent1"/>
+          </a:fillRef>
+          <a:effectRef idx="2">
+            <a:schemeClr val="accent1"/>
+          </a:effectRef>
+          <a:fontRef idx="minor">
+            <a:schemeClr val="lt1"/>
+          </a:fontRef>
+        </p:style>
+        <p:txBody>
+          <a:bodyPr rtlCol="0" anchor="ctr"/>
+          <a:lstStyle/>
+          <a:p>
+            <a:pPr algn="ctr"/>
+          </a:p>
+        </p:txBody>
+      </p:sp>
+      <p:pic>
+        <p:nvPicPr>
+          <p:cNvPr id="15" name="Picture 14" descr="10_connexion.png"/>
+          <p:cNvPicPr>
+            <a:picLocks noChangeAspect="1"/>
+          </p:cNvPicPr>
+          <p:nvPr/>
+        </p:nvPicPr>
+        <p:blipFill>
+          <a:blip r:embed="rId2"/>
+          <a:stretch>
+            <a:fillRect/>
+          </a:stretch>
+        </p:blipFill>
+        <p:spPr>
+          <a:xfrm>
+            <a:off x="5989320" y="2557434"/>
+            <a:ext cx="2468880" cy="2840410"/>
+          </a:xfrm>
+          <a:prstGeom prst="rect">
+            <a:avLst/>
+          </a:prstGeom>
+        </p:spPr>
+      </p:pic>
+      <p:sp>
+        <p:nvSpPr>
+          <p:cNvPr id="16" name="Rounded Rectangle 15"/>
+          <p:cNvSpPr/>
+          <p:nvPr/>
+        </p:nvSpPr>
+        <p:spPr>
+          <a:xfrm>
+            <a:off x="8732520" y="2103120"/>
+            <a:ext cx="2743200" cy="3520440"/>
           </a:xfrm>
           <a:prstGeom prst="roundRect">
             <a:avLst>
@@ -14334,14 +12812,14 @@
       </p:sp>
       <p:sp>
         <p:nvSpPr>
-          <p:cNvPr id="15" name="TextBox 14"/>
+          <p:cNvPr id="17" name="TextBox 16"/>
           <p:cNvSpPr txBox="1"/>
           <p:nvPr/>
         </p:nvSpPr>
         <p:spPr>
           <a:xfrm>
-            <a:off x="7726679" y="2468880"/>
-            <a:ext cx="3383280" cy="365760"/>
+            <a:off x="9006840" y="2468880"/>
+            <a:ext cx="2194560" cy="365760"/>
           </a:xfrm>
           <a:prstGeom prst="rect">
             <a:avLst/>
@@ -14360,7 +12838,7 @@
               </a:spcAft>
             </a:pPr>
             <a:r>
-              <a:rPr sz="1500" b="1">
+              <a:rPr sz="1400" b="1">
                 <a:solidFill>
                   <a:srgbClr val="2D3A2E"/>
                 </a:solidFill>
@@ -14373,14 +12851,14 @@
       </p:sp>
       <p:sp>
         <p:nvSpPr>
-          <p:cNvPr id="16" name="TextBox 15"/>
+          <p:cNvPr id="18" name="TextBox 17"/>
           <p:cNvSpPr txBox="1"/>
           <p:nvPr/>
         </p:nvSpPr>
         <p:spPr>
           <a:xfrm>
-            <a:off x="7726679" y="3017520"/>
-            <a:ext cx="3383280" cy="2286000"/>
+            <a:off x="9006840" y="3017520"/>
+            <a:ext cx="2194560" cy="2286000"/>
           </a:xfrm>
           <a:prstGeom prst="rect">
             <a:avLst/>
@@ -14402,7 +12880,7 @@
               </a:spcAft>
             </a:pPr>
             <a:r>
-              <a:rPr sz="1400" b="0">
+              <a:rPr sz="1250" b="0">
                 <a:solidFill>
                   <a:srgbClr val="2D3A2E"/>
                 </a:solidFill>
@@ -14431,7 +12909,7 @@
               </a:spcAft>
             </a:pPr>
             <a:r>
-              <a:rPr sz="1400" b="0">
+              <a:rPr sz="1250" b="0">
                 <a:solidFill>
                   <a:srgbClr val="2D3A2E"/>
                 </a:solidFill>
@@ -14460,7 +12938,7 @@
               </a:spcAft>
             </a:pPr>
             <a:r>
-              <a:rPr sz="1400" b="0">
+              <a:rPr sz="1250" b="0">
                 <a:solidFill>
                   <a:srgbClr val="2D3A2E"/>
                 </a:solidFill>
@@ -14619,21 +13097,19 @@
         </p:nvSpPr>
         <p:spPr>
           <a:xfrm>
-            <a:off x="685800" y="1874519"/>
-            <a:ext cx="6949440" cy="4114800"/>
+            <a:off x="1014984" y="1920239"/>
+            <a:ext cx="6729983" cy="4206240"/>
           </a:xfrm>
           <a:prstGeom prst="roundRect">
             <a:avLst>
-              <a:gd name="adj" fmla="val 4000"/>
+              <a:gd name="adj" fmla="val 2000"/>
             </a:avLst>
           </a:prstGeom>
           <a:solidFill>
-            <a:srgbClr val="FFFFFF"/>
+            <a:srgbClr val="E6EEE7"/>
           </a:solidFill>
-          <a:ln w="15875">
-            <a:solidFill>
-              <a:srgbClr val="D3E4D5"/>
-            </a:solidFill>
+          <a:ln>
+            <a:noFill/>
           </a:ln>
           <a:effectLst/>
         </p:spPr>
@@ -14659,21 +13135,202 @@
           </a:p>
         </p:txBody>
       </p:sp>
-      <p:sp>
-        <p:nvSpPr>
-          <p:cNvPr id="6" name="Rounded Rectangle 5"/>
+      <p:pic>
+        <p:nvPicPr>
+          <p:cNvPr id="6" name="Picture 5" descr="01_accueil.png"/>
+          <p:cNvPicPr>
+            <a:picLocks noChangeAspect="1"/>
+          </p:cNvPicPr>
+          <p:nvPr/>
+        </p:nvPicPr>
+        <p:blipFill>
+          <a:blip r:embed="rId2"/>
+          <a:stretch>
+            <a:fillRect/>
+          </a:stretch>
+        </p:blipFill>
+        <p:spPr>
+          <a:xfrm>
+            <a:off x="978408" y="1874519"/>
+            <a:ext cx="6729983" cy="4206240"/>
+          </a:xfrm>
+          <a:prstGeom prst="rect">
+            <a:avLst/>
+          </a:prstGeom>
+        </p:spPr>
+      </p:pic>
+      <p:sp>
+        <p:nvSpPr>
+          <p:cNvPr id="7" name="Oval 6"/>
           <p:cNvSpPr/>
           <p:nvPr/>
         </p:nvSpPr>
         <p:spPr>
           <a:xfrm>
-            <a:off x="685800" y="1874519"/>
-            <a:ext cx="1600200" cy="4114800"/>
-          </a:xfrm>
-          <a:prstGeom prst="roundRect">
-            <a:avLst>
-              <a:gd name="adj" fmla="val 5000"/>
-            </a:avLst>
+            <a:off x="1392082" y="2208276"/>
+            <a:ext cx="384048" cy="384048"/>
+          </a:xfrm>
+          <a:prstGeom prst="ellipse">
+            <a:avLst/>
+          </a:prstGeom>
+          <a:solidFill>
+            <a:srgbClr val="F5C518"/>
+          </a:solidFill>
+          <a:ln>
+            <a:noFill/>
+          </a:ln>
+          <a:effectLst/>
+        </p:spPr>
+        <p:style>
+          <a:lnRef idx="1">
+            <a:schemeClr val="accent1"/>
+          </a:lnRef>
+          <a:fillRef idx="3">
+            <a:schemeClr val="accent1"/>
+          </a:fillRef>
+          <a:effectRef idx="2">
+            <a:schemeClr val="accent1"/>
+          </a:effectRef>
+          <a:fontRef idx="minor">
+            <a:schemeClr val="lt1"/>
+          </a:fontRef>
+        </p:style>
+        <p:txBody>
+          <a:bodyPr rtlCol="0" anchor="ctr" lIns="0" rIns="0" tIns="0" bIns="0"/>
+          <a:lstStyle/>
+          <a:p>
+            <a:pPr algn="ctr"/>
+            <a:r>
+              <a:rPr sz="1400" b="1">
+                <a:solidFill>
+                  <a:srgbClr val="2D3A2E"/>
+                </a:solidFill>
+                <a:latin typeface="Calibri"/>
+              </a:rPr>
+              <a:t>1</a:t>
+            </a:r>
+          </a:p>
+        </p:txBody>
+      </p:sp>
+      <p:sp>
+        <p:nvSpPr>
+          <p:cNvPr id="8" name="Oval 7"/>
+          <p:cNvSpPr/>
+          <p:nvPr/>
+        </p:nvSpPr>
+        <p:spPr>
+          <a:xfrm>
+            <a:off x="3747576" y="3280867"/>
+            <a:ext cx="384048" cy="384048"/>
+          </a:xfrm>
+          <a:prstGeom prst="ellipse">
+            <a:avLst/>
+          </a:prstGeom>
+          <a:solidFill>
+            <a:srgbClr val="F5C518"/>
+          </a:solidFill>
+          <a:ln>
+            <a:noFill/>
+          </a:ln>
+          <a:effectLst/>
+        </p:spPr>
+        <p:style>
+          <a:lnRef idx="1">
+            <a:schemeClr val="accent1"/>
+          </a:lnRef>
+          <a:fillRef idx="3">
+            <a:schemeClr val="accent1"/>
+          </a:fillRef>
+          <a:effectRef idx="2">
+            <a:schemeClr val="accent1"/>
+          </a:effectRef>
+          <a:fontRef idx="minor">
+            <a:schemeClr val="lt1"/>
+          </a:fontRef>
+        </p:style>
+        <p:txBody>
+          <a:bodyPr rtlCol="0" anchor="ctr" lIns="0" rIns="0" tIns="0" bIns="0"/>
+          <a:lstStyle/>
+          <a:p>
+            <a:pPr algn="ctr"/>
+            <a:r>
+              <a:rPr sz="1400" b="1">
+                <a:solidFill>
+                  <a:srgbClr val="2D3A2E"/>
+                </a:solidFill>
+                <a:latin typeface="Calibri"/>
+              </a:rPr>
+              <a:t>2</a:t>
+            </a:r>
+          </a:p>
+        </p:txBody>
+      </p:sp>
+      <p:sp>
+        <p:nvSpPr>
+          <p:cNvPr id="9" name="Oval 8"/>
+          <p:cNvSpPr/>
+          <p:nvPr/>
+        </p:nvSpPr>
+        <p:spPr>
+          <a:xfrm>
+            <a:off x="6170371" y="2334463"/>
+            <a:ext cx="384048" cy="384048"/>
+          </a:xfrm>
+          <a:prstGeom prst="ellipse">
+            <a:avLst/>
+          </a:prstGeom>
+          <a:solidFill>
+            <a:srgbClr val="F5C518"/>
+          </a:solidFill>
+          <a:ln>
+            <a:noFill/>
+          </a:ln>
+          <a:effectLst/>
+        </p:spPr>
+        <p:style>
+          <a:lnRef idx="1">
+            <a:schemeClr val="accent1"/>
+          </a:lnRef>
+          <a:fillRef idx="3">
+            <a:schemeClr val="accent1"/>
+          </a:fillRef>
+          <a:effectRef idx="2">
+            <a:schemeClr val="accent1"/>
+          </a:effectRef>
+          <a:fontRef idx="minor">
+            <a:schemeClr val="lt1"/>
+          </a:fontRef>
+        </p:style>
+        <p:txBody>
+          <a:bodyPr rtlCol="0" anchor="ctr" lIns="0" rIns="0" tIns="0" bIns="0"/>
+          <a:lstStyle/>
+          <a:p>
+            <a:pPr algn="ctr"/>
+            <a:r>
+              <a:rPr sz="1400" b="1">
+                <a:solidFill>
+                  <a:srgbClr val="2D3A2E"/>
+                </a:solidFill>
+                <a:latin typeface="Calibri"/>
+              </a:rPr>
+              <a:t>3</a:t>
+            </a:r>
+          </a:p>
+        </p:txBody>
+      </p:sp>
+      <p:sp>
+        <p:nvSpPr>
+          <p:cNvPr id="10" name="Oval 9"/>
+          <p:cNvSpPr/>
+          <p:nvPr/>
+        </p:nvSpPr>
+        <p:spPr>
+          <a:xfrm>
+            <a:off x="8275320" y="2103120"/>
+            <a:ext cx="457200" cy="457200"/>
+          </a:xfrm>
+          <a:prstGeom prst="ellipse">
+            <a:avLst/>
           </a:prstGeom>
           <a:solidFill>
             <a:srgbClr val="2A7A3B"/>
@@ -14698,172 +13355,18 @@
           </a:fontRef>
         </p:style>
         <p:txBody>
-          <a:bodyPr rtlCol="0" anchor="ctr"/>
+          <a:bodyPr rtlCol="0" anchor="ctr" lIns="0" rIns="0" tIns="0" bIns="0"/>
           <a:lstStyle/>
           <a:p>
             <a:pPr algn="ctr"/>
-          </a:p>
-        </p:txBody>
-      </p:sp>
-      <p:sp>
-        <p:nvSpPr>
-          <p:cNvPr id="7" name="TextBox 6"/>
-          <p:cNvSpPr txBox="1"/>
-          <p:nvPr/>
-        </p:nvSpPr>
-        <p:spPr>
-          <a:xfrm>
-            <a:off x="832104" y="2039112"/>
-            <a:ext cx="1325880" cy="228600"/>
-          </a:xfrm>
-          <a:prstGeom prst="rect">
-            <a:avLst/>
-          </a:prstGeom>
-          <a:noFill/>
-        </p:spPr>
-        <p:txBody>
-          <a:bodyPr wrap="square" lIns="0" rIns="0" tIns="0" bIns="0" anchor="t">
-            <a:spAutoFit/>
-          </a:bodyPr>
-          <a:lstStyle/>
-          <a:p>
-            <a:pPr algn="l">
-              <a:spcAft>
-                <a:spcPts val="0"/>
-              </a:spcAft>
-            </a:pPr>
-            <a:r>
-              <a:rPr sz="1150" b="1">
+            <a:r>
+              <a:rPr sz="1500" b="1">
                 <a:solidFill>
                   <a:srgbClr val="FFFFFF"/>
                 </a:solidFill>
                 <a:latin typeface="Calibri"/>
               </a:rPr>
-              <a:t>Didikids Parc</a:t>
-            </a:r>
-          </a:p>
-        </p:txBody>
-      </p:sp>
-      <p:sp>
-        <p:nvSpPr>
-          <p:cNvPr id="8" name="Rounded Rectangle 7"/>
-          <p:cNvSpPr/>
-          <p:nvPr/>
-        </p:nvSpPr>
-        <p:spPr>
-          <a:xfrm>
-            <a:off x="777240" y="2386584"/>
-            <a:ext cx="1417320" cy="310896"/>
-          </a:xfrm>
-          <a:prstGeom prst="roundRect">
-            <a:avLst>
-              <a:gd name="adj" fmla="val 30000"/>
-            </a:avLst>
-          </a:prstGeom>
-          <a:solidFill>
-            <a:srgbClr val="F5C518"/>
-          </a:solidFill>
-          <a:ln>
-            <a:noFill/>
-          </a:ln>
-          <a:effectLst/>
-        </p:spPr>
-        <p:style>
-          <a:lnRef idx="1">
-            <a:schemeClr val="accent1"/>
-          </a:lnRef>
-          <a:fillRef idx="3">
-            <a:schemeClr val="accent1"/>
-          </a:fillRef>
-          <a:effectRef idx="2">
-            <a:schemeClr val="accent1"/>
-          </a:effectRef>
-          <a:fontRef idx="minor">
-            <a:schemeClr val="lt1"/>
-          </a:fontRef>
-        </p:style>
-        <p:txBody>
-          <a:bodyPr rtlCol="0" anchor="ctr"/>
-          <a:lstStyle/>
-          <a:p>
-            <a:pPr algn="ctr"/>
-          </a:p>
-        </p:txBody>
-      </p:sp>
-      <p:sp>
-        <p:nvSpPr>
-          <p:cNvPr id="9" name="TextBox 8"/>
-          <p:cNvSpPr txBox="1"/>
-          <p:nvPr/>
-        </p:nvSpPr>
-        <p:spPr>
-          <a:xfrm>
-            <a:off x="868680" y="2459736"/>
-            <a:ext cx="1234440" cy="201168"/>
-          </a:xfrm>
-          <a:prstGeom prst="rect">
-            <a:avLst/>
-          </a:prstGeom>
-          <a:noFill/>
-        </p:spPr>
-        <p:txBody>
-          <a:bodyPr wrap="square" lIns="0" rIns="0" tIns="0" bIns="0" anchor="t">
-            <a:spAutoFit/>
-          </a:bodyPr>
-          <a:lstStyle/>
-          <a:p>
-            <a:pPr algn="l">
-              <a:spcAft>
-                <a:spcPts val="0"/>
-              </a:spcAft>
-            </a:pPr>
-            <a:r>
-              <a:rPr sz="950" b="1">
-                <a:solidFill>
-                  <a:srgbClr val="2D3A2E"/>
-                </a:solidFill>
-                <a:latin typeface="Calibri"/>
-              </a:rPr>
-              <a:t>Accueil / Entrées</a:t>
-            </a:r>
-          </a:p>
-        </p:txBody>
-      </p:sp>
-      <p:sp>
-        <p:nvSpPr>
-          <p:cNvPr id="10" name="TextBox 9"/>
-          <p:cNvSpPr txBox="1"/>
-          <p:nvPr/>
-        </p:nvSpPr>
-        <p:spPr>
-          <a:xfrm>
-            <a:off x="868680" y="2862072"/>
-            <a:ext cx="1234440" cy="201168"/>
-          </a:xfrm>
-          <a:prstGeom prst="rect">
-            <a:avLst/>
-          </a:prstGeom>
-          <a:noFill/>
-        </p:spPr>
-        <p:txBody>
-          <a:bodyPr wrap="square" lIns="0" rIns="0" tIns="0" bIns="0" anchor="t">
-            <a:spAutoFit/>
-          </a:bodyPr>
-          <a:lstStyle/>
-          <a:p>
-            <a:pPr algn="l">
-              <a:spcAft>
-                <a:spcPts val="0"/>
-              </a:spcAft>
-            </a:pPr>
-            <a:r>
-              <a:rPr sz="950" b="0">
-                <a:solidFill>
-                  <a:srgbClr val="E8F7EA"/>
-                </a:solidFill>
-                <a:latin typeface="Calibri"/>
-              </a:rPr>
-              <a:t>Membres</a:t>
+              <a:t>1</a:t>
             </a:r>
           </a:p>
         </p:txBody>
@@ -14876,803 +13379,8 @@
         </p:nvSpPr>
         <p:spPr>
           <a:xfrm>
-            <a:off x="868680" y="3264408"/>
-            <a:ext cx="1234440" cy="201168"/>
-          </a:xfrm>
-          <a:prstGeom prst="rect">
-            <a:avLst/>
-          </a:prstGeom>
-          <a:noFill/>
-        </p:spPr>
-        <p:txBody>
-          <a:bodyPr wrap="square" lIns="0" rIns="0" tIns="0" bIns="0" anchor="t">
-            <a:spAutoFit/>
-          </a:bodyPr>
-          <a:lstStyle/>
-          <a:p>
-            <a:pPr algn="l">
-              <a:spcAft>
-                <a:spcPts val="0"/>
-              </a:spcAft>
-            </a:pPr>
-            <a:r>
-              <a:rPr sz="950" b="0">
-                <a:solidFill>
-                  <a:srgbClr val="E8F7EA"/>
-                </a:solidFill>
-                <a:latin typeface="Calibri"/>
-              </a:rPr>
-              <a:t>Relances WhatsApp</a:t>
-            </a:r>
-          </a:p>
-        </p:txBody>
-      </p:sp>
-      <p:sp>
-        <p:nvSpPr>
-          <p:cNvPr id="12" name="TextBox 11"/>
-          <p:cNvSpPr txBox="1"/>
-          <p:nvPr/>
-        </p:nvSpPr>
-        <p:spPr>
-          <a:xfrm>
-            <a:off x="868680" y="3666744"/>
-            <a:ext cx="1234440" cy="201168"/>
-          </a:xfrm>
-          <a:prstGeom prst="rect">
-            <a:avLst/>
-          </a:prstGeom>
-          <a:noFill/>
-        </p:spPr>
-        <p:txBody>
-          <a:bodyPr wrap="square" lIns="0" rIns="0" tIns="0" bIns="0" anchor="t">
-            <a:spAutoFit/>
-          </a:bodyPr>
-          <a:lstStyle/>
-          <a:p>
-            <a:pPr algn="l">
-              <a:spcAft>
-                <a:spcPts val="0"/>
-              </a:spcAft>
-            </a:pPr>
-            <a:r>
-              <a:rPr sz="950" b="0">
-                <a:solidFill>
-                  <a:srgbClr val="E8F7EA"/>
-                </a:solidFill>
-                <a:latin typeface="Calibri"/>
-              </a:rPr>
-              <a:t>Historique visites</a:t>
-            </a:r>
-          </a:p>
-        </p:txBody>
-      </p:sp>
-      <p:sp>
-        <p:nvSpPr>
-          <p:cNvPr id="13" name="TextBox 12"/>
-          <p:cNvSpPr txBox="1"/>
-          <p:nvPr/>
-        </p:nvSpPr>
-        <p:spPr>
-          <a:xfrm>
-            <a:off x="2514600" y="2084831"/>
-            <a:ext cx="2743200" cy="274320"/>
-          </a:xfrm>
-          <a:prstGeom prst="rect">
-            <a:avLst/>
-          </a:prstGeom>
-          <a:noFill/>
-        </p:spPr>
-        <p:txBody>
-          <a:bodyPr wrap="square" lIns="0" rIns="0" tIns="0" bIns="0" anchor="t">
-            <a:spAutoFit/>
-          </a:bodyPr>
-          <a:lstStyle/>
-          <a:p>
-            <a:pPr algn="l">
-              <a:spcAft>
-                <a:spcPts val="0"/>
-              </a:spcAft>
-            </a:pPr>
-            <a:r>
-              <a:rPr sz="1500" b="1">
-                <a:solidFill>
-                  <a:srgbClr val="2A7A3B"/>
-                </a:solidFill>
-                <a:latin typeface="Calibri"/>
-              </a:rPr>
-              <a:t>Contrôle des entrées</a:t>
-            </a:r>
-          </a:p>
-        </p:txBody>
-      </p:sp>
-      <p:sp>
-        <p:nvSpPr>
-          <p:cNvPr id="14" name="Rounded Rectangle 13"/>
-          <p:cNvSpPr/>
-          <p:nvPr/>
-        </p:nvSpPr>
-        <p:spPr>
-          <a:xfrm>
-            <a:off x="2514600" y="2514600"/>
-            <a:ext cx="4846320" cy="1874519"/>
-          </a:xfrm>
-          <a:prstGeom prst="roundRect">
-            <a:avLst>
-              <a:gd name="adj" fmla="val 10000"/>
-            </a:avLst>
-          </a:prstGeom>
-          <a:solidFill>
-            <a:srgbClr val="FFFFFF"/>
-          </a:solidFill>
-          <a:ln w="19050">
-            <a:solidFill>
-              <a:srgbClr val="D3E4D5"/>
-            </a:solidFill>
-          </a:ln>
-          <a:effectLst/>
-        </p:spPr>
-        <p:style>
-          <a:lnRef idx="1">
-            <a:schemeClr val="accent1"/>
-          </a:lnRef>
-          <a:fillRef idx="3">
-            <a:schemeClr val="accent1"/>
-          </a:fillRef>
-          <a:effectRef idx="2">
-            <a:schemeClr val="accent1"/>
-          </a:effectRef>
-          <a:fontRef idx="minor">
-            <a:schemeClr val="lt1"/>
-          </a:fontRef>
-        </p:style>
-        <p:txBody>
-          <a:bodyPr rtlCol="0" anchor="ctr"/>
-          <a:lstStyle/>
-          <a:p>
-            <a:pPr algn="ctr"/>
-          </a:p>
-        </p:txBody>
-      </p:sp>
-      <p:sp>
-        <p:nvSpPr>
-          <p:cNvPr id="15" name="TextBox 14"/>
-          <p:cNvSpPr txBox="1"/>
-          <p:nvPr/>
-        </p:nvSpPr>
-        <p:spPr>
-          <a:xfrm>
-            <a:off x="2606040" y="2788920"/>
-            <a:ext cx="4663440" cy="274320"/>
-          </a:xfrm>
-          <a:prstGeom prst="rect">
-            <a:avLst/>
-          </a:prstGeom>
-          <a:noFill/>
-        </p:spPr>
-        <p:txBody>
-          <a:bodyPr wrap="square" lIns="0" rIns="0" tIns="0" bIns="0" anchor="t">
-            <a:spAutoFit/>
-          </a:bodyPr>
-          <a:lstStyle/>
-          <a:p>
-            <a:pPr algn="ctr">
-              <a:spcAft>
-                <a:spcPts val="0"/>
-              </a:spcAft>
-            </a:pPr>
-            <a:r>
-              <a:rPr sz="1500" b="1">
-                <a:solidFill>
-                  <a:srgbClr val="2A7A3B"/>
-                </a:solidFill>
-                <a:latin typeface="Calibri"/>
-              </a:rPr>
-              <a:t>Présentez la carte</a:t>
-            </a:r>
-          </a:p>
-        </p:txBody>
-      </p:sp>
-      <p:sp>
-        <p:nvSpPr>
-          <p:cNvPr id="16" name="TextBox 15"/>
-          <p:cNvSpPr txBox="1"/>
-          <p:nvPr/>
-        </p:nvSpPr>
-        <p:spPr>
-          <a:xfrm>
-            <a:off x="2606040" y="3154680"/>
-            <a:ext cx="4663440" cy="274320"/>
-          </a:xfrm>
-          <a:prstGeom prst="rect">
-            <a:avLst/>
-          </a:prstGeom>
-          <a:noFill/>
-        </p:spPr>
-        <p:txBody>
-          <a:bodyPr wrap="square" lIns="0" rIns="0" tIns="0" bIns="0" anchor="t">
-            <a:spAutoFit/>
-          </a:bodyPr>
-          <a:lstStyle/>
-          <a:p>
-            <a:pPr algn="ctr">
-              <a:spcAft>
-                <a:spcPts val="0"/>
-              </a:spcAft>
-            </a:pPr>
-            <a:r>
-              <a:rPr sz="1050" b="0">
-                <a:solidFill>
-                  <a:srgbClr val="7C8F7E"/>
-                </a:solidFill>
-                <a:latin typeface="Calibri"/>
-              </a:rPr>
-              <a:t>Le passage est validé automatiquement</a:t>
-            </a:r>
-          </a:p>
-        </p:txBody>
-      </p:sp>
-      <p:sp>
-        <p:nvSpPr>
-          <p:cNvPr id="17" name="Rounded Rectangle 16"/>
-          <p:cNvSpPr/>
-          <p:nvPr/>
-        </p:nvSpPr>
-        <p:spPr>
-          <a:xfrm>
-            <a:off x="3108960" y="3566160"/>
-            <a:ext cx="3657600" cy="502920"/>
-          </a:xfrm>
-          <a:prstGeom prst="roundRect">
-            <a:avLst>
-              <a:gd name="adj" fmla="val 20000"/>
-            </a:avLst>
-          </a:prstGeom>
-          <a:solidFill>
-            <a:srgbClr val="E8F7EA"/>
-          </a:solidFill>
-          <a:ln w="25400">
-            <a:solidFill>
-              <a:srgbClr val="4CAF50"/>
-            </a:solidFill>
-            <a:prstDash val="dash"/>
-          </a:ln>
-          <a:effectLst/>
-        </p:spPr>
-        <p:style>
-          <a:lnRef idx="1">
-            <a:schemeClr val="accent1"/>
-          </a:lnRef>
-          <a:fillRef idx="3">
-            <a:schemeClr val="accent1"/>
-          </a:fillRef>
-          <a:effectRef idx="2">
-            <a:schemeClr val="accent1"/>
-          </a:effectRef>
-          <a:fontRef idx="minor">
-            <a:schemeClr val="lt1"/>
-          </a:fontRef>
-        </p:style>
-        <p:txBody>
-          <a:bodyPr rtlCol="0" anchor="ctr"/>
-          <a:lstStyle/>
-          <a:p>
-            <a:pPr algn="ctr"/>
-          </a:p>
-        </p:txBody>
-      </p:sp>
-      <p:sp>
-        <p:nvSpPr>
-          <p:cNvPr id="18" name="TextBox 17"/>
-          <p:cNvSpPr txBox="1"/>
-          <p:nvPr/>
-        </p:nvSpPr>
-        <p:spPr>
-          <a:xfrm>
-            <a:off x="3108960" y="3703320"/>
-            <a:ext cx="3657600" cy="274320"/>
-          </a:xfrm>
-          <a:prstGeom prst="rect">
-            <a:avLst/>
-          </a:prstGeom>
-          <a:noFill/>
-        </p:spPr>
-        <p:txBody>
-          <a:bodyPr wrap="square" lIns="0" rIns="0" tIns="0" bIns="0" anchor="t">
-            <a:spAutoFit/>
-          </a:bodyPr>
-          <a:lstStyle/>
-          <a:p>
-            <a:pPr algn="ctr">
-              <a:spcAft>
-                <a:spcPts val="0"/>
-              </a:spcAft>
-            </a:pPr>
-            <a:r>
-              <a:rPr sz="1200" b="1">
-                <a:solidFill>
-                  <a:srgbClr val="2A7A3B"/>
-                </a:solidFill>
-                <a:latin typeface="Calibri"/>
-              </a:rPr>
-              <a:t>ou saisir l'UID ici</a:t>
-            </a:r>
-          </a:p>
-        </p:txBody>
-      </p:sp>
-      <p:sp>
-        <p:nvSpPr>
-          <p:cNvPr id="19" name="Rounded Rectangle 18"/>
-          <p:cNvSpPr/>
-          <p:nvPr/>
-        </p:nvSpPr>
-        <p:spPr>
-          <a:xfrm>
-            <a:off x="2514600" y="4572000"/>
-            <a:ext cx="4846320" cy="1188720"/>
-          </a:xfrm>
-          <a:prstGeom prst="roundRect">
-            <a:avLst>
-              <a:gd name="adj" fmla="val 10000"/>
-            </a:avLst>
-          </a:prstGeom>
-          <a:solidFill>
-            <a:srgbClr val="F4F7F4"/>
-          </a:solidFill>
-          <a:ln>
-            <a:noFill/>
-          </a:ln>
-          <a:effectLst/>
-        </p:spPr>
-        <p:style>
-          <a:lnRef idx="1">
-            <a:schemeClr val="accent1"/>
-          </a:lnRef>
-          <a:fillRef idx="3">
-            <a:schemeClr val="accent1"/>
-          </a:fillRef>
-          <a:effectRef idx="2">
-            <a:schemeClr val="accent1"/>
-          </a:effectRef>
-          <a:fontRef idx="minor">
-            <a:schemeClr val="lt1"/>
-          </a:fontRef>
-        </p:style>
-        <p:txBody>
-          <a:bodyPr rtlCol="0" anchor="ctr"/>
-          <a:lstStyle/>
-          <a:p>
-            <a:pPr algn="ctr"/>
-          </a:p>
-        </p:txBody>
-      </p:sp>
-      <p:sp>
-        <p:nvSpPr>
-          <p:cNvPr id="20" name="TextBox 19"/>
-          <p:cNvSpPr txBox="1"/>
-          <p:nvPr/>
-        </p:nvSpPr>
-        <p:spPr>
-          <a:xfrm>
-            <a:off x="2697480" y="4754880"/>
-            <a:ext cx="4480560" cy="228600"/>
-          </a:xfrm>
-          <a:prstGeom prst="rect">
-            <a:avLst/>
-          </a:prstGeom>
-          <a:noFill/>
-        </p:spPr>
-        <p:txBody>
-          <a:bodyPr wrap="square" lIns="0" rIns="0" tIns="0" bIns="0" anchor="t">
-            <a:spAutoFit/>
-          </a:bodyPr>
-          <a:lstStyle/>
-          <a:p>
-            <a:pPr algn="l">
-              <a:spcAft>
-                <a:spcPts val="0"/>
-              </a:spcAft>
-            </a:pPr>
-            <a:r>
-              <a:rPr sz="1200" b="1">
-                <a:solidFill>
-                  <a:srgbClr val="2A7A3B"/>
-                </a:solidFill>
-                <a:latin typeface="Calibri"/>
-              </a:rPr>
-              <a:t>Passages du jour</a:t>
-            </a:r>
-          </a:p>
-        </p:txBody>
-      </p:sp>
-      <p:sp>
-        <p:nvSpPr>
-          <p:cNvPr id="21" name="TextBox 20"/>
-          <p:cNvSpPr txBox="1"/>
-          <p:nvPr/>
-        </p:nvSpPr>
-        <p:spPr>
-          <a:xfrm>
-            <a:off x="2697480" y="5120640"/>
-            <a:ext cx="640080" cy="201168"/>
-          </a:xfrm>
-          <a:prstGeom prst="rect">
-            <a:avLst/>
-          </a:prstGeom>
-          <a:noFill/>
-        </p:spPr>
-        <p:txBody>
-          <a:bodyPr wrap="square" lIns="0" rIns="0" tIns="0" bIns="0" anchor="t">
-            <a:spAutoFit/>
-          </a:bodyPr>
-          <a:lstStyle/>
-          <a:p>
-            <a:pPr algn="l">
-              <a:spcAft>
-                <a:spcPts val="0"/>
-              </a:spcAft>
-            </a:pPr>
-            <a:r>
-              <a:rPr sz="1000" b="0">
-                <a:solidFill>
-                  <a:srgbClr val="2D3A2E"/>
-                </a:solidFill>
-                <a:latin typeface="Calibri"/>
-              </a:rPr>
-              <a:t>14:32</a:t>
-            </a:r>
-          </a:p>
-        </p:txBody>
-      </p:sp>
-      <p:sp>
-        <p:nvSpPr>
-          <p:cNvPr id="22" name="TextBox 21"/>
-          <p:cNvSpPr txBox="1"/>
-          <p:nvPr/>
-        </p:nvSpPr>
-        <p:spPr>
-          <a:xfrm>
-            <a:off x="3429000" y="5120640"/>
-            <a:ext cx="2194560" cy="201168"/>
-          </a:xfrm>
-          <a:prstGeom prst="rect">
-            <a:avLst/>
-          </a:prstGeom>
-          <a:noFill/>
-        </p:spPr>
-        <p:txBody>
-          <a:bodyPr wrap="square" lIns="0" rIns="0" tIns="0" bIns="0" anchor="t">
-            <a:spAutoFit/>
-          </a:bodyPr>
-          <a:lstStyle/>
-          <a:p>
-            <a:pPr algn="l">
-              <a:spcAft>
-                <a:spcPts val="0"/>
-              </a:spcAft>
-            </a:pPr>
-            <a:r>
-              <a:rPr sz="1000" b="1">
-                <a:solidFill>
-                  <a:srgbClr val="2D3A2E"/>
-                </a:solidFill>
-                <a:latin typeface="Calibri"/>
-              </a:rPr>
-              <a:t>Aminata Diallo</a:t>
-            </a:r>
-          </a:p>
-        </p:txBody>
-      </p:sp>
-      <p:sp>
-        <p:nvSpPr>
-          <p:cNvPr id="23" name="Rounded Rectangle 22"/>
-          <p:cNvSpPr/>
-          <p:nvPr/>
-        </p:nvSpPr>
-        <p:spPr>
-          <a:xfrm>
-            <a:off x="6126480" y="5093207"/>
-            <a:ext cx="502920" cy="237744"/>
-          </a:xfrm>
-          <a:prstGeom prst="roundRect">
-            <a:avLst>
-              <a:gd name="adj" fmla="val 40000"/>
-            </a:avLst>
-          </a:prstGeom>
-          <a:solidFill>
-            <a:srgbClr val="E8F7EA"/>
-          </a:solidFill>
-          <a:ln>
-            <a:noFill/>
-          </a:ln>
-          <a:effectLst/>
-        </p:spPr>
-        <p:style>
-          <a:lnRef idx="1">
-            <a:schemeClr val="accent1"/>
-          </a:lnRef>
-          <a:fillRef idx="3">
-            <a:schemeClr val="accent1"/>
-          </a:fillRef>
-          <a:effectRef idx="2">
-            <a:schemeClr val="accent1"/>
-          </a:effectRef>
-          <a:fontRef idx="minor">
-            <a:schemeClr val="lt1"/>
-          </a:fontRef>
-        </p:style>
-        <p:txBody>
-          <a:bodyPr rtlCol="0" anchor="ctr"/>
-          <a:lstStyle/>
-          <a:p>
-            <a:pPr algn="ctr"/>
-          </a:p>
-        </p:txBody>
-      </p:sp>
-      <p:sp>
-        <p:nvSpPr>
-          <p:cNvPr id="24" name="TextBox 23"/>
-          <p:cNvSpPr txBox="1"/>
-          <p:nvPr/>
-        </p:nvSpPr>
-        <p:spPr>
-          <a:xfrm>
-            <a:off x="6126480" y="5138927"/>
-            <a:ext cx="502920" cy="182880"/>
-          </a:xfrm>
-          <a:prstGeom prst="rect">
-            <a:avLst/>
-          </a:prstGeom>
-          <a:noFill/>
-        </p:spPr>
-        <p:txBody>
-          <a:bodyPr wrap="square" lIns="0" rIns="0" tIns="0" bIns="0" anchor="t">
-            <a:spAutoFit/>
-          </a:bodyPr>
-          <a:lstStyle/>
-          <a:p>
-            <a:pPr algn="ctr">
-              <a:spcAft>
-                <a:spcPts val="0"/>
-              </a:spcAft>
-            </a:pPr>
-            <a:r>
-              <a:rPr sz="850" b="1">
-                <a:solidFill>
-                  <a:srgbClr val="2A7A3B"/>
-                </a:solidFill>
-                <a:latin typeface="Calibri"/>
-              </a:rPr>
-              <a:t>OK</a:t>
-            </a:r>
-          </a:p>
-        </p:txBody>
-      </p:sp>
-      <p:sp>
-        <p:nvSpPr>
-          <p:cNvPr id="25" name="TextBox 24"/>
-          <p:cNvSpPr txBox="1"/>
-          <p:nvPr/>
-        </p:nvSpPr>
-        <p:spPr>
-          <a:xfrm>
-            <a:off x="2697480" y="5440679"/>
-            <a:ext cx="640080" cy="201168"/>
-          </a:xfrm>
-          <a:prstGeom prst="rect">
-            <a:avLst/>
-          </a:prstGeom>
-          <a:noFill/>
-        </p:spPr>
-        <p:txBody>
-          <a:bodyPr wrap="square" lIns="0" rIns="0" tIns="0" bIns="0" anchor="t">
-            <a:spAutoFit/>
-          </a:bodyPr>
-          <a:lstStyle/>
-          <a:p>
-            <a:pPr algn="l">
-              <a:spcAft>
-                <a:spcPts val="0"/>
-              </a:spcAft>
-            </a:pPr>
-            <a:r>
-              <a:rPr sz="1000" b="0">
-                <a:solidFill>
-                  <a:srgbClr val="2D3A2E"/>
-                </a:solidFill>
-                <a:latin typeface="Calibri"/>
-              </a:rPr>
-              <a:t>14:05</a:t>
-            </a:r>
-          </a:p>
-        </p:txBody>
-      </p:sp>
-      <p:sp>
-        <p:nvSpPr>
-          <p:cNvPr id="26" name="TextBox 25"/>
-          <p:cNvSpPr txBox="1"/>
-          <p:nvPr/>
-        </p:nvSpPr>
-        <p:spPr>
-          <a:xfrm>
-            <a:off x="3429000" y="5440679"/>
-            <a:ext cx="2194560" cy="201168"/>
-          </a:xfrm>
-          <a:prstGeom prst="rect">
-            <a:avLst/>
-          </a:prstGeom>
-          <a:noFill/>
-        </p:spPr>
-        <p:txBody>
-          <a:bodyPr wrap="square" lIns="0" rIns="0" tIns="0" bIns="0" anchor="t">
-            <a:spAutoFit/>
-          </a:bodyPr>
-          <a:lstStyle/>
-          <a:p>
-            <a:pPr algn="l">
-              <a:spcAft>
-                <a:spcPts val="0"/>
-              </a:spcAft>
-            </a:pPr>
-            <a:r>
-              <a:rPr sz="1000" b="1">
-                <a:solidFill>
-                  <a:srgbClr val="2D3A2E"/>
-                </a:solidFill>
-                <a:latin typeface="Calibri"/>
-              </a:rPr>
-              <a:t>Sekou Conde</a:t>
-            </a:r>
-          </a:p>
-        </p:txBody>
-      </p:sp>
-      <p:sp>
-        <p:nvSpPr>
-          <p:cNvPr id="27" name="Rounded Rectangle 26"/>
-          <p:cNvSpPr/>
-          <p:nvPr/>
-        </p:nvSpPr>
-        <p:spPr>
-          <a:xfrm>
-            <a:off x="6126480" y="5413247"/>
-            <a:ext cx="502920" cy="237744"/>
-          </a:xfrm>
-          <a:prstGeom prst="roundRect">
-            <a:avLst>
-              <a:gd name="adj" fmla="val 40000"/>
-            </a:avLst>
-          </a:prstGeom>
-          <a:solidFill>
-            <a:srgbClr val="E8F7EA"/>
-          </a:solidFill>
-          <a:ln>
-            <a:noFill/>
-          </a:ln>
-          <a:effectLst/>
-        </p:spPr>
-        <p:style>
-          <a:lnRef idx="1">
-            <a:schemeClr val="accent1"/>
-          </a:lnRef>
-          <a:fillRef idx="3">
-            <a:schemeClr val="accent1"/>
-          </a:fillRef>
-          <a:effectRef idx="2">
-            <a:schemeClr val="accent1"/>
-          </a:effectRef>
-          <a:fontRef idx="minor">
-            <a:schemeClr val="lt1"/>
-          </a:fontRef>
-        </p:style>
-        <p:txBody>
-          <a:bodyPr rtlCol="0" anchor="ctr"/>
-          <a:lstStyle/>
-          <a:p>
-            <a:pPr algn="ctr"/>
-          </a:p>
-        </p:txBody>
-      </p:sp>
-      <p:sp>
-        <p:nvSpPr>
-          <p:cNvPr id="28" name="TextBox 27"/>
-          <p:cNvSpPr txBox="1"/>
-          <p:nvPr/>
-        </p:nvSpPr>
-        <p:spPr>
-          <a:xfrm>
-            <a:off x="6126480" y="5458967"/>
-            <a:ext cx="502920" cy="182880"/>
-          </a:xfrm>
-          <a:prstGeom prst="rect">
-            <a:avLst/>
-          </a:prstGeom>
-          <a:noFill/>
-        </p:spPr>
-        <p:txBody>
-          <a:bodyPr wrap="square" lIns="0" rIns="0" tIns="0" bIns="0" anchor="t">
-            <a:spAutoFit/>
-          </a:bodyPr>
-          <a:lstStyle/>
-          <a:p>
-            <a:pPr algn="ctr">
-              <a:spcAft>
-                <a:spcPts val="0"/>
-              </a:spcAft>
-            </a:pPr>
-            <a:r>
-              <a:rPr sz="850" b="1">
-                <a:solidFill>
-                  <a:srgbClr val="2A7A3B"/>
-                </a:solidFill>
-                <a:latin typeface="Calibri"/>
-              </a:rPr>
-              <a:t>OK</a:t>
-            </a:r>
-          </a:p>
-        </p:txBody>
-      </p:sp>
-      <p:sp>
-        <p:nvSpPr>
-          <p:cNvPr id="29" name="Oval 28"/>
-          <p:cNvSpPr/>
-          <p:nvPr/>
-        </p:nvSpPr>
-        <p:spPr>
-          <a:xfrm>
-            <a:off x="7909560" y="2103120"/>
-            <a:ext cx="457200" cy="457200"/>
-          </a:xfrm>
-          <a:prstGeom prst="ellipse">
-            <a:avLst/>
-          </a:prstGeom>
-          <a:solidFill>
-            <a:srgbClr val="2A7A3B"/>
-          </a:solidFill>
-          <a:ln>
-            <a:noFill/>
-          </a:ln>
-          <a:effectLst/>
-        </p:spPr>
-        <p:style>
-          <a:lnRef idx="1">
-            <a:schemeClr val="accent1"/>
-          </a:lnRef>
-          <a:fillRef idx="3">
-            <a:schemeClr val="accent1"/>
-          </a:fillRef>
-          <a:effectRef idx="2">
-            <a:schemeClr val="accent1"/>
-          </a:effectRef>
-          <a:fontRef idx="minor">
-            <a:schemeClr val="lt1"/>
-          </a:fontRef>
-        </p:style>
-        <p:txBody>
-          <a:bodyPr rtlCol="0" anchor="ctr" lIns="0" rIns="0" tIns="0" bIns="0"/>
-          <a:lstStyle/>
-          <a:p>
-            <a:pPr algn="ctr"/>
-            <a:r>
-              <a:rPr sz="1500" b="1">
-                <a:solidFill>
-                  <a:srgbClr val="FFFFFF"/>
-                </a:solidFill>
-                <a:latin typeface="Calibri"/>
-              </a:rPr>
-              <a:t>1</a:t>
-            </a:r>
-          </a:p>
-        </p:txBody>
-      </p:sp>
-      <p:sp>
-        <p:nvSpPr>
-          <p:cNvPr id="30" name="TextBox 29"/>
-          <p:cNvSpPr txBox="1"/>
-          <p:nvPr/>
-        </p:nvSpPr>
-        <p:spPr>
-          <a:xfrm>
-            <a:off x="8567928" y="2121408"/>
-            <a:ext cx="3566160" cy="320040"/>
+            <a:off x="8933688" y="2121408"/>
+            <a:ext cx="3200400" cy="320040"/>
           </a:xfrm>
           <a:prstGeom prst="rect">
             <a:avLst/>
@@ -15704,14 +13412,14 @@
       </p:sp>
       <p:sp>
         <p:nvSpPr>
-          <p:cNvPr id="31" name="TextBox 30"/>
+          <p:cNvPr id="12" name="TextBox 11"/>
           <p:cNvSpPr txBox="1"/>
           <p:nvPr/>
         </p:nvSpPr>
         <p:spPr>
           <a:xfrm>
-            <a:off x="8567928" y="2487168"/>
-            <a:ext cx="3566160" cy="502920"/>
+            <a:off x="8933688" y="2487168"/>
+            <a:ext cx="3200400" cy="502920"/>
           </a:xfrm>
           <a:prstGeom prst="rect">
             <a:avLst/>
@@ -15746,13 +13454,13 @@
       </p:sp>
       <p:sp>
         <p:nvSpPr>
-          <p:cNvPr id="32" name="Oval 31"/>
+          <p:cNvPr id="13" name="Oval 12"/>
           <p:cNvSpPr/>
           <p:nvPr/>
         </p:nvSpPr>
         <p:spPr>
           <a:xfrm>
-            <a:off x="7909560" y="3383279"/>
+            <a:off x="8275320" y="3383279"/>
             <a:ext cx="457200" cy="457200"/>
           </a:xfrm>
           <a:prstGeom prst="ellipse">
@@ -15799,14 +13507,14 @@
       </p:sp>
       <p:sp>
         <p:nvSpPr>
-          <p:cNvPr id="33" name="TextBox 32"/>
+          <p:cNvPr id="14" name="TextBox 13"/>
           <p:cNvSpPr txBox="1"/>
           <p:nvPr/>
         </p:nvSpPr>
         <p:spPr>
           <a:xfrm>
-            <a:off x="8567928" y="3401568"/>
-            <a:ext cx="3566160" cy="320040"/>
+            <a:off x="8933688" y="3401568"/>
+            <a:ext cx="3200400" cy="320040"/>
           </a:xfrm>
           <a:prstGeom prst="rect">
             <a:avLst/>
@@ -15838,14 +13546,14 @@
       </p:sp>
       <p:sp>
         <p:nvSpPr>
-          <p:cNvPr id="34" name="TextBox 33"/>
+          <p:cNvPr id="15" name="TextBox 14"/>
           <p:cNvSpPr txBox="1"/>
           <p:nvPr/>
         </p:nvSpPr>
         <p:spPr>
           <a:xfrm>
-            <a:off x="8567928" y="3767328"/>
-            <a:ext cx="3566160" cy="502920"/>
+            <a:off x="8933688" y="3767328"/>
+            <a:ext cx="3200400" cy="502920"/>
           </a:xfrm>
           <a:prstGeom prst="rect">
             <a:avLst/>
@@ -15880,13 +13588,13 @@
       </p:sp>
       <p:sp>
         <p:nvSpPr>
-          <p:cNvPr id="35" name="Oval 34"/>
+          <p:cNvPr id="16" name="Oval 15"/>
           <p:cNvSpPr/>
           <p:nvPr/>
         </p:nvSpPr>
         <p:spPr>
           <a:xfrm>
-            <a:off x="7909560" y="4663440"/>
+            <a:off x="8275320" y="4663440"/>
             <a:ext cx="457200" cy="457200"/>
           </a:xfrm>
           <a:prstGeom prst="ellipse">
@@ -15933,14 +13641,14 @@
       </p:sp>
       <p:sp>
         <p:nvSpPr>
-          <p:cNvPr id="36" name="TextBox 35"/>
+          <p:cNvPr id="17" name="TextBox 16"/>
           <p:cNvSpPr txBox="1"/>
           <p:nvPr/>
         </p:nvSpPr>
         <p:spPr>
           <a:xfrm>
-            <a:off x="8567928" y="4681727"/>
-            <a:ext cx="3566160" cy="320040"/>
+            <a:off x="8933688" y="4681727"/>
+            <a:ext cx="3200400" cy="320040"/>
           </a:xfrm>
           <a:prstGeom prst="rect">
             <a:avLst/>
@@ -15972,14 +13680,14 @@
       </p:sp>
       <p:sp>
         <p:nvSpPr>
-          <p:cNvPr id="37" name="TextBox 36"/>
+          <p:cNvPr id="18" name="TextBox 17"/>
           <p:cNvSpPr txBox="1"/>
           <p:nvPr/>
         </p:nvSpPr>
         <p:spPr>
           <a:xfrm>
-            <a:off x="8567928" y="5047488"/>
-            <a:ext cx="3566160" cy="502920"/>
+            <a:off x="8933688" y="5047488"/>
+            <a:ext cx="3200400" cy="502920"/>
           </a:xfrm>
           <a:prstGeom prst="rect">
             <a:avLst/>
@@ -16970,21 +14678,19 @@
         </p:nvSpPr>
         <p:spPr>
           <a:xfrm>
-            <a:off x="685800" y="2011680"/>
-            <a:ext cx="5120640" cy="4023360"/>
+            <a:off x="722376" y="2065083"/>
+            <a:ext cx="5486400" cy="3733673"/>
           </a:xfrm>
           <a:prstGeom prst="roundRect">
             <a:avLst>
-              <a:gd name="adj" fmla="val 8000"/>
+              <a:gd name="adj" fmla="val 2000"/>
             </a:avLst>
           </a:prstGeom>
           <a:solidFill>
-            <a:srgbClr val="E8F7EA"/>
+            <a:srgbClr val="E6EEE7"/>
           </a:solidFill>
-          <a:ln w="28575">
-            <a:solidFill>
-              <a:srgbClr val="4CAF50"/>
-            </a:solidFill>
+          <a:ln>
+            <a:noFill/>
           </a:ln>
           <a:effectLst/>
         </p:spPr>
@@ -17010,141 +14716,46 @@
           </a:p>
         </p:txBody>
       </p:sp>
-      <p:sp>
-        <p:nvSpPr>
-          <p:cNvPr id="6" name="TextBox 5"/>
-          <p:cNvSpPr txBox="1"/>
-          <p:nvPr/>
-        </p:nvSpPr>
-        <p:spPr>
-          <a:xfrm>
-            <a:off x="960120" y="2377440"/>
-            <a:ext cx="4572000" cy="502920"/>
-          </a:xfrm>
-          <a:prstGeom prst="rect">
-            <a:avLst/>
-          </a:prstGeom>
-          <a:noFill/>
-        </p:spPr>
-        <p:txBody>
-          <a:bodyPr wrap="square" lIns="0" rIns="0" tIns="0" bIns="0" anchor="t">
-            <a:spAutoFit/>
-          </a:bodyPr>
-          <a:lstStyle/>
-          <a:p>
-            <a:pPr algn="ctr">
-              <a:spcAft>
-                <a:spcPts val="500"/>
-              </a:spcAft>
-            </a:pPr>
-            <a:r>
-              <a:rPr sz="2600" b="1">
-                <a:solidFill>
-                  <a:srgbClr val="2A7A3B"/>
-                </a:solidFill>
-                <a:latin typeface="Calibri"/>
-              </a:rPr>
-              <a:t>ENTRÉE AUTORISÉE</a:t>
-            </a:r>
-          </a:p>
-        </p:txBody>
-      </p:sp>
-      <p:sp>
-        <p:nvSpPr>
-          <p:cNvPr id="7" name="TextBox 6"/>
-          <p:cNvSpPr txBox="1"/>
-          <p:nvPr/>
-        </p:nvSpPr>
-        <p:spPr>
-          <a:xfrm>
-            <a:off x="960120" y="3063240"/>
-            <a:ext cx="4572000" cy="411480"/>
-          </a:xfrm>
-          <a:prstGeom prst="rect">
-            <a:avLst/>
-          </a:prstGeom>
-          <a:noFill/>
-        </p:spPr>
-        <p:txBody>
-          <a:bodyPr wrap="square" lIns="0" rIns="0" tIns="0" bIns="0" anchor="t">
-            <a:spAutoFit/>
-          </a:bodyPr>
-          <a:lstStyle/>
-          <a:p>
-            <a:pPr algn="ctr">
-              <a:spcAft>
-                <a:spcPts val="500"/>
-              </a:spcAft>
-            </a:pPr>
-            <a:r>
-              <a:rPr sz="2100" b="1">
-                <a:solidFill>
-                  <a:srgbClr val="2D3A2E"/>
-                </a:solidFill>
-                <a:latin typeface="Calibri"/>
-              </a:rPr>
-              <a:t>Aminata Diallo</a:t>
-            </a:r>
-          </a:p>
-        </p:txBody>
-      </p:sp>
-      <p:sp>
-        <p:nvSpPr>
-          <p:cNvPr id="8" name="TextBox 7"/>
-          <p:cNvSpPr txBox="1"/>
-          <p:nvPr/>
-        </p:nvSpPr>
-        <p:spPr>
-          <a:xfrm>
-            <a:off x="960120" y="3547872"/>
-            <a:ext cx="4572000" cy="320040"/>
-          </a:xfrm>
-          <a:prstGeom prst="rect">
-            <a:avLst/>
-          </a:prstGeom>
-          <a:noFill/>
-        </p:spPr>
-        <p:txBody>
-          <a:bodyPr wrap="square" lIns="0" rIns="0" tIns="0" bIns="0" anchor="t">
-            <a:spAutoFit/>
-          </a:bodyPr>
-          <a:lstStyle/>
-          <a:p>
-            <a:pPr algn="ctr">
-              <a:spcAft>
-                <a:spcPts val="500"/>
-              </a:spcAft>
-            </a:pPr>
-            <a:r>
-              <a:rPr sz="1400" b="0">
-                <a:solidFill>
-                  <a:srgbClr val="7C8F7E"/>
-                </a:solidFill>
-                <a:latin typeface="Calibri"/>
-              </a:rPr>
-              <a:t>M-0001 · Mensuel 4 entrées</a:t>
-            </a:r>
-          </a:p>
-        </p:txBody>
-      </p:sp>
-      <p:sp>
-        <p:nvSpPr>
-          <p:cNvPr id="9" name="Rounded Rectangle 8"/>
+      <p:pic>
+        <p:nvPicPr>
+          <p:cNvPr id="6" name="Picture 5" descr="02_entree_autorisee.png"/>
+          <p:cNvPicPr>
+            <a:picLocks noChangeAspect="1"/>
+          </p:cNvPicPr>
+          <p:nvPr/>
+        </p:nvPicPr>
+        <p:blipFill>
+          <a:blip r:embed="rId2"/>
+          <a:stretch>
+            <a:fillRect/>
+          </a:stretch>
+        </p:blipFill>
+        <p:spPr>
+          <a:xfrm>
+            <a:off x="685800" y="2019363"/>
+            <a:ext cx="5486400" cy="3733673"/>
+          </a:xfrm>
+          <a:prstGeom prst="rect">
+            <a:avLst/>
+          </a:prstGeom>
+        </p:spPr>
+      </p:pic>
+      <p:sp>
+        <p:nvSpPr>
+          <p:cNvPr id="7" name="Oval 6"/>
           <p:cNvSpPr/>
           <p:nvPr/>
         </p:nvSpPr>
         <p:spPr>
           <a:xfrm>
-            <a:off x="1051560" y="4114800"/>
-            <a:ext cx="1417320" cy="1463040"/>
-          </a:xfrm>
-          <a:prstGeom prst="roundRect">
-            <a:avLst>
-              <a:gd name="adj" fmla="val 8000"/>
-            </a:avLst>
+            <a:off x="3236976" y="2805561"/>
+            <a:ext cx="384048" cy="384048"/>
+          </a:xfrm>
+          <a:prstGeom prst="ellipse">
+            <a:avLst/>
           </a:prstGeom>
           <a:solidFill>
-            <a:srgbClr val="FFFFFF"/>
+            <a:srgbClr val="F5C518"/>
           </a:solidFill>
           <a:ln>
             <a:noFill/>
@@ -17166,131 +14777,38 @@
           </a:fontRef>
         </p:style>
         <p:txBody>
-          <a:bodyPr rtlCol="0" anchor="ctr"/>
+          <a:bodyPr rtlCol="0" anchor="ctr" lIns="0" rIns="0" tIns="0" bIns="0"/>
           <a:lstStyle/>
           <a:p>
             <a:pPr algn="ctr"/>
-          </a:p>
-        </p:txBody>
-      </p:sp>
-      <p:sp>
-        <p:nvSpPr>
-          <p:cNvPr id="10" name="TextBox 9"/>
-          <p:cNvSpPr txBox="1"/>
-          <p:nvPr/>
-        </p:nvSpPr>
-        <p:spPr>
-          <a:xfrm>
-            <a:off x="1143000" y="4315968"/>
-            <a:ext cx="1234440" cy="457200"/>
-          </a:xfrm>
-          <a:prstGeom prst="rect">
-            <a:avLst/>
-          </a:prstGeom>
-          <a:noFill/>
-        </p:spPr>
-        <p:txBody>
-          <a:bodyPr wrap="square" lIns="0" rIns="0" tIns="0" bIns="0" anchor="t">
-            <a:spAutoFit/>
-          </a:bodyPr>
-          <a:lstStyle/>
-          <a:p>
-            <a:pPr algn="ctr">
-              <a:spcAft>
-                <a:spcPts val="500"/>
-              </a:spcAft>
-            </a:pPr>
-            <a:r>
-              <a:rPr sz="2300" b="1">
-                <a:solidFill>
-                  <a:srgbClr val="2A7A3B"/>
-                </a:solidFill>
-                <a:latin typeface="Calibri"/>
-              </a:rPr>
-              <a:t>3</a:t>
-            </a:r>
-          </a:p>
-        </p:txBody>
-      </p:sp>
-      <p:sp>
-        <p:nvSpPr>
-          <p:cNvPr id="11" name="TextBox 10"/>
-          <p:cNvSpPr txBox="1"/>
-          <p:nvPr/>
-        </p:nvSpPr>
-        <p:spPr>
-          <a:xfrm>
-            <a:off x="1143000" y="4892040"/>
-            <a:ext cx="1234440" cy="594360"/>
-          </a:xfrm>
-          <a:prstGeom prst="rect">
-            <a:avLst/>
-          </a:prstGeom>
-          <a:noFill/>
-        </p:spPr>
-        <p:txBody>
-          <a:bodyPr wrap="square" lIns="0" rIns="0" tIns="0" bIns="0" anchor="t">
-            <a:spAutoFit/>
-          </a:bodyPr>
-          <a:lstStyle/>
-          <a:p>
-            <a:pPr algn="ctr">
-              <a:lnSpc>
-                <a:spcPct val="110000"/>
-              </a:lnSpc>
-              <a:spcAft>
-                <a:spcPts val="0"/>
-              </a:spcAft>
-            </a:pPr>
-            <a:r>
-              <a:rPr sz="950" b="1">
-                <a:solidFill>
-                  <a:srgbClr val="7C8F7E"/>
-                </a:solidFill>
-                <a:latin typeface="Calibri"/>
-              </a:rPr>
-              <a:t>ENTRÉES</a:t>
-            </a:r>
-          </a:p>
-          <a:p>
-            <a:pPr algn="ctr">
-              <a:lnSpc>
-                <a:spcPct val="110000"/>
-              </a:lnSpc>
-              <a:spcAft>
-                <a:spcPts val="0"/>
-              </a:spcAft>
-            </a:pPr>
-            <a:r>
-              <a:rPr sz="950" b="1">
-                <a:solidFill>
-                  <a:srgbClr val="7C8F7E"/>
-                </a:solidFill>
-                <a:latin typeface="Calibri"/>
-              </a:rPr>
-              <a:t>RESTANTES</a:t>
-            </a:r>
-          </a:p>
-        </p:txBody>
-      </p:sp>
-      <p:sp>
-        <p:nvSpPr>
-          <p:cNvPr id="12" name="Rounded Rectangle 11"/>
+            <a:r>
+              <a:rPr sz="1400" b="1">
+                <a:solidFill>
+                  <a:srgbClr val="2D3A2E"/>
+                </a:solidFill>
+                <a:latin typeface="Calibri"/>
+              </a:rPr>
+              <a:t>1</a:t>
+            </a:r>
+          </a:p>
+        </p:txBody>
+      </p:sp>
+      <p:sp>
+        <p:nvSpPr>
+          <p:cNvPr id="8" name="Oval 7"/>
           <p:cNvSpPr/>
           <p:nvPr/>
         </p:nvSpPr>
         <p:spPr>
           <a:xfrm>
-            <a:off x="2606039" y="4114800"/>
-            <a:ext cx="1417320" cy="1463040"/>
-          </a:xfrm>
-          <a:prstGeom prst="roundRect">
-            <a:avLst>
-              <a:gd name="adj" fmla="val 8000"/>
-            </a:avLst>
+            <a:off x="4882896" y="3078119"/>
+            <a:ext cx="384048" cy="384048"/>
+          </a:xfrm>
+          <a:prstGeom prst="ellipse">
+            <a:avLst/>
           </a:prstGeom>
           <a:solidFill>
-            <a:srgbClr val="FFFFFF"/>
+            <a:srgbClr val="F5C518"/>
           </a:solidFill>
           <a:ln>
             <a:noFill/>
@@ -17312,112 +14830,38 @@
           </a:fontRef>
         </p:style>
         <p:txBody>
-          <a:bodyPr rtlCol="0" anchor="ctr"/>
+          <a:bodyPr rtlCol="0" anchor="ctr" lIns="0" rIns="0" tIns="0" bIns="0"/>
           <a:lstStyle/>
           <a:p>
             <a:pPr algn="ctr"/>
-          </a:p>
-        </p:txBody>
-      </p:sp>
-      <p:sp>
-        <p:nvSpPr>
-          <p:cNvPr id="13" name="TextBox 12"/>
-          <p:cNvSpPr txBox="1"/>
-          <p:nvPr/>
-        </p:nvSpPr>
-        <p:spPr>
-          <a:xfrm>
-            <a:off x="2697479" y="4315968"/>
-            <a:ext cx="1234440" cy="457200"/>
-          </a:xfrm>
-          <a:prstGeom prst="rect">
-            <a:avLst/>
-          </a:prstGeom>
-          <a:noFill/>
-        </p:spPr>
-        <p:txBody>
-          <a:bodyPr wrap="square" lIns="0" rIns="0" tIns="0" bIns="0" anchor="t">
-            <a:spAutoFit/>
-          </a:bodyPr>
-          <a:lstStyle/>
-          <a:p>
-            <a:pPr algn="ctr">
-              <a:spcAft>
-                <a:spcPts val="500"/>
-              </a:spcAft>
-            </a:pPr>
-            <a:r>
-              <a:rPr sz="2300" b="1">
-                <a:solidFill>
-                  <a:srgbClr val="2A7A3B"/>
-                </a:solidFill>
-                <a:latin typeface="Calibri"/>
-              </a:rPr>
-              <a:t>23/09</a:t>
-            </a:r>
-          </a:p>
-        </p:txBody>
-      </p:sp>
-      <p:sp>
-        <p:nvSpPr>
-          <p:cNvPr id="14" name="TextBox 13"/>
-          <p:cNvSpPr txBox="1"/>
-          <p:nvPr/>
-        </p:nvSpPr>
-        <p:spPr>
-          <a:xfrm>
-            <a:off x="2697479" y="4892040"/>
-            <a:ext cx="1234440" cy="594360"/>
-          </a:xfrm>
-          <a:prstGeom prst="rect">
-            <a:avLst/>
-          </a:prstGeom>
-          <a:noFill/>
-        </p:spPr>
-        <p:txBody>
-          <a:bodyPr wrap="square" lIns="0" rIns="0" tIns="0" bIns="0" anchor="t">
-            <a:spAutoFit/>
-          </a:bodyPr>
-          <a:lstStyle/>
-          <a:p>
-            <a:pPr algn="ctr">
-              <a:lnSpc>
-                <a:spcPct val="110000"/>
-              </a:lnSpc>
-              <a:spcAft>
-                <a:spcPts val="0"/>
-              </a:spcAft>
-            </a:pPr>
-            <a:r>
-              <a:rPr sz="950" b="1">
-                <a:solidFill>
-                  <a:srgbClr val="7C8F7E"/>
-                </a:solidFill>
-                <a:latin typeface="Calibri"/>
-              </a:rPr>
-              <a:t>EXPIRE LE</a:t>
-            </a:r>
-          </a:p>
-        </p:txBody>
-      </p:sp>
-      <p:sp>
-        <p:nvSpPr>
-          <p:cNvPr id="15" name="Rounded Rectangle 14"/>
+            <a:r>
+              <a:rPr sz="1400" b="1">
+                <a:solidFill>
+                  <a:srgbClr val="2D3A2E"/>
+                </a:solidFill>
+                <a:latin typeface="Calibri"/>
+              </a:rPr>
+              <a:t>2</a:t>
+            </a:r>
+          </a:p>
+        </p:txBody>
+      </p:sp>
+      <p:sp>
+        <p:nvSpPr>
+          <p:cNvPr id="9" name="Oval 8"/>
           <p:cNvSpPr/>
           <p:nvPr/>
         </p:nvSpPr>
         <p:spPr>
           <a:xfrm>
-            <a:off x="4160520" y="4114800"/>
-            <a:ext cx="1417320" cy="1463040"/>
-          </a:xfrm>
-          <a:prstGeom prst="roundRect">
-            <a:avLst>
-              <a:gd name="adj" fmla="val 8000"/>
-            </a:avLst>
+            <a:off x="2534716" y="3533628"/>
+            <a:ext cx="384048" cy="384048"/>
+          </a:xfrm>
+          <a:prstGeom prst="ellipse">
+            <a:avLst/>
           </a:prstGeom>
           <a:solidFill>
-            <a:srgbClr val="FFFFFF"/>
+            <a:srgbClr val="F5C518"/>
           </a:solidFill>
           <a:ln>
             <a:noFill/>
@@ -17439,129 +14883,38 @@
           </a:fontRef>
         </p:style>
         <p:txBody>
-          <a:bodyPr rtlCol="0" anchor="ctr"/>
+          <a:bodyPr rtlCol="0" anchor="ctr" lIns="0" rIns="0" tIns="0" bIns="0"/>
           <a:lstStyle/>
           <a:p>
             <a:pPr algn="ctr"/>
-          </a:p>
-        </p:txBody>
-      </p:sp>
-      <p:sp>
-        <p:nvSpPr>
-          <p:cNvPr id="16" name="TextBox 15"/>
-          <p:cNvSpPr txBox="1"/>
-          <p:nvPr/>
-        </p:nvSpPr>
-        <p:spPr>
-          <a:xfrm>
-            <a:off x="4251959" y="4315968"/>
-            <a:ext cx="1234440" cy="457200"/>
-          </a:xfrm>
-          <a:prstGeom prst="rect">
-            <a:avLst/>
-          </a:prstGeom>
-          <a:noFill/>
-        </p:spPr>
-        <p:txBody>
-          <a:bodyPr wrap="square" lIns="0" rIns="0" tIns="0" bIns="0" anchor="t">
-            <a:spAutoFit/>
-          </a:bodyPr>
-          <a:lstStyle/>
-          <a:p>
-            <a:pPr algn="ctr">
-              <a:spcAft>
-                <a:spcPts val="500"/>
-              </a:spcAft>
-            </a:pPr>
-            <a:r>
-              <a:rPr sz="2300" b="1">
-                <a:solidFill>
-                  <a:srgbClr val="2A7A3B"/>
-                </a:solidFill>
-                <a:latin typeface="Calibri"/>
-              </a:rPr>
-              <a:t>7</a:t>
-            </a:r>
-          </a:p>
-        </p:txBody>
-      </p:sp>
-      <p:sp>
-        <p:nvSpPr>
-          <p:cNvPr id="17" name="TextBox 16"/>
-          <p:cNvSpPr txBox="1"/>
-          <p:nvPr/>
-        </p:nvSpPr>
-        <p:spPr>
-          <a:xfrm>
-            <a:off x="4251959" y="4892040"/>
-            <a:ext cx="1234440" cy="594360"/>
-          </a:xfrm>
-          <a:prstGeom prst="rect">
-            <a:avLst/>
-          </a:prstGeom>
-          <a:noFill/>
-        </p:spPr>
-        <p:txBody>
-          <a:bodyPr wrap="square" lIns="0" rIns="0" tIns="0" bIns="0" anchor="t">
-            <a:spAutoFit/>
-          </a:bodyPr>
-          <a:lstStyle/>
-          <a:p>
-            <a:pPr algn="ctr">
-              <a:lnSpc>
-                <a:spcPct val="110000"/>
-              </a:lnSpc>
-              <a:spcAft>
-                <a:spcPts val="0"/>
-              </a:spcAft>
-            </a:pPr>
-            <a:r>
-              <a:rPr sz="950" b="1">
-                <a:solidFill>
-                  <a:srgbClr val="7C8F7E"/>
-                </a:solidFill>
-                <a:latin typeface="Calibri"/>
-              </a:rPr>
-              <a:t>AVANT VISITE</a:t>
-            </a:r>
-          </a:p>
-          <a:p>
-            <a:pPr algn="ctr">
-              <a:lnSpc>
-                <a:spcPct val="110000"/>
-              </a:lnSpc>
-              <a:spcAft>
-                <a:spcPts val="0"/>
-              </a:spcAft>
-            </a:pPr>
-            <a:r>
-              <a:rPr sz="950" b="1">
-                <a:solidFill>
-                  <a:srgbClr val="7C8F7E"/>
-                </a:solidFill>
-                <a:latin typeface="Calibri"/>
-              </a:rPr>
-              <a:t>OFFERTE</a:t>
-            </a:r>
-          </a:p>
-        </p:txBody>
-      </p:sp>
-      <p:sp>
-        <p:nvSpPr>
-          <p:cNvPr id="18" name="Oval 17"/>
+            <a:r>
+              <a:rPr sz="1400" b="1">
+                <a:solidFill>
+                  <a:srgbClr val="2D3A2E"/>
+                </a:solidFill>
+                <a:latin typeface="Calibri"/>
+              </a:rPr>
+              <a:t>3</a:t>
+            </a:r>
+          </a:p>
+        </p:txBody>
+      </p:sp>
+      <p:sp>
+        <p:nvSpPr>
+          <p:cNvPr id="10" name="Oval 9"/>
           <p:cNvSpPr/>
           <p:nvPr/>
         </p:nvSpPr>
         <p:spPr>
           <a:xfrm>
-            <a:off x="6217920" y="2103120"/>
-            <a:ext cx="347472" cy="347472"/>
+            <a:off x="4240987" y="3533628"/>
+            <a:ext cx="384048" cy="384048"/>
           </a:xfrm>
           <a:prstGeom prst="ellipse">
             <a:avLst/>
           </a:prstGeom>
           <a:solidFill>
-            <a:srgbClr val="4CAF50"/>
+            <a:srgbClr val="F5C518"/>
           </a:solidFill>
           <a:ln>
             <a:noFill/>
@@ -17588,27 +14941,80 @@
           <a:p>
             <a:pPr algn="ctr"/>
             <a:r>
-              <a:rPr sz="1700" b="1">
-                <a:solidFill>
-                  <a:srgbClr val="FFFFFF"/>
-                </a:solidFill>
-                <a:latin typeface="Calibri"/>
-              </a:rPr>
-              <a:t>•</a:t>
-            </a:r>
-          </a:p>
-        </p:txBody>
-      </p:sp>
-      <p:sp>
-        <p:nvSpPr>
-          <p:cNvPr id="19" name="TextBox 18"/>
+              <a:rPr sz="1400" b="1">
+                <a:solidFill>
+                  <a:srgbClr val="2D3A2E"/>
+                </a:solidFill>
+                <a:latin typeface="Calibri"/>
+              </a:rPr>
+              <a:t>4</a:t>
+            </a:r>
+          </a:p>
+        </p:txBody>
+      </p:sp>
+      <p:sp>
+        <p:nvSpPr>
+          <p:cNvPr id="11" name="Oval 10"/>
+          <p:cNvSpPr/>
+          <p:nvPr/>
+        </p:nvSpPr>
+        <p:spPr>
+          <a:xfrm>
+            <a:off x="6446520" y="2103120"/>
+            <a:ext cx="384048" cy="384048"/>
+          </a:xfrm>
+          <a:prstGeom prst="ellipse">
+            <a:avLst/>
+          </a:prstGeom>
+          <a:solidFill>
+            <a:srgbClr val="F5C518"/>
+          </a:solidFill>
+          <a:ln>
+            <a:noFill/>
+          </a:ln>
+          <a:effectLst/>
+        </p:spPr>
+        <p:style>
+          <a:lnRef idx="1">
+            <a:schemeClr val="accent1"/>
+          </a:lnRef>
+          <a:fillRef idx="3">
+            <a:schemeClr val="accent1"/>
+          </a:fillRef>
+          <a:effectRef idx="2">
+            <a:schemeClr val="accent1"/>
+          </a:effectRef>
+          <a:fontRef idx="minor">
+            <a:schemeClr val="lt1"/>
+          </a:fontRef>
+        </p:style>
+        <p:txBody>
+          <a:bodyPr rtlCol="0" anchor="ctr" lIns="0" rIns="0" tIns="0" bIns="0"/>
+          <a:lstStyle/>
+          <a:p>
+            <a:pPr algn="ctr"/>
+            <a:r>
+              <a:rPr sz="1400" b="1">
+                <a:solidFill>
+                  <a:srgbClr val="2D3A2E"/>
+                </a:solidFill>
+                <a:latin typeface="Calibri"/>
+              </a:rPr>
+              <a:t>1</a:t>
+            </a:r>
+          </a:p>
+        </p:txBody>
+      </p:sp>
+      <p:sp>
+        <p:nvSpPr>
+          <p:cNvPr id="12" name="TextBox 11"/>
           <p:cNvSpPr txBox="1"/>
           <p:nvPr/>
         </p:nvSpPr>
         <p:spPr>
           <a:xfrm>
-            <a:off x="6766560" y="2084831"/>
-            <a:ext cx="4709160" cy="329184"/>
+            <a:off x="6995160" y="2084831"/>
+            <a:ext cx="4480560" cy="329184"/>
           </a:xfrm>
           <a:prstGeom prst="rect">
             <a:avLst/>
@@ -17627,7 +15033,7 @@
               </a:spcAft>
             </a:pPr>
             <a:r>
-              <a:rPr sz="1650" b="1">
+              <a:rPr sz="1600" b="1">
                 <a:solidFill>
                   <a:srgbClr val="2D3A2E"/>
                 </a:solidFill>
@@ -17640,14 +15046,14 @@
       </p:sp>
       <p:sp>
         <p:nvSpPr>
-          <p:cNvPr id="20" name="TextBox 19"/>
+          <p:cNvPr id="13" name="TextBox 12"/>
           <p:cNvSpPr txBox="1"/>
           <p:nvPr/>
         </p:nvSpPr>
         <p:spPr>
           <a:xfrm>
-            <a:off x="6766560" y="2468879"/>
-            <a:ext cx="4709160" cy="457200"/>
+            <a:off x="6995160" y="2468879"/>
+            <a:ext cx="4480560" cy="457200"/>
           </a:xfrm>
           <a:prstGeom prst="rect">
             <a:avLst/>
@@ -17669,7 +15075,7 @@
               </a:spcAft>
             </a:pPr>
             <a:r>
-              <a:rPr sz="1350" b="0">
+              <a:rPr sz="1300" b="0">
                 <a:solidFill>
                   <a:srgbClr val="7C8F7E"/>
                 </a:solidFill>
@@ -17682,20 +15088,20 @@
       </p:sp>
       <p:sp>
         <p:nvSpPr>
-          <p:cNvPr id="21" name="Oval 20"/>
+          <p:cNvPr id="14" name="Oval 13"/>
           <p:cNvSpPr/>
           <p:nvPr/>
         </p:nvSpPr>
         <p:spPr>
           <a:xfrm>
-            <a:off x="6217920" y="3063239"/>
-            <a:ext cx="347472" cy="347472"/>
+            <a:off x="6446520" y="3063239"/>
+            <a:ext cx="384048" cy="384048"/>
           </a:xfrm>
           <a:prstGeom prst="ellipse">
             <a:avLst/>
           </a:prstGeom>
           <a:solidFill>
-            <a:srgbClr val="4CAF50"/>
+            <a:srgbClr val="F5C518"/>
           </a:solidFill>
           <a:ln>
             <a:noFill/>
@@ -17722,27 +15128,27 @@
           <a:p>
             <a:pPr algn="ctr"/>
             <a:r>
-              <a:rPr sz="1700" b="1">
-                <a:solidFill>
-                  <a:srgbClr val="FFFFFF"/>
-                </a:solidFill>
-                <a:latin typeface="Calibri"/>
-              </a:rPr>
-              <a:t>•</a:t>
-            </a:r>
-          </a:p>
-        </p:txBody>
-      </p:sp>
-      <p:sp>
-        <p:nvSpPr>
-          <p:cNvPr id="22" name="TextBox 21"/>
+              <a:rPr sz="1400" b="1">
+                <a:solidFill>
+                  <a:srgbClr val="2D3A2E"/>
+                </a:solidFill>
+                <a:latin typeface="Calibri"/>
+              </a:rPr>
+              <a:t>2</a:t>
+            </a:r>
+          </a:p>
+        </p:txBody>
+      </p:sp>
+      <p:sp>
+        <p:nvSpPr>
+          <p:cNvPr id="15" name="TextBox 14"/>
           <p:cNvSpPr txBox="1"/>
           <p:nvPr/>
         </p:nvSpPr>
         <p:spPr>
           <a:xfrm>
-            <a:off x="6766560" y="3044951"/>
-            <a:ext cx="4709160" cy="329184"/>
+            <a:off x="6995160" y="3044951"/>
+            <a:ext cx="4480560" cy="329184"/>
           </a:xfrm>
           <a:prstGeom prst="rect">
             <a:avLst/>
@@ -17761,7 +15167,7 @@
               </a:spcAft>
             </a:pPr>
             <a:r>
-              <a:rPr sz="1650" b="1">
+              <a:rPr sz="1600" b="1">
                 <a:solidFill>
                   <a:srgbClr val="2D3A2E"/>
                 </a:solidFill>
@@ -17774,14 +15180,14 @@
       </p:sp>
       <p:sp>
         <p:nvSpPr>
-          <p:cNvPr id="23" name="TextBox 22"/>
+          <p:cNvPr id="16" name="TextBox 15"/>
           <p:cNvSpPr txBox="1"/>
           <p:nvPr/>
         </p:nvSpPr>
         <p:spPr>
           <a:xfrm>
-            <a:off x="6766560" y="3428999"/>
-            <a:ext cx="4709160" cy="457200"/>
+            <a:off x="6995160" y="3428999"/>
+            <a:ext cx="4480560" cy="457200"/>
           </a:xfrm>
           <a:prstGeom prst="rect">
             <a:avLst/>
@@ -17803,7 +15209,7 @@
               </a:spcAft>
             </a:pPr>
             <a:r>
-              <a:rPr sz="1350" b="0">
+              <a:rPr sz="1300" b="0">
                 <a:solidFill>
                   <a:srgbClr val="7C8F7E"/>
                 </a:solidFill>
@@ -17816,20 +15222,20 @@
       </p:sp>
       <p:sp>
         <p:nvSpPr>
-          <p:cNvPr id="24" name="Oval 23"/>
+          <p:cNvPr id="17" name="Oval 16"/>
           <p:cNvSpPr/>
           <p:nvPr/>
         </p:nvSpPr>
         <p:spPr>
           <a:xfrm>
-            <a:off x="6217920" y="4023359"/>
-            <a:ext cx="347472" cy="347472"/>
+            <a:off x="6446520" y="4023359"/>
+            <a:ext cx="384048" cy="384048"/>
           </a:xfrm>
           <a:prstGeom prst="ellipse">
             <a:avLst/>
           </a:prstGeom>
           <a:solidFill>
-            <a:srgbClr val="4CAF50"/>
+            <a:srgbClr val="F5C518"/>
           </a:solidFill>
           <a:ln>
             <a:noFill/>
@@ -17856,27 +15262,27 @@
           <a:p>
             <a:pPr algn="ctr"/>
             <a:r>
-              <a:rPr sz="1700" b="1">
-                <a:solidFill>
-                  <a:srgbClr val="FFFFFF"/>
-                </a:solidFill>
-                <a:latin typeface="Calibri"/>
-              </a:rPr>
-              <a:t>•</a:t>
-            </a:r>
-          </a:p>
-        </p:txBody>
-      </p:sp>
-      <p:sp>
-        <p:nvSpPr>
-          <p:cNvPr id="25" name="TextBox 24"/>
+              <a:rPr sz="1400" b="1">
+                <a:solidFill>
+                  <a:srgbClr val="2D3A2E"/>
+                </a:solidFill>
+                <a:latin typeface="Calibri"/>
+              </a:rPr>
+              <a:t>3</a:t>
+            </a:r>
+          </a:p>
+        </p:txBody>
+      </p:sp>
+      <p:sp>
+        <p:nvSpPr>
+          <p:cNvPr id="18" name="TextBox 17"/>
           <p:cNvSpPr txBox="1"/>
           <p:nvPr/>
         </p:nvSpPr>
         <p:spPr>
           <a:xfrm>
-            <a:off x="6766560" y="4005072"/>
-            <a:ext cx="4709160" cy="329184"/>
+            <a:off x="6995160" y="4005072"/>
+            <a:ext cx="4480560" cy="329184"/>
           </a:xfrm>
           <a:prstGeom prst="rect">
             <a:avLst/>
@@ -17895,7 +15301,7 @@
               </a:spcAft>
             </a:pPr>
             <a:r>
-              <a:rPr sz="1650" b="1">
+              <a:rPr sz="1600" b="1">
                 <a:solidFill>
                   <a:srgbClr val="2D3A2E"/>
                 </a:solidFill>
@@ -17908,14 +15314,14 @@
       </p:sp>
       <p:sp>
         <p:nvSpPr>
-          <p:cNvPr id="26" name="TextBox 25"/>
+          <p:cNvPr id="19" name="TextBox 18"/>
           <p:cNvSpPr txBox="1"/>
           <p:nvPr/>
         </p:nvSpPr>
         <p:spPr>
           <a:xfrm>
-            <a:off x="6766560" y="4389120"/>
-            <a:ext cx="4709160" cy="457200"/>
+            <a:off x="6995160" y="4389120"/>
+            <a:ext cx="4480560" cy="457200"/>
           </a:xfrm>
           <a:prstGeom prst="rect">
             <a:avLst/>
@@ -17937,7 +15343,7 @@
               </a:spcAft>
             </a:pPr>
             <a:r>
-              <a:rPr sz="1350" b="0">
+              <a:rPr sz="1300" b="0">
                 <a:solidFill>
                   <a:srgbClr val="7C8F7E"/>
                 </a:solidFill>
@@ -17950,20 +15356,20 @@
       </p:sp>
       <p:sp>
         <p:nvSpPr>
-          <p:cNvPr id="27" name="Oval 26"/>
+          <p:cNvPr id="20" name="Oval 19"/>
           <p:cNvSpPr/>
           <p:nvPr/>
         </p:nvSpPr>
         <p:spPr>
           <a:xfrm>
-            <a:off x="6217920" y="4983479"/>
-            <a:ext cx="347472" cy="347472"/>
+            <a:off x="6446520" y="4983479"/>
+            <a:ext cx="384048" cy="384048"/>
           </a:xfrm>
           <a:prstGeom prst="ellipse">
             <a:avLst/>
           </a:prstGeom>
           <a:solidFill>
-            <a:srgbClr val="4CAF50"/>
+            <a:srgbClr val="F5C518"/>
           </a:solidFill>
           <a:ln>
             <a:noFill/>
@@ -17990,27 +15396,27 @@
           <a:p>
             <a:pPr algn="ctr"/>
             <a:r>
-              <a:rPr sz="1700" b="1">
-                <a:solidFill>
-                  <a:srgbClr val="FFFFFF"/>
-                </a:solidFill>
-                <a:latin typeface="Calibri"/>
-              </a:rPr>
-              <a:t>•</a:t>
-            </a:r>
-          </a:p>
-        </p:txBody>
-      </p:sp>
-      <p:sp>
-        <p:nvSpPr>
-          <p:cNvPr id="28" name="TextBox 27"/>
+              <a:rPr sz="1400" b="1">
+                <a:solidFill>
+                  <a:srgbClr val="2D3A2E"/>
+                </a:solidFill>
+                <a:latin typeface="Calibri"/>
+              </a:rPr>
+              <a:t>4</a:t>
+            </a:r>
+          </a:p>
+        </p:txBody>
+      </p:sp>
+      <p:sp>
+        <p:nvSpPr>
+          <p:cNvPr id="21" name="TextBox 20"/>
           <p:cNvSpPr txBox="1"/>
           <p:nvPr/>
         </p:nvSpPr>
         <p:spPr>
           <a:xfrm>
-            <a:off x="6766560" y="4965192"/>
-            <a:ext cx="4709160" cy="329184"/>
+            <a:off x="6995160" y="4965192"/>
+            <a:ext cx="4480560" cy="329184"/>
           </a:xfrm>
           <a:prstGeom prst="rect">
             <a:avLst/>
@@ -18029,7 +15435,7 @@
               </a:spcAft>
             </a:pPr>
             <a:r>
-              <a:rPr sz="1650" b="1">
+              <a:rPr sz="1600" b="1">
                 <a:solidFill>
                   <a:srgbClr val="2D3A2E"/>
                 </a:solidFill>
@@ -18042,14 +15448,14 @@
       </p:sp>
       <p:sp>
         <p:nvSpPr>
-          <p:cNvPr id="29" name="TextBox 28"/>
+          <p:cNvPr id="22" name="TextBox 21"/>
           <p:cNvSpPr txBox="1"/>
           <p:nvPr/>
         </p:nvSpPr>
         <p:spPr>
           <a:xfrm>
-            <a:off x="6766560" y="5349240"/>
-            <a:ext cx="4709160" cy="457200"/>
+            <a:off x="6995160" y="5349240"/>
+            <a:ext cx="4480560" cy="457200"/>
           </a:xfrm>
           <a:prstGeom prst="rect">
             <a:avLst/>
@@ -18071,7 +15477,7 @@
               </a:spcAft>
             </a:pPr>
             <a:r>
-              <a:rPr sz="1350" b="0">
+              <a:rPr sz="1300" b="0">
                 <a:solidFill>
                   <a:srgbClr val="7C8F7E"/>
                 </a:solidFill>
@@ -18084,14 +15490,14 @@
       </p:sp>
       <p:sp>
         <p:nvSpPr>
-          <p:cNvPr id="30" name="Rounded Rectangle 29"/>
+          <p:cNvPr id="23" name="Rounded Rectangle 22"/>
           <p:cNvSpPr/>
           <p:nvPr/>
         </p:nvSpPr>
         <p:spPr>
           <a:xfrm>
-            <a:off x="6217920" y="5486400"/>
-            <a:ext cx="5257800" cy="658368"/>
+            <a:off x="6446520" y="5486400"/>
+            <a:ext cx="5029200" cy="658368"/>
           </a:xfrm>
           <a:prstGeom prst="roundRect">
             <a:avLst>
@@ -18130,14 +15536,14 @@
       </p:sp>
       <p:sp>
         <p:nvSpPr>
-          <p:cNvPr id="31" name="TextBox 30"/>
+          <p:cNvPr id="24" name="TextBox 23"/>
           <p:cNvSpPr txBox="1"/>
           <p:nvPr/>
         </p:nvSpPr>
         <p:spPr>
           <a:xfrm>
-            <a:off x="6446520" y="5687568"/>
-            <a:ext cx="4846320" cy="365760"/>
+            <a:off x="6675120" y="5687568"/>
+            <a:ext cx="4572000" cy="365760"/>
           </a:xfrm>
           <a:prstGeom prst="rect">
             <a:avLst/>
@@ -18162,7 +15568,7 @@
                 </a:solidFill>
                 <a:latin typeface="Calibri"/>
               </a:rPr>
-              <a:t>« Déjà passé 2 fois aujourd'hui » : vérifiez que ce n'est pas une erreur</a:t>
+              <a:t>« Déjà passé 2 fois » : vérifiez que ce n'est pas une erreur</a:t>
             </a:r>
           </a:p>
         </p:txBody>
@@ -18309,7 +15715,77 @@
       </p:sp>
       <p:sp>
         <p:nvSpPr>
-          <p:cNvPr id="5" name="TextBox 4"/>
+          <p:cNvPr id="5" name="Rounded Rectangle 4"/>
+          <p:cNvSpPr/>
+          <p:nvPr/>
+        </p:nvSpPr>
+        <p:spPr>
+          <a:xfrm>
+            <a:off x="7900415" y="1872542"/>
+            <a:ext cx="3657600" cy="1284115"/>
+          </a:xfrm>
+          <a:prstGeom prst="roundRect">
+            <a:avLst>
+              <a:gd name="adj" fmla="val 2000"/>
+            </a:avLst>
+          </a:prstGeom>
+          <a:solidFill>
+            <a:srgbClr val="E6EEE7"/>
+          </a:solidFill>
+          <a:ln>
+            <a:noFill/>
+          </a:ln>
+          <a:effectLst/>
+        </p:spPr>
+        <p:style>
+          <a:lnRef idx="1">
+            <a:schemeClr val="accent1"/>
+          </a:lnRef>
+          <a:fillRef idx="3">
+            <a:schemeClr val="accent1"/>
+          </a:fillRef>
+          <a:effectRef idx="2">
+            <a:schemeClr val="accent1"/>
+          </a:effectRef>
+          <a:fontRef idx="minor">
+            <a:schemeClr val="lt1"/>
+          </a:fontRef>
+        </p:style>
+        <p:txBody>
+          <a:bodyPr rtlCol="0" anchor="ctr"/>
+          <a:lstStyle/>
+          <a:p>
+            <a:pPr algn="ctr"/>
+          </a:p>
+        </p:txBody>
+      </p:sp>
+      <p:pic>
+        <p:nvPicPr>
+          <p:cNvPr id="6" name="Picture 5" descr="03_entree_refusee.png"/>
+          <p:cNvPicPr>
+            <a:picLocks noChangeAspect="1"/>
+          </p:cNvPicPr>
+          <p:nvPr/>
+        </p:nvPicPr>
+        <p:blipFill>
+          <a:blip r:embed="rId2"/>
+          <a:stretch>
+            <a:fillRect/>
+          </a:stretch>
+        </p:blipFill>
+        <p:spPr>
+          <a:xfrm>
+            <a:off x="7863840" y="1826822"/>
+            <a:ext cx="3657600" cy="1284115"/>
+          </a:xfrm>
+          <a:prstGeom prst="rect">
+            <a:avLst/>
+          </a:prstGeom>
+        </p:spPr>
+      </p:pic>
+      <p:sp>
+        <p:nvSpPr>
+          <p:cNvPr id="7" name="TextBox 6"/>
           <p:cNvSpPr txBox="1"/>
           <p:nvPr/>
         </p:nvSpPr>
@@ -18348,13 +15824,13 @@
       </p:sp>
       <p:sp>
         <p:nvSpPr>
-          <p:cNvPr id="6" name="TextBox 5"/>
+          <p:cNvPr id="8" name="TextBox 7"/>
           <p:cNvSpPr txBox="1"/>
           <p:nvPr/>
         </p:nvSpPr>
         <p:spPr>
           <a:xfrm>
-            <a:off x="4572000" y="2011680"/>
+            <a:off x="4206240" y="2011680"/>
             <a:ext cx="3017520" cy="274320"/>
           </a:xfrm>
           <a:prstGeom prst="rect">
@@ -18387,13 +15863,13 @@
       </p:sp>
       <p:sp>
         <p:nvSpPr>
-          <p:cNvPr id="7" name="TextBox 6"/>
+          <p:cNvPr id="9" name="TextBox 8"/>
           <p:cNvSpPr txBox="1"/>
           <p:nvPr/>
         </p:nvSpPr>
         <p:spPr>
           <a:xfrm>
-            <a:off x="7863840" y="2011680"/>
+            <a:off x="7863840" y="3310128"/>
             <a:ext cx="3566160" cy="274320"/>
           </a:xfrm>
           <a:prstGeom prst="rect">
@@ -18426,14 +15902,14 @@
       </p:sp>
       <p:sp>
         <p:nvSpPr>
-          <p:cNvPr id="8" name="Rounded Rectangle 7"/>
+          <p:cNvPr id="10" name="Rounded Rectangle 9"/>
           <p:cNvSpPr/>
           <p:nvPr/>
         </p:nvSpPr>
         <p:spPr>
           <a:xfrm>
             <a:off x="685800" y="2450592"/>
-            <a:ext cx="10789920" cy="676656"/>
+            <a:ext cx="6949440" cy="676656"/>
           </a:xfrm>
           <a:prstGeom prst="roundRect">
             <a:avLst>
@@ -18472,14 +15948,14 @@
       </p:sp>
       <p:sp>
         <p:nvSpPr>
-          <p:cNvPr id="9" name="TextBox 8"/>
+          <p:cNvPr id="11" name="TextBox 10"/>
           <p:cNvSpPr txBox="1"/>
           <p:nvPr/>
         </p:nvSpPr>
         <p:spPr>
           <a:xfrm>
             <a:off x="822960" y="2651760"/>
-            <a:ext cx="3611880" cy="365760"/>
+            <a:ext cx="3246120" cy="365760"/>
           </a:xfrm>
           <a:prstGeom prst="rect">
             <a:avLst/>
@@ -18498,7 +15974,7 @@
               </a:spcAft>
             </a:pPr>
             <a:r>
-              <a:rPr sz="1350" b="1">
+              <a:rPr sz="1300" b="1">
                 <a:solidFill>
                   <a:srgbClr val="D9463E"/>
                 </a:solidFill>
@@ -18511,14 +15987,14 @@
       </p:sp>
       <p:sp>
         <p:nvSpPr>
-          <p:cNvPr id="10" name="TextBox 9"/>
+          <p:cNvPr id="12" name="TextBox 11"/>
           <p:cNvSpPr txBox="1"/>
           <p:nvPr/>
         </p:nvSpPr>
         <p:spPr>
           <a:xfrm>
-            <a:off x="4572000" y="2651760"/>
-            <a:ext cx="3154680" cy="365760"/>
+            <a:off x="4206240" y="2651760"/>
+            <a:ext cx="2743200" cy="365760"/>
           </a:xfrm>
           <a:prstGeom prst="rect">
             <a:avLst/>
@@ -18537,7 +16013,7 @@
               </a:spcAft>
             </a:pPr>
             <a:r>
-              <a:rPr sz="1300" b="0">
+              <a:rPr sz="1250" b="0">
                 <a:solidFill>
                   <a:srgbClr val="2D3A2E"/>
                 </a:solidFill>
@@ -18550,53 +16026,14 @@
       </p:sp>
       <p:sp>
         <p:nvSpPr>
-          <p:cNvPr id="11" name="TextBox 10"/>
-          <p:cNvSpPr txBox="1"/>
-          <p:nvPr/>
-        </p:nvSpPr>
-        <p:spPr>
-          <a:xfrm>
-            <a:off x="7863840" y="2651760"/>
-            <a:ext cx="3520440" cy="365760"/>
-          </a:xfrm>
-          <a:prstGeom prst="rect">
-            <a:avLst/>
-          </a:prstGeom>
-          <a:noFill/>
-        </p:spPr>
-        <p:txBody>
-          <a:bodyPr wrap="square" lIns="0" rIns="0" tIns="0" bIns="0" anchor="t">
-            <a:spAutoFit/>
-          </a:bodyPr>
-          <a:lstStyle/>
-          <a:p>
-            <a:pPr algn="l">
-              <a:spcAft>
-                <a:spcPts val="500"/>
-              </a:spcAft>
-            </a:pPr>
-            <a:r>
-              <a:rPr sz="1300" b="1">
-                <a:solidFill>
-                  <a:srgbClr val="2A7A3B"/>
-                </a:solidFill>
-                <a:latin typeface="Calibri"/>
-              </a:rPr>
-              <a:t>Créez la fiche et donnez-lui la carte</a:t>
-            </a:r>
-          </a:p>
-        </p:txBody>
-      </p:sp>
-      <p:sp>
-        <p:nvSpPr>
-          <p:cNvPr id="12" name="Rounded Rectangle 11"/>
+          <p:cNvPr id="13" name="Rounded Rectangle 12"/>
           <p:cNvSpPr/>
           <p:nvPr/>
         </p:nvSpPr>
         <p:spPr>
           <a:xfrm>
             <a:off x="685800" y="3200400"/>
-            <a:ext cx="10789920" cy="676656"/>
+            <a:ext cx="6949440" cy="676656"/>
           </a:xfrm>
           <a:prstGeom prst="roundRect">
             <a:avLst>
@@ -18635,14 +16072,14 @@
       </p:sp>
       <p:sp>
         <p:nvSpPr>
-          <p:cNvPr id="13" name="TextBox 12"/>
+          <p:cNvPr id="14" name="TextBox 13"/>
           <p:cNvSpPr txBox="1"/>
           <p:nvPr/>
         </p:nvSpPr>
         <p:spPr>
           <a:xfrm>
             <a:off x="822960" y="3401568"/>
-            <a:ext cx="3611880" cy="365760"/>
+            <a:ext cx="3246120" cy="365760"/>
           </a:xfrm>
           <a:prstGeom prst="rect">
             <a:avLst/>
@@ -18661,7 +16098,7 @@
               </a:spcAft>
             </a:pPr>
             <a:r>
-              <a:rPr sz="1350" b="1">
+              <a:rPr sz="1300" b="1">
                 <a:solidFill>
                   <a:srgbClr val="D9463E"/>
                 </a:solidFill>
@@ -18674,14 +16111,14 @@
       </p:sp>
       <p:sp>
         <p:nvSpPr>
-          <p:cNvPr id="14" name="TextBox 13"/>
+          <p:cNvPr id="15" name="TextBox 14"/>
           <p:cNvSpPr txBox="1"/>
           <p:nvPr/>
         </p:nvSpPr>
         <p:spPr>
           <a:xfrm>
-            <a:off x="4572000" y="3401568"/>
-            <a:ext cx="3154680" cy="365760"/>
+            <a:off x="4206240" y="3401568"/>
+            <a:ext cx="2743200" cy="365760"/>
           </a:xfrm>
           <a:prstGeom prst="rect">
             <a:avLst/>
@@ -18700,52 +16137,13 @@
               </a:spcAft>
             </a:pPr>
             <a:r>
-              <a:rPr sz="1300" b="0">
+              <a:rPr sz="1250" b="0">
                 <a:solidFill>
                   <a:srgbClr val="2D3A2E"/>
                 </a:solidFill>
                 <a:latin typeface="Calibri"/>
               </a:rPr>
               <a:t>La carte a été déclarée perdue</a:t>
-            </a:r>
-          </a:p>
-        </p:txBody>
-      </p:sp>
-      <p:sp>
-        <p:nvSpPr>
-          <p:cNvPr id="15" name="TextBox 14"/>
-          <p:cNvSpPr txBox="1"/>
-          <p:nvPr/>
-        </p:nvSpPr>
-        <p:spPr>
-          <a:xfrm>
-            <a:off x="7863840" y="3401568"/>
-            <a:ext cx="3520440" cy="365760"/>
-          </a:xfrm>
-          <a:prstGeom prst="rect">
-            <a:avLst/>
-          </a:prstGeom>
-          <a:noFill/>
-        </p:spPr>
-        <p:txBody>
-          <a:bodyPr wrap="square" lIns="0" rIns="0" tIns="0" bIns="0" anchor="t">
-            <a:spAutoFit/>
-          </a:bodyPr>
-          <a:lstStyle/>
-          <a:p>
-            <a:pPr algn="l">
-              <a:spcAft>
-                <a:spcPts val="500"/>
-              </a:spcAft>
-            </a:pPr>
-            <a:r>
-              <a:rPr sz="1300" b="1">
-                <a:solidFill>
-                  <a:srgbClr val="2A7A3B"/>
-                </a:solidFill>
-                <a:latin typeface="Calibri"/>
-              </a:rPr>
-              <a:t>Le parent doit utiliser la nouvelle</a:t>
             </a:r>
           </a:p>
         </p:txBody>
@@ -18805,7 +16203,7 @@
         <p:spPr>
           <a:xfrm>
             <a:off x="822960" y="4151376"/>
-            <a:ext cx="3611880" cy="365760"/>
+            <a:ext cx="3246120" cy="365760"/>
           </a:xfrm>
           <a:prstGeom prst="rect">
             <a:avLst/>
@@ -18824,7 +16222,7 @@
               </a:spcAft>
             </a:pPr>
             <a:r>
-              <a:rPr sz="1350" b="1">
+              <a:rPr sz="1300" b="1">
                 <a:solidFill>
                   <a:srgbClr val="D9463E"/>
                 </a:solidFill>
@@ -18843,8 +16241,8 @@
         </p:nvSpPr>
         <p:spPr>
           <a:xfrm>
-            <a:off x="4572000" y="4151376"/>
-            <a:ext cx="3154680" cy="365760"/>
+            <a:off x="4206240" y="4151376"/>
+            <a:ext cx="2743200" cy="365760"/>
           </a:xfrm>
           <a:prstGeom prst="rect">
             <a:avLst/>
@@ -18863,7 +16261,7 @@
               </a:spcAft>
             </a:pPr>
             <a:r>
-              <a:rPr sz="1300" b="0">
+              <a:rPr sz="1250" b="0">
                 <a:solidFill>
                   <a:srgbClr val="2D3A2E"/>
                 </a:solidFill>
@@ -18902,7 +16300,7 @@
               </a:spcAft>
             </a:pPr>
             <a:r>
-              <a:rPr sz="1300" b="1">
+              <a:rPr sz="1250" b="1">
                 <a:solidFill>
                   <a:srgbClr val="2A7A3B"/>
                 </a:solidFill>
@@ -18968,7 +16366,7 @@
         <p:spPr>
           <a:xfrm>
             <a:off x="822960" y="4901184"/>
-            <a:ext cx="3611880" cy="365760"/>
+            <a:ext cx="3246120" cy="365760"/>
           </a:xfrm>
           <a:prstGeom prst="rect">
             <a:avLst/>
@@ -18987,7 +16385,7 @@
               </a:spcAft>
             </a:pPr>
             <a:r>
-              <a:rPr sz="1350" b="1">
+              <a:rPr sz="1300" b="1">
                 <a:solidFill>
                   <a:srgbClr val="D9463E"/>
                 </a:solidFill>
@@ -19006,8 +16404,8 @@
         </p:nvSpPr>
         <p:spPr>
           <a:xfrm>
-            <a:off x="4572000" y="4901184"/>
-            <a:ext cx="3154680" cy="365760"/>
+            <a:off x="4206240" y="4901184"/>
+            <a:ext cx="2743200" cy="365760"/>
           </a:xfrm>
           <a:prstGeom prst="rect">
             <a:avLst/>
@@ -19026,7 +16424,7 @@
               </a:spcAft>
             </a:pPr>
             <a:r>
-              <a:rPr sz="1300" b="0">
+              <a:rPr sz="1250" b="0">
                 <a:solidFill>
                   <a:srgbClr val="2D3A2E"/>
                 </a:solidFill>
@@ -19065,7 +16463,7 @@
               </a:spcAft>
             </a:pPr>
             <a:r>
-              <a:rPr sz="1300" b="1">
+              <a:rPr sz="1250" b="1">
                 <a:solidFill>
                   <a:srgbClr val="2A7A3B"/>
                 </a:solidFill>
@@ -19131,7 +16529,7 @@
         <p:spPr>
           <a:xfrm>
             <a:off x="822960" y="5650992"/>
-            <a:ext cx="3611880" cy="365760"/>
+            <a:ext cx="3246120" cy="365760"/>
           </a:xfrm>
           <a:prstGeom prst="rect">
             <a:avLst/>
@@ -19150,7 +16548,7 @@
               </a:spcAft>
             </a:pPr>
             <a:r>
-              <a:rPr sz="1350" b="1">
+              <a:rPr sz="1300" b="1">
                 <a:solidFill>
                   <a:srgbClr val="D9463E"/>
                 </a:solidFill>
@@ -19169,8 +16567,8 @@
         </p:nvSpPr>
         <p:spPr>
           <a:xfrm>
-            <a:off x="4572000" y="5650992"/>
-            <a:ext cx="3154680" cy="365760"/>
+            <a:off x="4206240" y="5650992"/>
+            <a:ext cx="2743200" cy="365760"/>
           </a:xfrm>
           <a:prstGeom prst="rect">
             <a:avLst/>
@@ -19189,7 +16587,7 @@
               </a:spcAft>
             </a:pPr>
             <a:r>
-              <a:rPr sz="1300" b="0">
+              <a:rPr sz="1250" b="0">
                 <a:solidFill>
                   <a:srgbClr val="2D3A2E"/>
                 </a:solidFill>
@@ -19228,7 +16626,7 @@
               </a:spcAft>
             </a:pPr>
             <a:r>
-              <a:rPr sz="1300" b="1">
+              <a:rPr sz="1250" b="1">
                 <a:solidFill>
                   <a:srgbClr val="2A7A3B"/>
                 </a:solidFill>
@@ -19242,6 +16640,108 @@
       <p:sp>
         <p:nvSpPr>
           <p:cNvPr id="28" name="TextBox 27"/>
+          <p:cNvSpPr txBox="1"/>
+          <p:nvPr/>
+        </p:nvSpPr>
+        <p:spPr>
+          <a:xfrm>
+            <a:off x="7863840" y="3639312"/>
+            <a:ext cx="3566160" cy="411480"/>
+          </a:xfrm>
+          <a:prstGeom prst="rect">
+            <a:avLst/>
+          </a:prstGeom>
+          <a:noFill/>
+        </p:spPr>
+        <p:txBody>
+          <a:bodyPr wrap="square" lIns="0" rIns="0" tIns="0" bIns="0" anchor="t">
+            <a:spAutoFit/>
+          </a:bodyPr>
+          <a:lstStyle/>
+          <a:p>
+            <a:pPr algn="l">
+              <a:lnSpc>
+                <a:spcPct val="115000"/>
+              </a:lnSpc>
+              <a:spcAft>
+                <a:spcPts val="500"/>
+              </a:spcAft>
+            </a:pPr>
+            <a:r>
+              <a:rPr sz="1150" b="1">
+                <a:solidFill>
+                  <a:srgbClr val="D9463E"/>
+                </a:solidFill>
+                <a:latin typeface="Calibri"/>
+              </a:rPr>
+              <a:t>Carte inconnue : </a:t>
+            </a:r>
+            <a:r>
+              <a:rPr sz="1150" b="1">
+                <a:solidFill>
+                  <a:srgbClr val="2A7A3B"/>
+                </a:solidFill>
+                <a:latin typeface="Calibri"/>
+              </a:rPr>
+              <a:t>Créez la fiche et donnez-lui la carte</a:t>
+            </a:r>
+          </a:p>
+        </p:txBody>
+      </p:sp>
+      <p:sp>
+        <p:nvSpPr>
+          <p:cNvPr id="29" name="TextBox 28"/>
+          <p:cNvSpPr txBox="1"/>
+          <p:nvPr/>
+        </p:nvSpPr>
+        <p:spPr>
+          <a:xfrm>
+            <a:off x="7863840" y="4142232"/>
+            <a:ext cx="3566160" cy="411480"/>
+          </a:xfrm>
+          <a:prstGeom prst="rect">
+            <a:avLst/>
+          </a:prstGeom>
+          <a:noFill/>
+        </p:spPr>
+        <p:txBody>
+          <a:bodyPr wrap="square" lIns="0" rIns="0" tIns="0" bIns="0" anchor="t">
+            <a:spAutoFit/>
+          </a:bodyPr>
+          <a:lstStyle/>
+          <a:p>
+            <a:pPr algn="l">
+              <a:lnSpc>
+                <a:spcPct val="115000"/>
+              </a:lnSpc>
+              <a:spcAft>
+                <a:spcPts val="500"/>
+              </a:spcAft>
+            </a:pPr>
+            <a:r>
+              <a:rPr sz="1150" b="1">
+                <a:solidFill>
+                  <a:srgbClr val="D9463E"/>
+                </a:solidFill>
+                <a:latin typeface="Calibri"/>
+              </a:rPr>
+              <a:t>Carte bloquée : </a:t>
+            </a:r>
+            <a:r>
+              <a:rPr sz="1150" b="1">
+                <a:solidFill>
+                  <a:srgbClr val="2A7A3B"/>
+                </a:solidFill>
+                <a:latin typeface="Calibri"/>
+              </a:rPr>
+              <a:t>Le parent doit utiliser la nouvelle</a:t>
+            </a:r>
+          </a:p>
+        </p:txBody>
+      </p:sp>
+      <p:sp>
+        <p:nvSpPr>
+          <p:cNvPr id="30" name="TextBox 29"/>
           <p:cNvSpPr txBox="1"/>
           <p:nvPr/>
         </p:nvSpPr>
